--- a/Slides/Mod09/MOD009-Planning.pptx
+++ b/Slides/Mod09/MOD009-Planning.pptx
@@ -5029,8 +5029,8 @@
           </a:effectLst>
         </p:spPr>
       </p:sp>
-      <mc:AlternateContent xmlns:mc="http://schemas.openxmlformats.org/markup-compatibility/2006" xmlns:a14="http://schemas.microsoft.com/office/drawing/2010/main">
-        <mc:Choice Requires="a14">
+      <mc:AlternateContent xmlns:mc="http://schemas.openxmlformats.org/markup-compatibility/2006">
+        <mc:Choice xmlns:a14="http://schemas.microsoft.com/office/drawing/2010/main" Requires="a14">
           <p:sp>
             <p:nvSpPr>
               <p:cNvPr id="6" name="Text 4"/>
@@ -5379,9 +5379,6 @@
                 <a:endParaRPr lang="en-US" sz="1400" dirty="0"/>
               </a:p>
               <a:p>
-                <a:pPr marL="0" indent="0">
-                  <a:buNone/>
-                </a:pPr>
                 <a14:m>
                   <m:oMathPara xmlns:m="http://schemas.openxmlformats.org/officeDocument/2006/math">
                     <m:oMathParaPr>
@@ -5625,22 +5622,21 @@
                                   </m:r>
                                 </m:num>
                                 <m:den>
-                                  <m:sSup>
-                                    <m:sSupPr>
+                                  <m:sSub>
+                                    <m:sSubPr>
                                       <m:ctrlPr>
                                         <a:rPr lang="en-US" sz="1400" b="1" i="1" dirty="0" smtClean="0">
                                           <a:solidFill>
                                             <a:srgbClr val="1E3A5F"/>
                                           </a:solidFill>
                                           <a:latin typeface="Cambria Math" panose="02040503050406030204" pitchFamily="18" charset="0"/>
-                                          <a:ea typeface="Arial" pitchFamily="34" charset="-122"/>
                                           <a:cs typeface="Arial" pitchFamily="34" charset="-120"/>
                                         </a:rPr>
                                       </m:ctrlPr>
-                                    </m:sSupPr>
+                                    </m:sSubPr>
                                     <m:e>
                                       <m:r>
-                                        <a:rPr lang="en-US" sz="1400" b="1" i="1" dirty="0" smtClean="0">
+                                        <a:rPr lang="de-DE" sz="1400" b="1" i="1" dirty="0">
                                           <a:solidFill>
                                             <a:srgbClr val="1E3A5F"/>
                                           </a:solidFill>
@@ -5651,20 +5647,19 @@
                                         <m:t>𝒅</m:t>
                                       </m:r>
                                     </m:e>
-                                    <m:sup>
+                                    <m:sub>
                                       <m:r>
-                                        <a:rPr lang="en-US" sz="1400" b="1" i="1" dirty="0" smtClean="0">
+                                        <a:rPr lang="de-DE" sz="1400" b="1" i="1" dirty="0" smtClean="0">
                                           <a:solidFill>
                                             <a:srgbClr val="1E3A5F"/>
                                           </a:solidFill>
                                           <a:latin typeface="Cambria Math" panose="02040503050406030204" pitchFamily="18" charset="0"/>
-                                          <a:ea typeface="Arial" pitchFamily="34" charset="-122"/>
                                           <a:cs typeface="Arial" pitchFamily="34" charset="-120"/>
                                         </a:rPr>
-                                        <m:t>0</m:t>
+                                        <m:t>𝒓𝒐</m:t>
                                       </m:r>
-                                    </m:sup>
-                                  </m:sSup>
+                                    </m:sub>
+                                  </m:sSub>
                                 </m:den>
                               </m:f>
                             </m:e>
@@ -5692,7 +5687,7 @@
             </p:txBody>
           </p:sp>
         </mc:Choice>
-        <mc:Fallback xmlns="">
+        <mc:Fallback>
           <p:sp>
             <p:nvSpPr>
               <p:cNvPr id="6" name="Text 4"/>
@@ -11313,136 +11308,758 @@
           </a:p>
         </p:txBody>
       </p:sp>
-      <p:sp>
-        <p:nvSpPr>
-          <p:cNvPr id="8" name="Text 6"/>
-          <p:cNvSpPr/>
-          <p:nvPr/>
-        </p:nvSpPr>
-        <p:spPr>
-          <a:xfrm>
-            <a:off x="438912" y="1078992"/>
-            <a:ext cx="8321040" cy="685800"/>
-          </a:xfrm>
-          <a:prstGeom prst="rect">
-            <a:avLst/>
-          </a:prstGeom>
-          <a:noFill/>
-          <a:ln/>
-        </p:spPr>
-        <p:txBody>
-          <a:bodyPr wrap="square" rtlCol="0" anchor="t"/>
-          <a:lstStyle/>
-          <a:p>
-            <a:pPr marL="342900" indent="-342900">
-              <a:buSzPct val="100000"/>
-              <a:buChar char="•"/>
-            </a:pPr>
-            <a:r>
-              <a:rPr lang="en-US" sz="1200" dirty="0">
-                <a:solidFill>
-                  <a:srgbClr val="6B7280"/>
-                </a:solidFill>
-                <a:latin typeface="Arial" pitchFamily="34" charset="0"/>
-                <a:ea typeface="Arial" pitchFamily="34" charset="-122"/>
-                <a:cs typeface="Arial" pitchFamily="34" charset="-120"/>
-              </a:rPr>
-              <a:t>1. Start with tree T = {start}</a:t>
-            </a:r>
-            <a:endParaRPr lang="en-US" sz="1200" dirty="0"/>
-          </a:p>
-          <a:p>
-            <a:pPr marL="342900" indent="-342900">
-              <a:buSzPct val="100000"/>
-              <a:buChar char="•"/>
-            </a:pPr>
-            <a:r>
-              <a:rPr lang="en-US" sz="1200" dirty="0">
-                <a:solidFill>
-                  <a:srgbClr val="6B7280"/>
-                </a:solidFill>
-                <a:latin typeface="Arial" pitchFamily="34" charset="0"/>
-                <a:ea typeface="Arial" pitchFamily="34" charset="-122"/>
-                <a:cs typeface="Arial" pitchFamily="34" charset="-120"/>
-              </a:rPr>
-              <a:t>2. Sample a RANDOM point x_rand in C-space</a:t>
-            </a:r>
-            <a:endParaRPr lang="en-US" sz="1200" dirty="0"/>
-          </a:p>
-          <a:p>
-            <a:pPr marL="342900" indent="-342900">
-              <a:buSzPct val="100000"/>
-              <a:buChar char="•"/>
-            </a:pPr>
-            <a:r>
-              <a:rPr lang="en-US" sz="1200" dirty="0">
-                <a:solidFill>
-                  <a:srgbClr val="6B7280"/>
-                </a:solidFill>
-                <a:latin typeface="Arial" pitchFamily="34" charset="0"/>
-                <a:ea typeface="Arial" pitchFamily="34" charset="-122"/>
-                <a:cs typeface="Arial" pitchFamily="34" charset="-120"/>
-              </a:rPr>
-              <a:t>3. Find the NEAREST node x_near in T to x_rand</a:t>
-            </a:r>
-            <a:endParaRPr lang="en-US" sz="1200" dirty="0"/>
-          </a:p>
-          <a:p>
-            <a:pPr marL="342900" indent="-342900">
-              <a:buSzPct val="100000"/>
-              <a:buChar char="•"/>
-            </a:pPr>
-            <a:r>
-              <a:rPr lang="en-US" sz="1200" dirty="0">
-                <a:solidFill>
-                  <a:srgbClr val="6B7280"/>
-                </a:solidFill>
-                <a:latin typeface="Arial" pitchFamily="34" charset="0"/>
-                <a:ea typeface="Arial" pitchFamily="34" charset="-122"/>
-                <a:cs typeface="Arial" pitchFamily="34" charset="-120"/>
-              </a:rPr>
-              <a:t>4. Extend from x_near TOWARD x_rand by step size δ → get x_new</a:t>
-            </a:r>
-            <a:endParaRPr lang="en-US" sz="1200" dirty="0"/>
-          </a:p>
-          <a:p>
-            <a:pPr marL="342900" indent="-342900">
-              <a:buSzPct val="100000"/>
-              <a:buChar char="•"/>
-            </a:pPr>
-            <a:r>
-              <a:rPr lang="en-US" sz="1200" dirty="0">
-                <a:solidFill>
-                  <a:srgbClr val="6B7280"/>
-                </a:solidFill>
-                <a:latin typeface="Arial" pitchFamily="34" charset="0"/>
-                <a:ea typeface="Arial" pitchFamily="34" charset="-122"/>
-                <a:cs typeface="Arial" pitchFamily="34" charset="-120"/>
-              </a:rPr>
-              <a:t>5. If the path x_near → x_new is collision-free: add x_new to T</a:t>
-            </a:r>
-            <a:endParaRPr lang="en-US" sz="1200" dirty="0"/>
-          </a:p>
-          <a:p>
-            <a:pPr marL="342900" indent="-342900">
-              <a:buSzPct val="100000"/>
-              <a:buChar char="•"/>
-            </a:pPr>
-            <a:r>
-              <a:rPr lang="en-US" sz="1200" dirty="0">
-                <a:solidFill>
-                  <a:srgbClr val="6B7280"/>
-                </a:solidFill>
-                <a:latin typeface="Arial" pitchFamily="34" charset="0"/>
-                <a:ea typeface="Arial" pitchFamily="34" charset="-122"/>
-                <a:cs typeface="Arial" pitchFamily="34" charset="-120"/>
-              </a:rPr>
-              <a:t>6. If x_new is near the goal: connect and DONE! Otherwise: repeat from 2.</a:t>
-            </a:r>
-            <a:endParaRPr lang="en-US" sz="1200" dirty="0"/>
-          </a:p>
-        </p:txBody>
-      </p:sp>
+      <mc:AlternateContent xmlns:mc="http://schemas.openxmlformats.org/markup-compatibility/2006">
+        <mc:Choice xmlns:a14="http://schemas.microsoft.com/office/drawing/2010/main" Requires="a14">
+          <p:sp>
+            <p:nvSpPr>
+              <p:cNvPr id="8" name="Text 6"/>
+              <p:cNvSpPr/>
+              <p:nvPr/>
+            </p:nvSpPr>
+            <p:spPr>
+              <a:xfrm>
+                <a:off x="438912" y="1078991"/>
+                <a:ext cx="8321040" cy="1245281"/>
+              </a:xfrm>
+              <a:prstGeom prst="rect">
+                <a:avLst/>
+              </a:prstGeom>
+              <a:noFill/>
+              <a:ln/>
+            </p:spPr>
+            <p:txBody>
+              <a:bodyPr wrap="square" rtlCol="0" anchor="t"/>
+              <a:lstStyle/>
+              <a:p>
+                <a:pPr marL="342900" indent="-342900">
+                  <a:buSzPct val="100000"/>
+                  <a:buChar char="•"/>
+                </a:pPr>
+                <a:r>
+                  <a:rPr lang="en-US" sz="1200" dirty="0">
+                    <a:solidFill>
+                      <a:srgbClr val="6B7280"/>
+                    </a:solidFill>
+                    <a:latin typeface="Arial" pitchFamily="34" charset="0"/>
+                    <a:ea typeface="Arial" pitchFamily="34" charset="-122"/>
+                    <a:cs typeface="Arial" pitchFamily="34" charset="-120"/>
+                  </a:rPr>
+                  <a:t>1. Start with tree </a:t>
+                </a:r>
+                <a14:m>
+                  <m:oMath xmlns:m="http://schemas.openxmlformats.org/officeDocument/2006/math">
+                    <m:r>
+                      <a:rPr lang="en-US" sz="1200" i="1" dirty="0" smtClean="0">
+                        <a:solidFill>
+                          <a:srgbClr val="6B7280"/>
+                        </a:solidFill>
+                        <a:latin typeface="Cambria Math" panose="02040503050406030204" pitchFamily="18" charset="0"/>
+                        <a:ea typeface="Arial" pitchFamily="34" charset="-122"/>
+                        <a:cs typeface="Arial" pitchFamily="34" charset="-120"/>
+                      </a:rPr>
+                      <m:t>𝑇</m:t>
+                    </m:r>
+                    <m:r>
+                      <a:rPr lang="en-US" sz="1200" i="1" dirty="0" smtClean="0">
+                        <a:solidFill>
+                          <a:srgbClr val="6B7280"/>
+                        </a:solidFill>
+                        <a:latin typeface="Cambria Math" panose="02040503050406030204" pitchFamily="18" charset="0"/>
+                        <a:ea typeface="Arial" pitchFamily="34" charset="-122"/>
+                        <a:cs typeface="Arial" pitchFamily="34" charset="-120"/>
+                      </a:rPr>
+                      <m:t> = </m:t>
+                    </m:r>
+                    <m:d>
+                      <m:dPr>
+                        <m:begChr m:val="{"/>
+                        <m:endChr m:val="}"/>
+                        <m:ctrlPr>
+                          <a:rPr lang="en-US" sz="1200" i="1" dirty="0" smtClean="0">
+                            <a:solidFill>
+                              <a:srgbClr val="6B7280"/>
+                            </a:solidFill>
+                            <a:latin typeface="Cambria Math" panose="02040503050406030204" pitchFamily="18" charset="0"/>
+                            <a:ea typeface="Arial" pitchFamily="34" charset="-122"/>
+                            <a:cs typeface="Arial" pitchFamily="34" charset="-120"/>
+                          </a:rPr>
+                        </m:ctrlPr>
+                      </m:dPr>
+                      <m:e>
+                        <m:r>
+                          <a:rPr lang="en-US" sz="1200" i="1" dirty="0" smtClean="0">
+                            <a:solidFill>
+                              <a:srgbClr val="6B7280"/>
+                            </a:solidFill>
+                            <a:latin typeface="Cambria Math" panose="02040503050406030204" pitchFamily="18" charset="0"/>
+                            <a:ea typeface="Arial" pitchFamily="34" charset="-122"/>
+                            <a:cs typeface="Arial" pitchFamily="34" charset="-120"/>
+                          </a:rPr>
+                          <m:t>𝑠𝑡𝑎𝑟𝑡</m:t>
+                        </m:r>
+                      </m:e>
+                    </m:d>
+                  </m:oMath>
+                </a14:m>
+                <a:endParaRPr lang="en-US" sz="1200" dirty="0"/>
+              </a:p>
+              <a:p>
+                <a:pPr marL="342900" indent="-342900">
+                  <a:buSzPct val="100000"/>
+                  <a:buChar char="•"/>
+                </a:pPr>
+                <a:r>
+                  <a:rPr lang="en-US" sz="1200" dirty="0">
+                    <a:solidFill>
+                      <a:srgbClr val="6B7280"/>
+                    </a:solidFill>
+                    <a:latin typeface="Arial" pitchFamily="34" charset="0"/>
+                    <a:ea typeface="Arial" pitchFamily="34" charset="-122"/>
+                    <a:cs typeface="Arial" pitchFamily="34" charset="-120"/>
+                  </a:rPr>
+                  <a:t>2. Sample a RANDOM point </a:t>
+                </a:r>
+                <a14:m>
+                  <m:oMath xmlns:m="http://schemas.openxmlformats.org/officeDocument/2006/math">
+                    <m:sSub>
+                      <m:sSubPr>
+                        <m:ctrlPr>
+                          <a:rPr lang="en-US" sz="1200" i="1" dirty="0" smtClean="0">
+                            <a:solidFill>
+                              <a:srgbClr val="6B7280"/>
+                            </a:solidFill>
+                            <a:latin typeface="Cambria Math" panose="02040503050406030204" pitchFamily="18" charset="0"/>
+                            <a:ea typeface="Arial" pitchFamily="34" charset="-122"/>
+                            <a:cs typeface="Arial" pitchFamily="34" charset="-120"/>
+                          </a:rPr>
+                        </m:ctrlPr>
+                      </m:sSubPr>
+                      <m:e>
+                        <m:r>
+                          <a:rPr lang="en-US" sz="1200" i="1" dirty="0" smtClean="0">
+                            <a:solidFill>
+                              <a:srgbClr val="6B7280"/>
+                            </a:solidFill>
+                            <a:latin typeface="Cambria Math" panose="02040503050406030204" pitchFamily="18" charset="0"/>
+                            <a:ea typeface="Arial" pitchFamily="34" charset="-122"/>
+                            <a:cs typeface="Arial" pitchFamily="34" charset="-120"/>
+                          </a:rPr>
+                          <m:t>𝑥</m:t>
+                        </m:r>
+                      </m:e>
+                      <m:sub>
+                        <m:r>
+                          <a:rPr lang="en-US" sz="1200" i="1" dirty="0" smtClean="0">
+                            <a:solidFill>
+                              <a:srgbClr val="6B7280"/>
+                            </a:solidFill>
+                            <a:latin typeface="Cambria Math" panose="02040503050406030204" pitchFamily="18" charset="0"/>
+                            <a:ea typeface="Arial" pitchFamily="34" charset="-122"/>
+                            <a:cs typeface="Arial" pitchFamily="34" charset="-120"/>
+                          </a:rPr>
+                          <m:t>𝑟𝑎𝑛𝑑</m:t>
+                        </m:r>
+                      </m:sub>
+                    </m:sSub>
+                  </m:oMath>
+                </a14:m>
+                <a:r>
+                  <a:rPr lang="en-US" sz="1200" dirty="0">
+                    <a:solidFill>
+                      <a:srgbClr val="6B7280"/>
+                    </a:solidFill>
+                    <a:latin typeface="Arial" pitchFamily="34" charset="0"/>
+                    <a:ea typeface="Arial" pitchFamily="34" charset="-122"/>
+                    <a:cs typeface="Arial" pitchFamily="34" charset="-120"/>
+                  </a:rPr>
+                  <a:t>in C-space</a:t>
+                </a:r>
+                <a:endParaRPr lang="en-US" sz="1200" dirty="0"/>
+              </a:p>
+              <a:p>
+                <a:pPr marL="342900" indent="-342900">
+                  <a:buSzPct val="100000"/>
+                  <a:buChar char="•"/>
+                </a:pPr>
+                <a:r>
+                  <a:rPr lang="en-US" sz="1200" dirty="0">
+                    <a:solidFill>
+                      <a:srgbClr val="6B7280"/>
+                    </a:solidFill>
+                    <a:latin typeface="Arial" pitchFamily="34" charset="0"/>
+                    <a:ea typeface="Arial" pitchFamily="34" charset="-122"/>
+                    <a:cs typeface="Arial" pitchFamily="34" charset="-120"/>
+                  </a:rPr>
+                  <a:t>3. Find the NEAREST node </a:t>
+                </a:r>
+                <a14:m>
+                  <m:oMath xmlns:m="http://schemas.openxmlformats.org/officeDocument/2006/math">
+                    <m:sSub>
+                      <m:sSubPr>
+                        <m:ctrlPr>
+                          <a:rPr lang="en-US" sz="1200" i="1" dirty="0" smtClean="0">
+                            <a:solidFill>
+                              <a:srgbClr val="6B7280"/>
+                            </a:solidFill>
+                            <a:latin typeface="Cambria Math" panose="02040503050406030204" pitchFamily="18" charset="0"/>
+                            <a:ea typeface="Arial" pitchFamily="34" charset="-122"/>
+                            <a:cs typeface="Arial" pitchFamily="34" charset="-120"/>
+                          </a:rPr>
+                        </m:ctrlPr>
+                      </m:sSubPr>
+                      <m:e>
+                        <m:r>
+                          <a:rPr lang="en-US" sz="1200" i="1" dirty="0" smtClean="0">
+                            <a:solidFill>
+                              <a:srgbClr val="6B7280"/>
+                            </a:solidFill>
+                            <a:latin typeface="Cambria Math" panose="02040503050406030204" pitchFamily="18" charset="0"/>
+                            <a:ea typeface="Arial" pitchFamily="34" charset="-122"/>
+                            <a:cs typeface="Arial" pitchFamily="34" charset="-120"/>
+                          </a:rPr>
+                          <m:t>𝑥</m:t>
+                        </m:r>
+                      </m:e>
+                      <m:sub>
+                        <m:r>
+                          <a:rPr lang="en-US" sz="1200" i="1" dirty="0" smtClean="0">
+                            <a:solidFill>
+                              <a:srgbClr val="6B7280"/>
+                            </a:solidFill>
+                            <a:latin typeface="Cambria Math" panose="02040503050406030204" pitchFamily="18" charset="0"/>
+                            <a:ea typeface="Arial" pitchFamily="34" charset="-122"/>
+                            <a:cs typeface="Arial" pitchFamily="34" charset="-120"/>
+                          </a:rPr>
+                          <m:t>𝑛𝑒𝑎𝑟</m:t>
+                        </m:r>
+                      </m:sub>
+                    </m:sSub>
+                  </m:oMath>
+                </a14:m>
+                <a:r>
+                  <a:rPr lang="en-US" sz="1200" dirty="0">
+                    <a:solidFill>
+                      <a:srgbClr val="6B7280"/>
+                    </a:solidFill>
+                    <a:latin typeface="Arial" pitchFamily="34" charset="0"/>
+                    <a:ea typeface="Arial" pitchFamily="34" charset="-122"/>
+                    <a:cs typeface="Arial" pitchFamily="34" charset="-120"/>
+                  </a:rPr>
+                  <a:t> in T to </a:t>
+                </a:r>
+                <a14:m>
+                  <m:oMath xmlns:m="http://schemas.openxmlformats.org/officeDocument/2006/math">
+                    <m:sSub>
+                      <m:sSubPr>
+                        <m:ctrlPr>
+                          <a:rPr lang="en-US" sz="1200" i="1" dirty="0" smtClean="0">
+                            <a:solidFill>
+                              <a:srgbClr val="6B7280"/>
+                            </a:solidFill>
+                            <a:latin typeface="Cambria Math" panose="02040503050406030204" pitchFamily="18" charset="0"/>
+                            <a:ea typeface="Arial" pitchFamily="34" charset="-122"/>
+                            <a:cs typeface="Arial" pitchFamily="34" charset="-120"/>
+                          </a:rPr>
+                        </m:ctrlPr>
+                      </m:sSubPr>
+                      <m:e>
+                        <m:r>
+                          <a:rPr lang="en-US" sz="1200" i="1" dirty="0" smtClean="0">
+                            <a:solidFill>
+                              <a:srgbClr val="6B7280"/>
+                            </a:solidFill>
+                            <a:latin typeface="Cambria Math" panose="02040503050406030204" pitchFamily="18" charset="0"/>
+                            <a:ea typeface="Arial" pitchFamily="34" charset="-122"/>
+                            <a:cs typeface="Arial" pitchFamily="34" charset="-120"/>
+                          </a:rPr>
+                          <m:t>𝑥</m:t>
+                        </m:r>
+                      </m:e>
+                      <m:sub>
+                        <m:r>
+                          <a:rPr lang="en-US" sz="1200" i="1" dirty="0" smtClean="0">
+                            <a:solidFill>
+                              <a:srgbClr val="6B7280"/>
+                            </a:solidFill>
+                            <a:latin typeface="Cambria Math" panose="02040503050406030204" pitchFamily="18" charset="0"/>
+                            <a:ea typeface="Arial" pitchFamily="34" charset="-122"/>
+                            <a:cs typeface="Arial" pitchFamily="34" charset="-120"/>
+                          </a:rPr>
+                          <m:t>𝑟𝑎𝑛𝑑</m:t>
+                        </m:r>
+                      </m:sub>
+                    </m:sSub>
+                  </m:oMath>
+                </a14:m>
+                <a:endParaRPr lang="en-US" sz="1200" dirty="0"/>
+              </a:p>
+              <a:p>
+                <a:pPr marL="342900" indent="-342900">
+                  <a:buSzPct val="100000"/>
+                  <a:buChar char="•"/>
+                </a:pPr>
+                <a:r>
+                  <a:rPr lang="en-US" sz="1200" dirty="0">
+                    <a:solidFill>
+                      <a:srgbClr val="6B7280"/>
+                    </a:solidFill>
+                    <a:latin typeface="Arial" pitchFamily="34" charset="0"/>
+                    <a:ea typeface="Arial" pitchFamily="34" charset="-122"/>
+                    <a:cs typeface="Arial" pitchFamily="34" charset="-120"/>
+                  </a:rPr>
+                  <a:t>4. Extend from </a:t>
+                </a:r>
+                <a14:m>
+                  <m:oMath xmlns:m="http://schemas.openxmlformats.org/officeDocument/2006/math">
+                    <m:sSub>
+                      <m:sSubPr>
+                        <m:ctrlPr>
+                          <a:rPr lang="en-US" sz="1200" i="1" dirty="0" smtClean="0">
+                            <a:solidFill>
+                              <a:srgbClr val="6B7280"/>
+                            </a:solidFill>
+                            <a:latin typeface="Cambria Math" panose="02040503050406030204" pitchFamily="18" charset="0"/>
+                            <a:ea typeface="Arial" pitchFamily="34" charset="-122"/>
+                            <a:cs typeface="Arial" pitchFamily="34" charset="-120"/>
+                          </a:rPr>
+                        </m:ctrlPr>
+                      </m:sSubPr>
+                      <m:e>
+                        <m:r>
+                          <a:rPr lang="en-US" sz="1200" i="1" dirty="0" smtClean="0">
+                            <a:solidFill>
+                              <a:srgbClr val="6B7280"/>
+                            </a:solidFill>
+                            <a:latin typeface="Cambria Math" panose="02040503050406030204" pitchFamily="18" charset="0"/>
+                            <a:ea typeface="Arial" pitchFamily="34" charset="-122"/>
+                            <a:cs typeface="Arial" pitchFamily="34" charset="-120"/>
+                          </a:rPr>
+                          <m:t>𝑥</m:t>
+                        </m:r>
+                      </m:e>
+                      <m:sub>
+                        <m:r>
+                          <a:rPr lang="en-US" sz="1200" i="1" dirty="0" smtClean="0">
+                            <a:solidFill>
+                              <a:srgbClr val="6B7280"/>
+                            </a:solidFill>
+                            <a:latin typeface="Cambria Math" panose="02040503050406030204" pitchFamily="18" charset="0"/>
+                            <a:ea typeface="Arial" pitchFamily="34" charset="-122"/>
+                            <a:cs typeface="Arial" pitchFamily="34" charset="-120"/>
+                          </a:rPr>
+                          <m:t>𝑛𝑒𝑎𝑟</m:t>
+                        </m:r>
+                      </m:sub>
+                    </m:sSub>
+                  </m:oMath>
+                </a14:m>
+                <a:r>
+                  <a:rPr lang="en-US" sz="1200" dirty="0">
+                    <a:solidFill>
+                      <a:srgbClr val="6B7280"/>
+                    </a:solidFill>
+                    <a:latin typeface="Arial" pitchFamily="34" charset="0"/>
+                    <a:ea typeface="Arial" pitchFamily="34" charset="-122"/>
+                    <a:cs typeface="Arial" pitchFamily="34" charset="-120"/>
+                  </a:rPr>
+                  <a:t>TOWARD </a:t>
+                </a:r>
+                <a14:m>
+                  <m:oMath xmlns:m="http://schemas.openxmlformats.org/officeDocument/2006/math">
+                    <m:sSub>
+                      <m:sSubPr>
+                        <m:ctrlPr>
+                          <a:rPr lang="en-US" sz="1200" i="1" dirty="0" smtClean="0">
+                            <a:solidFill>
+                              <a:srgbClr val="6B7280"/>
+                            </a:solidFill>
+                            <a:latin typeface="Cambria Math" panose="02040503050406030204" pitchFamily="18" charset="0"/>
+                            <a:ea typeface="Arial" pitchFamily="34" charset="-122"/>
+                            <a:cs typeface="Arial" pitchFamily="34" charset="-120"/>
+                          </a:rPr>
+                        </m:ctrlPr>
+                      </m:sSubPr>
+                      <m:e>
+                        <m:r>
+                          <a:rPr lang="en-US" sz="1200" i="1" dirty="0" smtClean="0">
+                            <a:solidFill>
+                              <a:srgbClr val="6B7280"/>
+                            </a:solidFill>
+                            <a:latin typeface="Cambria Math" panose="02040503050406030204" pitchFamily="18" charset="0"/>
+                            <a:ea typeface="Arial" pitchFamily="34" charset="-122"/>
+                            <a:cs typeface="Arial" pitchFamily="34" charset="-120"/>
+                          </a:rPr>
+                          <m:t>𝑥</m:t>
+                        </m:r>
+                      </m:e>
+                      <m:sub>
+                        <m:r>
+                          <a:rPr lang="en-US" sz="1200" i="1" dirty="0" smtClean="0">
+                            <a:solidFill>
+                              <a:srgbClr val="6B7280"/>
+                            </a:solidFill>
+                            <a:latin typeface="Cambria Math" panose="02040503050406030204" pitchFamily="18" charset="0"/>
+                            <a:ea typeface="Arial" pitchFamily="34" charset="-122"/>
+                            <a:cs typeface="Arial" pitchFamily="34" charset="-120"/>
+                          </a:rPr>
+                          <m:t>𝑟𝑎𝑛𝑑</m:t>
+                        </m:r>
+                      </m:sub>
+                    </m:sSub>
+                  </m:oMath>
+                </a14:m>
+                <a:r>
+                  <a:rPr lang="en-US" sz="1200" dirty="0">
+                    <a:solidFill>
+                      <a:srgbClr val="6B7280"/>
+                    </a:solidFill>
+                    <a:latin typeface="Arial" pitchFamily="34" charset="0"/>
+                    <a:ea typeface="Arial" pitchFamily="34" charset="-122"/>
+                    <a:cs typeface="Arial" pitchFamily="34" charset="-120"/>
+                  </a:rPr>
+                  <a:t> by step size δ → get </a:t>
+                </a:r>
+                <a14:m>
+                  <m:oMath xmlns:m="http://schemas.openxmlformats.org/officeDocument/2006/math">
+                    <m:sSub>
+                      <m:sSubPr>
+                        <m:ctrlPr>
+                          <a:rPr lang="en-US" sz="1200" i="1" dirty="0" smtClean="0">
+                            <a:solidFill>
+                              <a:srgbClr val="6B7280"/>
+                            </a:solidFill>
+                            <a:latin typeface="Cambria Math" panose="02040503050406030204" pitchFamily="18" charset="0"/>
+                            <a:ea typeface="Arial" pitchFamily="34" charset="-122"/>
+                            <a:cs typeface="Arial" pitchFamily="34" charset="-120"/>
+                          </a:rPr>
+                        </m:ctrlPr>
+                      </m:sSubPr>
+                      <m:e>
+                        <m:r>
+                          <a:rPr lang="en-US" sz="1200" i="1" dirty="0" smtClean="0">
+                            <a:solidFill>
+                              <a:srgbClr val="6B7280"/>
+                            </a:solidFill>
+                            <a:latin typeface="Cambria Math" panose="02040503050406030204" pitchFamily="18" charset="0"/>
+                            <a:ea typeface="Arial" pitchFamily="34" charset="-122"/>
+                            <a:cs typeface="Arial" pitchFamily="34" charset="-120"/>
+                          </a:rPr>
+                          <m:t>𝑥</m:t>
+                        </m:r>
+                      </m:e>
+                      <m:sub>
+                        <m:r>
+                          <a:rPr lang="en-US" sz="1200" i="1" dirty="0" smtClean="0">
+                            <a:solidFill>
+                              <a:srgbClr val="6B7280"/>
+                            </a:solidFill>
+                            <a:latin typeface="Cambria Math" panose="02040503050406030204" pitchFamily="18" charset="0"/>
+                            <a:ea typeface="Arial" pitchFamily="34" charset="-122"/>
+                            <a:cs typeface="Arial" pitchFamily="34" charset="-120"/>
+                          </a:rPr>
+                          <m:t>𝑛𝑒𝑤</m:t>
+                        </m:r>
+                      </m:sub>
+                    </m:sSub>
+                  </m:oMath>
+                </a14:m>
+                <a:endParaRPr lang="en-US" sz="1200" dirty="0"/>
+              </a:p>
+              <a:p>
+                <a:pPr marL="342900" indent="-342900">
+                  <a:buSzPct val="100000"/>
+                  <a:buChar char="•"/>
+                </a:pPr>
+                <a:r>
+                  <a:rPr lang="en-US" sz="1200" dirty="0">
+                    <a:solidFill>
+                      <a:srgbClr val="6B7280"/>
+                    </a:solidFill>
+                    <a:latin typeface="Arial" pitchFamily="34" charset="0"/>
+                    <a:ea typeface="Arial" pitchFamily="34" charset="-122"/>
+                    <a:cs typeface="Arial" pitchFamily="34" charset="-120"/>
+                  </a:rPr>
+                  <a:t>5. If the path </a:t>
+                </a:r>
+                <a14:m>
+                  <m:oMath xmlns:m="http://schemas.openxmlformats.org/officeDocument/2006/math">
+                    <m:sSub>
+                      <m:sSubPr>
+                        <m:ctrlPr>
+                          <a:rPr lang="en-US" sz="1200" i="1" dirty="0" smtClean="0">
+                            <a:solidFill>
+                              <a:srgbClr val="6B7280"/>
+                            </a:solidFill>
+                            <a:latin typeface="Cambria Math" panose="02040503050406030204" pitchFamily="18" charset="0"/>
+                            <a:ea typeface="Arial" pitchFamily="34" charset="-122"/>
+                            <a:cs typeface="Arial" pitchFamily="34" charset="-120"/>
+                          </a:rPr>
+                        </m:ctrlPr>
+                      </m:sSubPr>
+                      <m:e>
+                        <m:r>
+                          <a:rPr lang="en-US" sz="1200" i="1" dirty="0" smtClean="0">
+                            <a:solidFill>
+                              <a:srgbClr val="6B7280"/>
+                            </a:solidFill>
+                            <a:latin typeface="Cambria Math" panose="02040503050406030204" pitchFamily="18" charset="0"/>
+                            <a:ea typeface="Arial" pitchFamily="34" charset="-122"/>
+                            <a:cs typeface="Arial" pitchFamily="34" charset="-120"/>
+                          </a:rPr>
+                          <m:t>𝑥</m:t>
+                        </m:r>
+                      </m:e>
+                      <m:sub>
+                        <m:r>
+                          <a:rPr lang="en-US" sz="1200" i="1" dirty="0" smtClean="0">
+                            <a:solidFill>
+                              <a:srgbClr val="6B7280"/>
+                            </a:solidFill>
+                            <a:latin typeface="Cambria Math" panose="02040503050406030204" pitchFamily="18" charset="0"/>
+                            <a:ea typeface="Arial" pitchFamily="34" charset="-122"/>
+                            <a:cs typeface="Arial" pitchFamily="34" charset="-120"/>
+                          </a:rPr>
+                          <m:t>𝑛𝑒𝑎𝑟</m:t>
+                        </m:r>
+                      </m:sub>
+                    </m:sSub>
+                    <m:r>
+                      <a:rPr lang="en-US" sz="1200" i="1" dirty="0" smtClean="0">
+                        <a:solidFill>
+                          <a:srgbClr val="6B7280"/>
+                        </a:solidFill>
+                        <a:latin typeface="Cambria Math" panose="02040503050406030204" pitchFamily="18" charset="0"/>
+                        <a:ea typeface="Arial" pitchFamily="34" charset="-122"/>
+                        <a:cs typeface="Arial" pitchFamily="34" charset="-120"/>
+                      </a:rPr>
+                      <m:t>→ </m:t>
+                    </m:r>
+                    <m:sSub>
+                      <m:sSubPr>
+                        <m:ctrlPr>
+                          <a:rPr lang="en-US" sz="1200" i="1" dirty="0" smtClean="0">
+                            <a:solidFill>
+                              <a:srgbClr val="6B7280"/>
+                            </a:solidFill>
+                            <a:latin typeface="Cambria Math" panose="02040503050406030204" pitchFamily="18" charset="0"/>
+                            <a:ea typeface="Arial" pitchFamily="34" charset="-122"/>
+                            <a:cs typeface="Arial" pitchFamily="34" charset="-120"/>
+                          </a:rPr>
+                        </m:ctrlPr>
+                      </m:sSubPr>
+                      <m:e>
+                        <m:r>
+                          <a:rPr lang="en-US" sz="1200" i="1" dirty="0" smtClean="0">
+                            <a:solidFill>
+                              <a:srgbClr val="6B7280"/>
+                            </a:solidFill>
+                            <a:latin typeface="Cambria Math" panose="02040503050406030204" pitchFamily="18" charset="0"/>
+                            <a:ea typeface="Arial" pitchFamily="34" charset="-122"/>
+                            <a:cs typeface="Arial" pitchFamily="34" charset="-120"/>
+                          </a:rPr>
+                          <m:t>𝑥</m:t>
+                        </m:r>
+                      </m:e>
+                      <m:sub>
+                        <m:r>
+                          <a:rPr lang="en-US" sz="1200" i="1" dirty="0" smtClean="0">
+                            <a:solidFill>
+                              <a:srgbClr val="6B7280"/>
+                            </a:solidFill>
+                            <a:latin typeface="Cambria Math" panose="02040503050406030204" pitchFamily="18" charset="0"/>
+                            <a:ea typeface="Arial" pitchFamily="34" charset="-122"/>
+                            <a:cs typeface="Arial" pitchFamily="34" charset="-120"/>
+                          </a:rPr>
+                          <m:t>𝑛𝑒𝑤</m:t>
+                        </m:r>
+                      </m:sub>
+                    </m:sSub>
+                  </m:oMath>
+                </a14:m>
+                <a:r>
+                  <a:rPr lang="en-US" sz="1200" dirty="0">
+                    <a:solidFill>
+                      <a:srgbClr val="6B7280"/>
+                    </a:solidFill>
+                    <a:latin typeface="Arial" pitchFamily="34" charset="0"/>
+                    <a:ea typeface="Arial" pitchFamily="34" charset="-122"/>
+                    <a:cs typeface="Arial" pitchFamily="34" charset="-120"/>
+                  </a:rPr>
+                  <a:t> is collision-free: add </a:t>
+                </a:r>
+                <a14:m>
+                  <m:oMath xmlns:m="http://schemas.openxmlformats.org/officeDocument/2006/math">
+                    <m:sSub>
+                      <m:sSubPr>
+                        <m:ctrlPr>
+                          <a:rPr lang="en-US" sz="1200" i="1" dirty="0" smtClean="0">
+                            <a:solidFill>
+                              <a:srgbClr val="6B7280"/>
+                            </a:solidFill>
+                            <a:latin typeface="Cambria Math" panose="02040503050406030204" pitchFamily="18" charset="0"/>
+                            <a:ea typeface="Arial" pitchFamily="34" charset="-122"/>
+                            <a:cs typeface="Arial" pitchFamily="34" charset="-120"/>
+                          </a:rPr>
+                        </m:ctrlPr>
+                      </m:sSubPr>
+                      <m:e>
+                        <m:r>
+                          <a:rPr lang="en-US" sz="1200" i="1" dirty="0" smtClean="0">
+                            <a:solidFill>
+                              <a:srgbClr val="6B7280"/>
+                            </a:solidFill>
+                            <a:latin typeface="Cambria Math" panose="02040503050406030204" pitchFamily="18" charset="0"/>
+                            <a:ea typeface="Arial" pitchFamily="34" charset="-122"/>
+                            <a:cs typeface="Arial" pitchFamily="34" charset="-120"/>
+                          </a:rPr>
+                          <m:t>𝑥</m:t>
+                        </m:r>
+                      </m:e>
+                      <m:sub>
+                        <m:r>
+                          <a:rPr lang="en-US" sz="1200" i="1" dirty="0" smtClean="0">
+                            <a:solidFill>
+                              <a:srgbClr val="6B7280"/>
+                            </a:solidFill>
+                            <a:latin typeface="Cambria Math" panose="02040503050406030204" pitchFamily="18" charset="0"/>
+                            <a:ea typeface="Arial" pitchFamily="34" charset="-122"/>
+                            <a:cs typeface="Arial" pitchFamily="34" charset="-120"/>
+                          </a:rPr>
+                          <m:t>𝑛𝑒𝑤</m:t>
+                        </m:r>
+                      </m:sub>
+                    </m:sSub>
+                  </m:oMath>
+                </a14:m>
+                <a:r>
+                  <a:rPr lang="en-US" sz="1200" dirty="0">
+                    <a:solidFill>
+                      <a:srgbClr val="6B7280"/>
+                    </a:solidFill>
+                    <a:latin typeface="Arial" pitchFamily="34" charset="0"/>
+                    <a:ea typeface="Arial" pitchFamily="34" charset="-122"/>
+                    <a:cs typeface="Arial" pitchFamily="34" charset="-120"/>
+                  </a:rPr>
+                  <a:t> to T</a:t>
+                </a:r>
+                <a:endParaRPr lang="en-US" sz="1200" dirty="0"/>
+              </a:p>
+              <a:p>
+                <a:pPr marL="342900" indent="-342900">
+                  <a:buSzPct val="100000"/>
+                  <a:buChar char="•"/>
+                </a:pPr>
+                <a:r>
+                  <a:rPr lang="en-US" sz="1200" dirty="0">
+                    <a:solidFill>
+                      <a:srgbClr val="6B7280"/>
+                    </a:solidFill>
+                    <a:latin typeface="Arial" pitchFamily="34" charset="0"/>
+                    <a:ea typeface="Arial" pitchFamily="34" charset="-122"/>
+                    <a:cs typeface="Arial" pitchFamily="34" charset="-120"/>
+                  </a:rPr>
+                  <a:t>6. If </a:t>
+                </a:r>
+                <a14:m>
+                  <m:oMath xmlns:m="http://schemas.openxmlformats.org/officeDocument/2006/math">
+                    <m:sSub>
+                      <m:sSubPr>
+                        <m:ctrlPr>
+                          <a:rPr lang="en-US" sz="1200" i="1" dirty="0" smtClean="0">
+                            <a:solidFill>
+                              <a:srgbClr val="6B7280"/>
+                            </a:solidFill>
+                            <a:latin typeface="Cambria Math" panose="02040503050406030204" pitchFamily="18" charset="0"/>
+                            <a:ea typeface="Arial" pitchFamily="34" charset="-122"/>
+                            <a:cs typeface="Arial" pitchFamily="34" charset="-120"/>
+                          </a:rPr>
+                        </m:ctrlPr>
+                      </m:sSubPr>
+                      <m:e>
+                        <m:r>
+                          <a:rPr lang="en-US" sz="1200" i="1" dirty="0" smtClean="0">
+                            <a:solidFill>
+                              <a:srgbClr val="6B7280"/>
+                            </a:solidFill>
+                            <a:latin typeface="Cambria Math" panose="02040503050406030204" pitchFamily="18" charset="0"/>
+                            <a:ea typeface="Arial" pitchFamily="34" charset="-122"/>
+                            <a:cs typeface="Arial" pitchFamily="34" charset="-120"/>
+                          </a:rPr>
+                          <m:t>𝑥</m:t>
+                        </m:r>
+                      </m:e>
+                      <m:sub>
+                        <m:r>
+                          <a:rPr lang="en-US" sz="1200" i="1" dirty="0" smtClean="0">
+                            <a:solidFill>
+                              <a:srgbClr val="6B7280"/>
+                            </a:solidFill>
+                            <a:latin typeface="Cambria Math" panose="02040503050406030204" pitchFamily="18" charset="0"/>
+                            <a:ea typeface="Arial" pitchFamily="34" charset="-122"/>
+                            <a:cs typeface="Arial" pitchFamily="34" charset="-120"/>
+                          </a:rPr>
+                          <m:t>𝑛𝑒𝑤</m:t>
+                        </m:r>
+                      </m:sub>
+                    </m:sSub>
+                  </m:oMath>
+                </a14:m>
+                <a:r>
+                  <a:rPr lang="en-US" sz="1200" dirty="0">
+                    <a:solidFill>
+                      <a:srgbClr val="6B7280"/>
+                    </a:solidFill>
+                    <a:latin typeface="Arial" pitchFamily="34" charset="0"/>
+                    <a:ea typeface="Arial" pitchFamily="34" charset="-122"/>
+                    <a:cs typeface="Arial" pitchFamily="34" charset="-120"/>
+                  </a:rPr>
+                  <a:t> is near the goal: connect and DONE! Otherwise: repeat from 2.</a:t>
+                </a:r>
+                <a:endParaRPr lang="en-US" sz="1200" dirty="0"/>
+              </a:p>
+            </p:txBody>
+          </p:sp>
+        </mc:Choice>
+        <mc:Fallback>
+          <p:sp>
+            <p:nvSpPr>
+              <p:cNvPr id="8" name="Text 6"/>
+              <p:cNvSpPr>
+                <a:spLocks noRot="1" noChangeAspect="1" noMove="1" noResize="1" noEditPoints="1" noAdjustHandles="1" noChangeArrowheads="1" noChangeShapeType="1" noTextEdit="1"/>
+              </p:cNvSpPr>
+              <p:nvPr/>
+            </p:nvSpPr>
+            <p:spPr>
+              <a:xfrm>
+                <a:off x="438912" y="1078991"/>
+                <a:ext cx="8321040" cy="1245281"/>
+              </a:xfrm>
+              <a:prstGeom prst="rect">
+                <a:avLst/>
+              </a:prstGeom>
+              <a:blipFill>
+                <a:blip r:embed="rId3"/>
+                <a:stretch>
+                  <a:fillRect t="-490"/>
+                </a:stretch>
+              </a:blipFill>
+              <a:ln/>
+            </p:spPr>
+            <p:txBody>
+              <a:bodyPr/>
+              <a:lstStyle/>
+              <a:p>
+                <a:r>
+                  <a:rPr lang="en-US">
+                    <a:noFill/>
+                  </a:rPr>
+                  <a:t> </a:t>
+                </a:r>
+              </a:p>
+            </p:txBody>
+          </p:sp>
+        </mc:Fallback>
+      </mc:AlternateContent>
       <p:sp>
         <p:nvSpPr>
           <p:cNvPr id="9" name="Shape 7"/>
@@ -11451,8 +12068,8 @@
         </p:nvSpPr>
         <p:spPr>
           <a:xfrm>
-            <a:off x="329184" y="2461433"/>
-            <a:ext cx="8595360" cy="640080"/>
+            <a:off x="301752" y="2571750"/>
+            <a:ext cx="8595360" cy="777240"/>
           </a:xfrm>
           <a:prstGeom prst="rect">
             <a:avLst/>
@@ -11470,16 +12087,451 @@
           </a:effectLst>
         </p:spPr>
       </p:sp>
-      <p:sp>
-        <p:nvSpPr>
-          <p:cNvPr id="10" name="Text 8"/>
-          <p:cNvSpPr/>
-          <p:nvPr/>
-        </p:nvSpPr>
-        <p:spPr>
-          <a:xfrm>
-            <a:off x="411480" y="2461433"/>
-            <a:ext cx="8321040" cy="268834"/>
+      <mc:AlternateContent xmlns:mc="http://schemas.openxmlformats.org/markup-compatibility/2006">
+        <mc:Choice xmlns:a14="http://schemas.microsoft.com/office/drawing/2010/main" Requires="a14">
+          <p:sp>
+            <p:nvSpPr>
+              <p:cNvPr id="10" name="Text 8"/>
+              <p:cNvSpPr/>
+              <p:nvPr/>
+            </p:nvSpPr>
+            <p:spPr>
+              <a:xfrm>
+                <a:off x="411480" y="2461432"/>
+                <a:ext cx="8321040" cy="462383"/>
+              </a:xfrm>
+              <a:prstGeom prst="rect">
+                <a:avLst/>
+              </a:prstGeom>
+              <a:noFill/>
+              <a:ln/>
+            </p:spPr>
+            <p:txBody>
+              <a:bodyPr wrap="square" rtlCol="0" anchor="ctr"/>
+              <a:lstStyle/>
+              <a:p>
+                <a14:m>
+                  <m:oMathPara xmlns:m="http://schemas.openxmlformats.org/officeDocument/2006/math">
+                    <m:oMathParaPr>
+                      <m:jc m:val="centerGroup"/>
+                    </m:oMathParaPr>
+                    <m:oMath xmlns:m="http://schemas.openxmlformats.org/officeDocument/2006/math">
+                      <m:sSub>
+                        <m:sSubPr>
+                          <m:ctrlPr>
+                            <a:rPr lang="en-US" sz="1400" b="1" i="1" dirty="0" smtClean="0">
+                              <a:solidFill>
+                                <a:srgbClr val="1E3A5F"/>
+                              </a:solidFill>
+                              <a:latin typeface="Cambria Math" panose="02040503050406030204" pitchFamily="18" charset="0"/>
+                              <a:ea typeface="Arial" pitchFamily="34" charset="-122"/>
+                              <a:cs typeface="Arial" pitchFamily="34" charset="-120"/>
+                            </a:rPr>
+                          </m:ctrlPr>
+                        </m:sSubPr>
+                        <m:e>
+                          <m:r>
+                            <a:rPr lang="en-US" sz="1400" b="1" i="1" dirty="0" smtClean="0">
+                              <a:solidFill>
+                                <a:srgbClr val="1E3A5F"/>
+                              </a:solidFill>
+                              <a:latin typeface="Cambria Math" panose="02040503050406030204" pitchFamily="18" charset="0"/>
+                              <a:ea typeface="Arial" pitchFamily="34" charset="-122"/>
+                              <a:cs typeface="Arial" pitchFamily="34" charset="-120"/>
+                            </a:rPr>
+                            <m:t>𝒙</m:t>
+                          </m:r>
+                        </m:e>
+                        <m:sub>
+                          <m:r>
+                            <a:rPr lang="en-US" sz="1400" b="1" i="1" dirty="0" smtClean="0">
+                              <a:solidFill>
+                                <a:srgbClr val="1E3A5F"/>
+                              </a:solidFill>
+                              <a:latin typeface="Cambria Math" panose="02040503050406030204" pitchFamily="18" charset="0"/>
+                              <a:ea typeface="Arial" pitchFamily="34" charset="-122"/>
+                              <a:cs typeface="Arial" pitchFamily="34" charset="-120"/>
+                            </a:rPr>
+                            <m:t>𝒏𝒆𝒘</m:t>
+                          </m:r>
+                        </m:sub>
+                      </m:sSub>
+                      <m:r>
+                        <a:rPr lang="en-US" sz="1400" b="1" i="1" dirty="0" smtClean="0">
+                          <a:solidFill>
+                            <a:srgbClr val="1E3A5F"/>
+                          </a:solidFill>
+                          <a:latin typeface="Cambria Math" panose="02040503050406030204" pitchFamily="18" charset="0"/>
+                          <a:ea typeface="Arial" pitchFamily="34" charset="-122"/>
+                          <a:cs typeface="Arial" pitchFamily="34" charset="-120"/>
+                        </a:rPr>
+                        <m:t>= </m:t>
+                      </m:r>
+                      <m:sSub>
+                        <m:sSubPr>
+                          <m:ctrlPr>
+                            <a:rPr lang="en-US" sz="1400" b="1" i="1" dirty="0" err="1" smtClean="0">
+                              <a:solidFill>
+                                <a:srgbClr val="1E3A5F"/>
+                              </a:solidFill>
+                              <a:latin typeface="Cambria Math" panose="02040503050406030204" pitchFamily="18" charset="0"/>
+                              <a:ea typeface="Arial" pitchFamily="34" charset="-122"/>
+                              <a:cs typeface="Arial" pitchFamily="34" charset="-120"/>
+                            </a:rPr>
+                          </m:ctrlPr>
+                        </m:sSubPr>
+                        <m:e>
+                          <m:r>
+                            <a:rPr lang="en-US" sz="1400" b="1" i="1" dirty="0" err="1" smtClean="0">
+                              <a:solidFill>
+                                <a:srgbClr val="1E3A5F"/>
+                              </a:solidFill>
+                              <a:latin typeface="Cambria Math" panose="02040503050406030204" pitchFamily="18" charset="0"/>
+                              <a:ea typeface="Arial" pitchFamily="34" charset="-122"/>
+                              <a:cs typeface="Arial" pitchFamily="34" charset="-120"/>
+                            </a:rPr>
+                            <m:t>𝒙</m:t>
+                          </m:r>
+                        </m:e>
+                        <m:sub>
+                          <m:r>
+                            <a:rPr lang="en-US" sz="1400" b="1" i="1" dirty="0" err="1" smtClean="0">
+                              <a:solidFill>
+                                <a:srgbClr val="1E3A5F"/>
+                              </a:solidFill>
+                              <a:latin typeface="Cambria Math" panose="02040503050406030204" pitchFamily="18" charset="0"/>
+                              <a:ea typeface="Arial" pitchFamily="34" charset="-122"/>
+                              <a:cs typeface="Arial" pitchFamily="34" charset="-120"/>
+                            </a:rPr>
+                            <m:t>𝒏𝒆𝒂𝒓</m:t>
+                          </m:r>
+                        </m:sub>
+                      </m:sSub>
+                      <m:r>
+                        <a:rPr lang="en-US" sz="1400" b="1" i="1" dirty="0" smtClean="0">
+                          <a:solidFill>
+                            <a:srgbClr val="1E3A5F"/>
+                          </a:solidFill>
+                          <a:latin typeface="Cambria Math" panose="02040503050406030204" pitchFamily="18" charset="0"/>
+                          <a:ea typeface="Arial" pitchFamily="34" charset="-122"/>
+                          <a:cs typeface="Arial" pitchFamily="34" charset="-120"/>
+                        </a:rPr>
+                        <m:t>+ </m:t>
+                      </m:r>
+                      <m:r>
+                        <a:rPr lang="en-US" sz="1400" b="1" i="1" dirty="0" smtClean="0">
+                          <a:solidFill>
+                            <a:srgbClr val="1E3A5F"/>
+                          </a:solidFill>
+                          <a:latin typeface="Cambria Math" panose="02040503050406030204" pitchFamily="18" charset="0"/>
+                          <a:ea typeface="Arial" pitchFamily="34" charset="-122"/>
+                          <a:cs typeface="Arial" pitchFamily="34" charset="-120"/>
+                        </a:rPr>
+                        <m:t>𝜹</m:t>
+                      </m:r>
+                      <m:r>
+                        <a:rPr lang="en-US" sz="1400" b="1" i="1" dirty="0" smtClean="0">
+                          <a:solidFill>
+                            <a:srgbClr val="1E3A5F"/>
+                          </a:solidFill>
+                          <a:latin typeface="Cambria Math" panose="02040503050406030204" pitchFamily="18" charset="0"/>
+                          <a:ea typeface="Arial" pitchFamily="34" charset="-122"/>
+                          <a:cs typeface="Arial" pitchFamily="34" charset="-120"/>
+                        </a:rPr>
+                        <m:t> ·</m:t>
+                      </m:r>
+                      <m:f>
+                        <m:fPr>
+                          <m:ctrlPr>
+                            <a:rPr lang="en-US" sz="1400" b="1" i="1" dirty="0" smtClean="0">
+                              <a:solidFill>
+                                <a:srgbClr val="1E3A5F"/>
+                              </a:solidFill>
+                              <a:latin typeface="Cambria Math" panose="02040503050406030204" pitchFamily="18" charset="0"/>
+                              <a:ea typeface="Arial" pitchFamily="34" charset="-122"/>
+                              <a:cs typeface="Arial" pitchFamily="34" charset="-120"/>
+                            </a:rPr>
+                          </m:ctrlPr>
+                        </m:fPr>
+                        <m:num>
+                          <m:d>
+                            <m:dPr>
+                              <m:ctrlPr>
+                                <a:rPr lang="en-US" sz="1400" b="1" i="1" dirty="0" smtClean="0">
+                                  <a:solidFill>
+                                    <a:srgbClr val="1E3A5F"/>
+                                  </a:solidFill>
+                                  <a:latin typeface="Cambria Math" panose="02040503050406030204" pitchFamily="18" charset="0"/>
+                                  <a:ea typeface="Arial" pitchFamily="34" charset="-122"/>
+                                  <a:cs typeface="Arial" pitchFamily="34" charset="-120"/>
+                                </a:rPr>
+                              </m:ctrlPr>
+                            </m:dPr>
+                            <m:e>
+                              <m:sSub>
+                                <m:sSubPr>
+                                  <m:ctrlPr>
+                                    <a:rPr lang="en-US" sz="1400" b="1" i="1" dirty="0" err="1" smtClean="0">
+                                      <a:solidFill>
+                                        <a:srgbClr val="1E3A5F"/>
+                                      </a:solidFill>
+                                      <a:latin typeface="Cambria Math" panose="02040503050406030204" pitchFamily="18" charset="0"/>
+                                      <a:ea typeface="Arial" pitchFamily="34" charset="-122"/>
+                                      <a:cs typeface="Arial" pitchFamily="34" charset="-120"/>
+                                    </a:rPr>
+                                  </m:ctrlPr>
+                                </m:sSubPr>
+                                <m:e>
+                                  <m:r>
+                                    <a:rPr lang="en-US" sz="1400" b="1" i="1" dirty="0" err="1" smtClean="0">
+                                      <a:solidFill>
+                                        <a:srgbClr val="1E3A5F"/>
+                                      </a:solidFill>
+                                      <a:latin typeface="Cambria Math" panose="02040503050406030204" pitchFamily="18" charset="0"/>
+                                      <a:ea typeface="Arial" pitchFamily="34" charset="-122"/>
+                                      <a:cs typeface="Arial" pitchFamily="34" charset="-120"/>
+                                    </a:rPr>
+                                    <m:t>𝒙</m:t>
+                                  </m:r>
+                                </m:e>
+                                <m:sub>
+                                  <m:r>
+                                    <a:rPr lang="en-US" sz="1400" b="1" i="1" dirty="0" err="1" smtClean="0">
+                                      <a:solidFill>
+                                        <a:srgbClr val="1E3A5F"/>
+                                      </a:solidFill>
+                                      <a:latin typeface="Cambria Math" panose="02040503050406030204" pitchFamily="18" charset="0"/>
+                                      <a:ea typeface="Arial" pitchFamily="34" charset="-122"/>
+                                      <a:cs typeface="Arial" pitchFamily="34" charset="-120"/>
+                                    </a:rPr>
+                                    <m:t>𝒓𝒂𝒏𝒅</m:t>
+                                  </m:r>
+                                </m:sub>
+                              </m:sSub>
+                              <m:r>
+                                <a:rPr lang="en-US" sz="1400" b="1" i="1" dirty="0" smtClean="0">
+                                  <a:solidFill>
+                                    <a:srgbClr val="1E3A5F"/>
+                                  </a:solidFill>
+                                  <a:latin typeface="Cambria Math" panose="02040503050406030204" pitchFamily="18" charset="0"/>
+                                  <a:ea typeface="Arial" pitchFamily="34" charset="-122"/>
+                                  <a:cs typeface="Arial" pitchFamily="34" charset="-120"/>
+                                </a:rPr>
+                                <m:t>− </m:t>
+                              </m:r>
+                              <m:sSub>
+                                <m:sSubPr>
+                                  <m:ctrlPr>
+                                    <a:rPr lang="en-US" sz="1400" b="1" i="1" dirty="0" err="1" smtClean="0">
+                                      <a:solidFill>
+                                        <a:srgbClr val="1E3A5F"/>
+                                      </a:solidFill>
+                                      <a:latin typeface="Cambria Math" panose="02040503050406030204" pitchFamily="18" charset="0"/>
+                                      <a:ea typeface="Arial" pitchFamily="34" charset="-122"/>
+                                      <a:cs typeface="Arial" pitchFamily="34" charset="-120"/>
+                                    </a:rPr>
+                                  </m:ctrlPr>
+                                </m:sSubPr>
+                                <m:e>
+                                  <m:r>
+                                    <a:rPr lang="en-US" sz="1400" b="1" i="1" dirty="0" err="1" smtClean="0">
+                                      <a:solidFill>
+                                        <a:srgbClr val="1E3A5F"/>
+                                      </a:solidFill>
+                                      <a:latin typeface="Cambria Math" panose="02040503050406030204" pitchFamily="18" charset="0"/>
+                                      <a:ea typeface="Arial" pitchFamily="34" charset="-122"/>
+                                      <a:cs typeface="Arial" pitchFamily="34" charset="-120"/>
+                                    </a:rPr>
+                                    <m:t>𝒙</m:t>
+                                  </m:r>
+                                </m:e>
+                                <m:sub>
+                                  <m:r>
+                                    <a:rPr lang="en-US" sz="1400" b="1" i="1" dirty="0" err="1" smtClean="0">
+                                      <a:solidFill>
+                                        <a:srgbClr val="1E3A5F"/>
+                                      </a:solidFill>
+                                      <a:latin typeface="Cambria Math" panose="02040503050406030204" pitchFamily="18" charset="0"/>
+                                      <a:ea typeface="Arial" pitchFamily="34" charset="-122"/>
+                                      <a:cs typeface="Arial" pitchFamily="34" charset="-120"/>
+                                    </a:rPr>
+                                    <m:t>𝒏𝒆𝒂𝒓</m:t>
+                                  </m:r>
+                                </m:sub>
+                              </m:sSub>
+                            </m:e>
+                          </m:d>
+                        </m:num>
+                        <m:den>
+                          <m:d>
+                            <m:dPr>
+                              <m:begChr m:val="|"/>
+                              <m:endChr m:val="|"/>
+                              <m:ctrlPr>
+                                <a:rPr lang="en-US" sz="1400" b="1" i="1" dirty="0">
+                                  <a:solidFill>
+                                    <a:srgbClr val="1E3A5F"/>
+                                  </a:solidFill>
+                                  <a:latin typeface="Cambria Math" panose="02040503050406030204" pitchFamily="18" charset="0"/>
+                                  <a:ea typeface="Arial" pitchFamily="34" charset="-122"/>
+                                  <a:cs typeface="Arial" pitchFamily="34" charset="-120"/>
+                                </a:rPr>
+                              </m:ctrlPr>
+                            </m:dPr>
+                            <m:e>
+                              <m:sSub>
+                                <m:sSubPr>
+                                  <m:ctrlPr>
+                                    <a:rPr lang="en-US" sz="1400" b="1" i="1" dirty="0" err="1">
+                                      <a:solidFill>
+                                        <a:srgbClr val="1E3A5F"/>
+                                      </a:solidFill>
+                                      <a:latin typeface="Cambria Math" panose="02040503050406030204" pitchFamily="18" charset="0"/>
+                                      <a:ea typeface="Arial" pitchFamily="34" charset="-122"/>
+                                      <a:cs typeface="Arial" pitchFamily="34" charset="-120"/>
+                                    </a:rPr>
+                                  </m:ctrlPr>
+                                </m:sSubPr>
+                                <m:e>
+                                  <m:r>
+                                    <a:rPr lang="en-US" sz="1400" b="1" i="1" dirty="0" err="1">
+                                      <a:solidFill>
+                                        <a:srgbClr val="1E3A5F"/>
+                                      </a:solidFill>
+                                      <a:latin typeface="Cambria Math" panose="02040503050406030204" pitchFamily="18" charset="0"/>
+                                      <a:ea typeface="Arial" pitchFamily="34" charset="-122"/>
+                                      <a:cs typeface="Arial" pitchFamily="34" charset="-120"/>
+                                    </a:rPr>
+                                    <m:t>𝒙</m:t>
+                                  </m:r>
+                                </m:e>
+                                <m:sub>
+                                  <m:r>
+                                    <a:rPr lang="en-US" sz="1400" b="1" i="1" dirty="0" err="1">
+                                      <a:solidFill>
+                                        <a:srgbClr val="1E3A5F"/>
+                                      </a:solidFill>
+                                      <a:latin typeface="Cambria Math" panose="02040503050406030204" pitchFamily="18" charset="0"/>
+                                      <a:ea typeface="Arial" pitchFamily="34" charset="-122"/>
+                                      <a:cs typeface="Arial" pitchFamily="34" charset="-120"/>
+                                    </a:rPr>
+                                    <m:t>𝒓𝒂𝒏𝒅</m:t>
+                                  </m:r>
+                                </m:sub>
+                              </m:sSub>
+                              <m:r>
+                                <a:rPr lang="en-US" sz="1400" b="1" i="1" dirty="0">
+                                  <a:solidFill>
+                                    <a:srgbClr val="1E3A5F"/>
+                                  </a:solidFill>
+                                  <a:latin typeface="Cambria Math" panose="02040503050406030204" pitchFamily="18" charset="0"/>
+                                  <a:ea typeface="Arial" pitchFamily="34" charset="-122"/>
+                                  <a:cs typeface="Arial" pitchFamily="34" charset="-120"/>
+                                </a:rPr>
+                                <m:t>− </m:t>
+                              </m:r>
+                              <m:sSub>
+                                <m:sSubPr>
+                                  <m:ctrlPr>
+                                    <a:rPr lang="en-US" sz="1400" b="1" i="1" dirty="0" err="1">
+                                      <a:solidFill>
+                                        <a:srgbClr val="1E3A5F"/>
+                                      </a:solidFill>
+                                      <a:latin typeface="Cambria Math" panose="02040503050406030204" pitchFamily="18" charset="0"/>
+                                      <a:ea typeface="Arial" pitchFamily="34" charset="-122"/>
+                                      <a:cs typeface="Arial" pitchFamily="34" charset="-120"/>
+                                    </a:rPr>
+                                  </m:ctrlPr>
+                                </m:sSubPr>
+                                <m:e>
+                                  <m:r>
+                                    <a:rPr lang="en-US" sz="1400" b="1" i="1" dirty="0" err="1">
+                                      <a:solidFill>
+                                        <a:srgbClr val="1E3A5F"/>
+                                      </a:solidFill>
+                                      <a:latin typeface="Cambria Math" panose="02040503050406030204" pitchFamily="18" charset="0"/>
+                                      <a:ea typeface="Arial" pitchFamily="34" charset="-122"/>
+                                      <a:cs typeface="Arial" pitchFamily="34" charset="-120"/>
+                                    </a:rPr>
+                                    <m:t>𝒙</m:t>
+                                  </m:r>
+                                </m:e>
+                                <m:sub>
+                                  <m:r>
+                                    <a:rPr lang="en-US" sz="1400" b="1" i="1" dirty="0" err="1">
+                                      <a:solidFill>
+                                        <a:srgbClr val="1E3A5F"/>
+                                      </a:solidFill>
+                                      <a:latin typeface="Cambria Math" panose="02040503050406030204" pitchFamily="18" charset="0"/>
+                                      <a:ea typeface="Arial" pitchFamily="34" charset="-122"/>
+                                      <a:cs typeface="Arial" pitchFamily="34" charset="-120"/>
+                                    </a:rPr>
+                                    <m:t>𝒏𝒆𝒂𝒓</m:t>
+                                  </m:r>
+                                </m:sub>
+                              </m:sSub>
+                            </m:e>
+                          </m:d>
+                        </m:den>
+                      </m:f>
+                    </m:oMath>
+                  </m:oMathPara>
+                </a14:m>
+                <a:endParaRPr lang="en-US" sz="1400" dirty="0"/>
+              </a:p>
+            </p:txBody>
+          </p:sp>
+        </mc:Choice>
+        <mc:Fallback>
+          <p:sp>
+            <p:nvSpPr>
+              <p:cNvPr id="10" name="Text 8"/>
+              <p:cNvSpPr>
+                <a:spLocks noRot="1" noChangeAspect="1" noMove="1" noResize="1" noEditPoints="1" noAdjustHandles="1" noChangeArrowheads="1" noChangeShapeType="1" noTextEdit="1"/>
+              </p:cNvSpPr>
+              <p:nvPr/>
+            </p:nvSpPr>
+            <p:spPr>
+              <a:xfrm>
+                <a:off x="411480" y="2461432"/>
+                <a:ext cx="8321040" cy="462383"/>
+              </a:xfrm>
+              <a:prstGeom prst="rect">
+                <a:avLst/>
+              </a:prstGeom>
+              <a:blipFill>
+                <a:blip r:embed="rId4"/>
+                <a:stretch>
+                  <a:fillRect b="-7895"/>
+                </a:stretch>
+              </a:blipFill>
+              <a:ln/>
+            </p:spPr>
+            <p:txBody>
+              <a:bodyPr/>
+              <a:lstStyle/>
+              <a:p>
+                <a:r>
+                  <a:rPr lang="en-US">
+                    <a:noFill/>
+                  </a:rPr>
+                  <a:t> </a:t>
+                </a:r>
+              </a:p>
+            </p:txBody>
+          </p:sp>
+        </mc:Fallback>
+      </mc:AlternateContent>
+      <p:sp>
+        <p:nvSpPr>
+          <p:cNvPr id="11" name="Text 9"/>
+          <p:cNvSpPr/>
+          <p:nvPr/>
+        </p:nvSpPr>
+        <p:spPr>
+          <a:xfrm>
+            <a:off x="411480" y="2923816"/>
+            <a:ext cx="8321040" cy="332842"/>
           </a:xfrm>
           <a:prstGeom prst="rect">
             <a:avLst/>
@@ -11488,52 +12540,13 @@
           <a:ln/>
         </p:spPr>
         <p:txBody>
-          <a:bodyPr wrap="square" rtlCol="0" anchor="ctr"/>
+          <a:bodyPr wrap="square" rtlCol="0" anchor="t"/>
           <a:lstStyle/>
           <a:p>
             <a:pPr marL="0" indent="0">
               <a:buNone/>
             </a:pPr>
             <a:r>
-              <a:rPr lang="en-US" sz="1400" b="1" dirty="0">
-                <a:solidFill>
-                  <a:srgbClr val="1E3A5F"/>
-                </a:solidFill>
-                <a:latin typeface="Arial" pitchFamily="34" charset="0"/>
-                <a:ea typeface="Arial" pitchFamily="34" charset="-122"/>
-                <a:cs typeface="Arial" pitchFamily="34" charset="-120"/>
-              </a:rPr>
-              <a:t>x_new = x_near + δ · (x_rand − x_near) / ||x_rand − x_near||</a:t>
-            </a:r>
-            <a:endParaRPr lang="en-US" sz="1400" dirty="0"/>
-          </a:p>
-        </p:txBody>
-      </p:sp>
-      <p:sp>
-        <p:nvSpPr>
-          <p:cNvPr id="11" name="Text 9"/>
-          <p:cNvSpPr/>
-          <p:nvPr/>
-        </p:nvSpPr>
-        <p:spPr>
-          <a:xfrm>
-            <a:off x="411480" y="2697348"/>
-            <a:ext cx="8321040" cy="332842"/>
-          </a:xfrm>
-          <a:prstGeom prst="rect">
-            <a:avLst/>
-          </a:prstGeom>
-          <a:noFill/>
-          <a:ln/>
-        </p:spPr>
-        <p:txBody>
-          <a:bodyPr wrap="square" rtlCol="0" anchor="t"/>
-          <a:lstStyle/>
-          <a:p>
-            <a:pPr marL="0" indent="0">
-              <a:buNone/>
-            </a:pPr>
-            <a:r>
               <a:rPr lang="en-US" sz="1200" dirty="0">
                 <a:solidFill>
                   <a:srgbClr val="1F2937"/>
@@ -11556,7 +12569,7 @@
         </p:nvSpPr>
         <p:spPr>
           <a:xfrm>
-            <a:off x="365760" y="3238673"/>
+            <a:off x="347472" y="3587517"/>
             <a:ext cx="8412480" cy="1097280"/>
           </a:xfrm>
           <a:prstGeom prst="rect">
@@ -12095,118 +13108,260 @@
           </a:p>
         </p:txBody>
       </p:sp>
-      <p:sp>
-        <p:nvSpPr>
-          <p:cNvPr id="13" name="Text 11"/>
-          <p:cNvSpPr/>
-          <p:nvPr/>
-        </p:nvSpPr>
-        <p:spPr>
-          <a:xfrm>
-            <a:off x="4828032" y="1399032"/>
-            <a:ext cx="3931920" cy="1417320"/>
-          </a:xfrm>
-          <a:prstGeom prst="rect">
-            <a:avLst/>
-          </a:prstGeom>
-          <a:noFill/>
-          <a:ln/>
-        </p:spPr>
-        <p:txBody>
-          <a:bodyPr wrap="square" rtlCol="0" anchor="t"/>
-          <a:lstStyle/>
-          <a:p>
-            <a:pPr marL="342900" indent="-342900">
-              <a:buSzPct val="100000"/>
-              <a:buChar char="•"/>
-            </a:pPr>
-            <a:r>
-              <a:rPr lang="en-US" sz="1200" dirty="0">
-                <a:solidFill>
-                  <a:srgbClr val="6B7280"/>
-                </a:solidFill>
-                <a:latin typeface="Arial" pitchFamily="34" charset="0"/>
-                <a:ea typeface="Arial" pitchFamily="34" charset="-122"/>
-                <a:cs typeface="Arial" pitchFamily="34" charset="-120"/>
-              </a:rPr>
-              <a:t>Check if nearby nodes would benefit from</a:t>
-            </a:r>
-            <a:endParaRPr lang="en-US" sz="1200" dirty="0"/>
-          </a:p>
-          <a:p>
-            <a:pPr marL="342900" indent="-342900">
-              <a:buSzPct val="100000"/>
-              <a:buChar char="•"/>
-            </a:pPr>
-            <a:r>
-              <a:rPr lang="en-US" sz="1200" dirty="0">
-                <a:solidFill>
-                  <a:srgbClr val="6B7280"/>
-                </a:solidFill>
-                <a:latin typeface="Arial" pitchFamily="34" charset="0"/>
-                <a:ea typeface="Arial" pitchFamily="34" charset="-122"/>
-                <a:cs typeface="Arial" pitchFamily="34" charset="-120"/>
-              </a:rPr>
-              <a:t>  routing THROUGH x_new instead of</a:t>
-            </a:r>
-            <a:endParaRPr lang="en-US" sz="1200" dirty="0"/>
-          </a:p>
-          <a:p>
-            <a:pPr marL="342900" indent="-342900">
-              <a:buSzPct val="100000"/>
-              <a:buChar char="•"/>
-            </a:pPr>
-            <a:r>
-              <a:rPr lang="en-US" sz="1200" dirty="0">
-                <a:solidFill>
-                  <a:srgbClr val="6B7280"/>
-                </a:solidFill>
-                <a:latin typeface="Arial" pitchFamily="34" charset="0"/>
-                <a:ea typeface="Arial" pitchFamily="34" charset="-122"/>
-                <a:cs typeface="Arial" pitchFamily="34" charset="-120"/>
-              </a:rPr>
-              <a:t>  their current parent</a:t>
-            </a:r>
-            <a:endParaRPr lang="en-US" sz="1200" dirty="0"/>
-          </a:p>
-          <a:p>
-            <a:pPr marL="342900" indent="-342900">
-              <a:buSzPct val="100000"/>
-              <a:buChar char="•"/>
-            </a:pPr>
-            <a:r>
-              <a:rPr lang="en-US" sz="1200" dirty="0">
-                <a:solidFill>
-                  <a:srgbClr val="6B7280"/>
-                </a:solidFill>
-                <a:latin typeface="Arial" pitchFamily="34" charset="0"/>
-                <a:ea typeface="Arial" pitchFamily="34" charset="-122"/>
-                <a:cs typeface="Arial" pitchFamily="34" charset="-120"/>
-              </a:rPr>
-              <a:t>If yes: rewire their parent to x_new</a:t>
-            </a:r>
-            <a:endParaRPr lang="en-US" sz="1200" dirty="0"/>
-          </a:p>
-          <a:p>
-            <a:pPr marL="342900" indent="-342900">
-              <a:buSzPct val="100000"/>
-              <a:buChar char="•"/>
-            </a:pPr>
-            <a:r>
-              <a:rPr lang="en-US" sz="1200" dirty="0">
-                <a:solidFill>
-                  <a:srgbClr val="6B7280"/>
-                </a:solidFill>
-                <a:latin typeface="Arial" pitchFamily="34" charset="0"/>
-                <a:ea typeface="Arial" pitchFamily="34" charset="-122"/>
-                <a:cs typeface="Arial" pitchFamily="34" charset="-120"/>
-              </a:rPr>
-              <a:t>Tree continuously improves over time!</a:t>
-            </a:r>
-            <a:endParaRPr lang="en-US" sz="1200" dirty="0"/>
-          </a:p>
-        </p:txBody>
-      </p:sp>
+      <mc:AlternateContent xmlns:mc="http://schemas.openxmlformats.org/markup-compatibility/2006">
+        <mc:Choice xmlns:a14="http://schemas.microsoft.com/office/drawing/2010/main" Requires="a14">
+          <p:sp>
+            <p:nvSpPr>
+              <p:cNvPr id="13" name="Text 11"/>
+              <p:cNvSpPr/>
+              <p:nvPr/>
+            </p:nvSpPr>
+            <p:spPr>
+              <a:xfrm>
+                <a:off x="4828032" y="1399032"/>
+                <a:ext cx="3931920" cy="1417320"/>
+              </a:xfrm>
+              <a:prstGeom prst="rect">
+                <a:avLst/>
+              </a:prstGeom>
+              <a:noFill/>
+              <a:ln/>
+            </p:spPr>
+            <p:txBody>
+              <a:bodyPr wrap="square" rtlCol="0" anchor="t"/>
+              <a:lstStyle/>
+              <a:p>
+                <a:pPr marL="342900" indent="-342900">
+                  <a:buSzPct val="100000"/>
+                  <a:buChar char="•"/>
+                </a:pPr>
+                <a:r>
+                  <a:rPr lang="en-US" sz="1200" dirty="0">
+                    <a:solidFill>
+                      <a:srgbClr val="6B7280"/>
+                    </a:solidFill>
+                    <a:latin typeface="Arial" pitchFamily="34" charset="0"/>
+                    <a:ea typeface="Arial" pitchFamily="34" charset="-122"/>
+                    <a:cs typeface="Arial" pitchFamily="34" charset="-120"/>
+                  </a:rPr>
+                  <a:t>Check if nearby nodes would benefit from</a:t>
+                </a:r>
+                <a:endParaRPr lang="en-US" sz="1200" dirty="0"/>
+              </a:p>
+              <a:p>
+                <a:pPr marL="342900" indent="-342900">
+                  <a:buSzPct val="100000"/>
+                  <a:buChar char="•"/>
+                </a:pPr>
+                <a:r>
+                  <a:rPr lang="en-US" sz="1200" dirty="0">
+                    <a:solidFill>
+                      <a:srgbClr val="6B7280"/>
+                    </a:solidFill>
+                    <a:latin typeface="Arial" pitchFamily="34" charset="0"/>
+                    <a:ea typeface="Arial" pitchFamily="34" charset="-122"/>
+                    <a:cs typeface="Arial" pitchFamily="34" charset="-120"/>
+                  </a:rPr>
+                  <a:t>  routing THROUGH </a:t>
+                </a:r>
+                <a14:m>
+                  <m:oMath xmlns:m="http://schemas.openxmlformats.org/officeDocument/2006/math">
+                    <m:sSub>
+                      <m:sSubPr>
+                        <m:ctrlPr>
+                          <a:rPr lang="en-US" sz="1200" i="1" dirty="0" smtClean="0">
+                            <a:solidFill>
+                              <a:srgbClr val="6B7280"/>
+                            </a:solidFill>
+                            <a:latin typeface="Cambria Math" panose="02040503050406030204" pitchFamily="18" charset="0"/>
+                            <a:ea typeface="Arial" pitchFamily="34" charset="-122"/>
+                            <a:cs typeface="Arial" pitchFamily="34" charset="-120"/>
+                          </a:rPr>
+                        </m:ctrlPr>
+                      </m:sSubPr>
+                      <m:e>
+                        <m:r>
+                          <a:rPr lang="en-US" sz="1200" i="1" dirty="0" smtClean="0">
+                            <a:solidFill>
+                              <a:srgbClr val="6B7280"/>
+                            </a:solidFill>
+                            <a:latin typeface="Cambria Math" panose="02040503050406030204" pitchFamily="18" charset="0"/>
+                            <a:ea typeface="Arial" pitchFamily="34" charset="-122"/>
+                            <a:cs typeface="Arial" pitchFamily="34" charset="-120"/>
+                          </a:rPr>
+                          <m:t>𝑥</m:t>
+                        </m:r>
+                      </m:e>
+                      <m:sub>
+                        <m:r>
+                          <a:rPr lang="en-US" sz="1200" i="1" dirty="0" smtClean="0">
+                            <a:solidFill>
+                              <a:srgbClr val="6B7280"/>
+                            </a:solidFill>
+                            <a:latin typeface="Cambria Math" panose="02040503050406030204" pitchFamily="18" charset="0"/>
+                            <a:ea typeface="Arial" pitchFamily="34" charset="-122"/>
+                            <a:cs typeface="Arial" pitchFamily="34" charset="-120"/>
+                          </a:rPr>
+                          <m:t>𝑛𝑒𝑤</m:t>
+                        </m:r>
+                      </m:sub>
+                    </m:sSub>
+                  </m:oMath>
+                </a14:m>
+                <a:r>
+                  <a:rPr lang="en-US" sz="1200" dirty="0">
+                    <a:solidFill>
+                      <a:srgbClr val="6B7280"/>
+                    </a:solidFill>
+                    <a:latin typeface="Arial" pitchFamily="34" charset="0"/>
+                    <a:ea typeface="Arial" pitchFamily="34" charset="-122"/>
+                    <a:cs typeface="Arial" pitchFamily="34" charset="-120"/>
+                  </a:rPr>
+                  <a:t>instead of</a:t>
+                </a:r>
+                <a:endParaRPr lang="en-US" sz="1200" dirty="0"/>
+              </a:p>
+              <a:p>
+                <a:pPr marL="342900" indent="-342900">
+                  <a:buSzPct val="100000"/>
+                  <a:buChar char="•"/>
+                </a:pPr>
+                <a:r>
+                  <a:rPr lang="en-US" sz="1200" dirty="0">
+                    <a:solidFill>
+                      <a:srgbClr val="6B7280"/>
+                    </a:solidFill>
+                    <a:latin typeface="Arial" pitchFamily="34" charset="0"/>
+                    <a:ea typeface="Arial" pitchFamily="34" charset="-122"/>
+                    <a:cs typeface="Arial" pitchFamily="34" charset="-120"/>
+                  </a:rPr>
+                  <a:t>  their current parent</a:t>
+                </a:r>
+                <a:endParaRPr lang="en-US" sz="1200" dirty="0"/>
+              </a:p>
+              <a:p>
+                <a:pPr marL="342900" indent="-342900">
+                  <a:buSzPct val="100000"/>
+                  <a:buChar char="•"/>
+                </a:pPr>
+                <a:r>
+                  <a:rPr lang="en-US" sz="1200" dirty="0">
+                    <a:solidFill>
+                      <a:srgbClr val="6B7280"/>
+                    </a:solidFill>
+                    <a:latin typeface="Arial" pitchFamily="34" charset="0"/>
+                    <a:ea typeface="Arial" pitchFamily="34" charset="-122"/>
+                    <a:cs typeface="Arial" pitchFamily="34" charset="-120"/>
+                  </a:rPr>
+                  <a:t>If yes: rewire their parent to </a:t>
+                </a:r>
+                <a14:m>
+                  <m:oMath xmlns:m="http://schemas.openxmlformats.org/officeDocument/2006/math">
+                    <m:sSub>
+                      <m:sSubPr>
+                        <m:ctrlPr>
+                          <a:rPr lang="en-US" sz="1200" i="1" dirty="0" smtClean="0">
+                            <a:solidFill>
+                              <a:srgbClr val="6B7280"/>
+                            </a:solidFill>
+                            <a:latin typeface="Cambria Math" panose="02040503050406030204" pitchFamily="18" charset="0"/>
+                            <a:ea typeface="Arial" pitchFamily="34" charset="-122"/>
+                            <a:cs typeface="Arial" pitchFamily="34" charset="-120"/>
+                          </a:rPr>
+                        </m:ctrlPr>
+                      </m:sSubPr>
+                      <m:e>
+                        <m:r>
+                          <a:rPr lang="en-US" sz="1200" i="1" dirty="0" smtClean="0">
+                            <a:solidFill>
+                              <a:srgbClr val="6B7280"/>
+                            </a:solidFill>
+                            <a:latin typeface="Cambria Math" panose="02040503050406030204" pitchFamily="18" charset="0"/>
+                            <a:ea typeface="Arial" pitchFamily="34" charset="-122"/>
+                            <a:cs typeface="Arial" pitchFamily="34" charset="-120"/>
+                          </a:rPr>
+                          <m:t>𝑥</m:t>
+                        </m:r>
+                      </m:e>
+                      <m:sub>
+                        <m:r>
+                          <a:rPr lang="en-US" sz="1200" i="1" dirty="0" smtClean="0">
+                            <a:solidFill>
+                              <a:srgbClr val="6B7280"/>
+                            </a:solidFill>
+                            <a:latin typeface="Cambria Math" panose="02040503050406030204" pitchFamily="18" charset="0"/>
+                            <a:ea typeface="Arial" pitchFamily="34" charset="-122"/>
+                            <a:cs typeface="Arial" pitchFamily="34" charset="-120"/>
+                          </a:rPr>
+                          <m:t>𝑛𝑒𝑤</m:t>
+                        </m:r>
+                      </m:sub>
+                    </m:sSub>
+                  </m:oMath>
+                </a14:m>
+                <a:endParaRPr lang="en-US" sz="1200" dirty="0"/>
+              </a:p>
+              <a:p>
+                <a:pPr marL="342900" indent="-342900">
+                  <a:buSzPct val="100000"/>
+                  <a:buChar char="•"/>
+                </a:pPr>
+                <a:r>
+                  <a:rPr lang="en-US" sz="1200" dirty="0">
+                    <a:solidFill>
+                      <a:srgbClr val="6B7280"/>
+                    </a:solidFill>
+                    <a:latin typeface="Arial" pitchFamily="34" charset="0"/>
+                    <a:ea typeface="Arial" pitchFamily="34" charset="-122"/>
+                    <a:cs typeface="Arial" pitchFamily="34" charset="-120"/>
+                  </a:rPr>
+                  <a:t>Tree continuously improves over time!</a:t>
+                </a:r>
+                <a:endParaRPr lang="en-US" sz="1200" dirty="0"/>
+              </a:p>
+            </p:txBody>
+          </p:sp>
+        </mc:Choice>
+        <mc:Fallback>
+          <p:sp>
+            <p:nvSpPr>
+              <p:cNvPr id="13" name="Text 11"/>
+              <p:cNvSpPr>
+                <a:spLocks noRot="1" noChangeAspect="1" noMove="1" noResize="1" noEditPoints="1" noAdjustHandles="1" noChangeArrowheads="1" noChangeShapeType="1" noTextEdit="1"/>
+              </p:cNvSpPr>
+              <p:nvPr/>
+            </p:nvSpPr>
+            <p:spPr>
+              <a:xfrm>
+                <a:off x="4828032" y="1399032"/>
+                <a:ext cx="3931920" cy="1417320"/>
+              </a:xfrm>
+              <a:prstGeom prst="rect">
+                <a:avLst/>
+              </a:prstGeom>
+              <a:blipFill>
+                <a:blip r:embed="rId3"/>
+                <a:stretch>
+                  <a:fillRect t="-862"/>
+                </a:stretch>
+              </a:blipFill>
+              <a:ln/>
+            </p:spPr>
+            <p:txBody>
+              <a:bodyPr/>
+              <a:lstStyle/>
+              <a:p>
+                <a:r>
+                  <a:rPr lang="en-US">
+                    <a:noFill/>
+                  </a:rPr>
+                  <a:t> </a:t>
+                </a:r>
+              </a:p>
+            </p:txBody>
+          </p:sp>
+        </mc:Fallback>
+      </mc:AlternateContent>
       <p:sp>
         <p:nvSpPr>
           <p:cNvPr id="14" name="Text 12"/>
@@ -14584,24 +15739,6 @@
             </a:r>
             <a:endParaRPr lang="en-US" sz="1200" dirty="0"/>
           </a:p>
-          <a:p>
-            <a:pPr marL="342900" indent="-342900">
-              <a:buSzPct val="100000"/>
-              <a:buChar char="•"/>
-            </a:pPr>
-            <a:r>
-              <a:rPr lang="en-US" sz="1200" dirty="0">
-                <a:solidFill>
-                  <a:srgbClr val="6B7280"/>
-                </a:solidFill>
-                <a:latin typeface="Arial" pitchFamily="34" charset="0"/>
-                <a:ea typeface="Arial" pitchFamily="34" charset="-122"/>
-                <a:cs typeface="Arial" pitchFamily="34" charset="-120"/>
-              </a:rPr>
-              <a:t>Example: Kuka youBot</a:t>
-            </a:r>
-            <a:endParaRPr lang="en-US" sz="1200" dirty="0"/>
-          </a:p>
         </p:txBody>
       </p:sp>
       <p:sp>
@@ -14779,24 +15916,6 @@
                 <a:cs typeface="Arial" pitchFamily="34" charset="-120"/>
               </a:rPr>
               <a:t>A* grid path is NOT directly feasible</a:t>
-            </a:r>
-            <a:endParaRPr lang="en-US" sz="1200" dirty="0"/>
-          </a:p>
-          <a:p>
-            <a:pPr marL="342900" indent="-342900">
-              <a:buSzPct val="100000"/>
-              <a:buChar char="•"/>
-            </a:pPr>
-            <a:r>
-              <a:rPr lang="en-US" sz="1200" dirty="0">
-                <a:solidFill>
-                  <a:srgbClr val="6B7280"/>
-                </a:solidFill>
-                <a:latin typeface="Arial" pitchFamily="34" charset="0"/>
-                <a:ea typeface="Arial" pitchFamily="34" charset="-122"/>
-                <a:cs typeface="Arial" pitchFamily="34" charset="-120"/>
-              </a:rPr>
-              <a:t>Example: MediBot, any car-like robot</a:t>
             </a:r>
             <a:endParaRPr lang="en-US" sz="1200" dirty="0"/>
           </a:p>
@@ -15102,8 +16221,8 @@
         </p:nvSpPr>
         <p:spPr>
           <a:xfrm>
-            <a:off x="274320" y="1828800"/>
-            <a:ext cx="4114800" cy="1609344"/>
+            <a:off x="274320" y="1828799"/>
+            <a:ext cx="4114800" cy="1800447"/>
           </a:xfrm>
           <a:prstGeom prst="rect">
             <a:avLst/>
@@ -15180,118 +16299,269 @@
           </a:p>
         </p:txBody>
       </p:sp>
-      <p:sp>
-        <p:nvSpPr>
-          <p:cNvPr id="11" name="Text 9"/>
-          <p:cNvSpPr/>
-          <p:nvPr/>
-        </p:nvSpPr>
-        <p:spPr>
-          <a:xfrm>
-            <a:off x="438912" y="2176272"/>
-            <a:ext cx="3840480" cy="1051560"/>
-          </a:xfrm>
-          <a:prstGeom prst="rect">
-            <a:avLst/>
-          </a:prstGeom>
-          <a:noFill/>
-          <a:ln/>
-        </p:spPr>
-        <p:txBody>
-          <a:bodyPr wrap="square" rtlCol="0" anchor="t"/>
-          <a:lstStyle/>
-          <a:p>
-            <a:pPr marL="342900" indent="-342900">
-              <a:buSzPct val="100000"/>
-              <a:buChar char="•"/>
-            </a:pPr>
-            <a:r>
-              <a:rPr lang="en-US" sz="1200" dirty="0">
-                <a:solidFill>
-                  <a:srgbClr val="6B7280"/>
-                </a:solidFill>
-                <a:latin typeface="Arial" pitchFamily="34" charset="0"/>
-                <a:ea typeface="Arial" pitchFamily="34" charset="-122"/>
-                <a:cs typeface="Arial" pitchFamily="34" charset="-120"/>
-              </a:rPr>
-              <a:t>Robot at (x,y,θ) can only move FORWARD/BACK</a:t>
-            </a:r>
-            <a:endParaRPr lang="en-US" sz="1200" dirty="0"/>
-          </a:p>
-          <a:p>
-            <a:pPr marL="342900" indent="-342900">
-              <a:buSzPct val="100000"/>
-              <a:buChar char="•"/>
-            </a:pPr>
-            <a:r>
-              <a:rPr lang="en-US" sz="1200" dirty="0">
-                <a:solidFill>
-                  <a:srgbClr val="6B7280"/>
-                </a:solidFill>
-                <a:latin typeface="Arial" pitchFamily="34" charset="0"/>
-                <a:ea typeface="Arial" pitchFamily="34" charset="-122"/>
-                <a:cs typeface="Arial" pitchFamily="34" charset="-120"/>
-              </a:rPr>
-              <a:t>  and ROTATE — never sideways</a:t>
-            </a:r>
-            <a:endParaRPr lang="en-US" sz="1200" dirty="0"/>
-          </a:p>
-          <a:p>
-            <a:pPr marL="342900" indent="-342900">
-              <a:buSzPct val="100000"/>
-              <a:buChar char="•"/>
-            </a:pPr>
-            <a:r>
-              <a:rPr lang="en-US" sz="1200" dirty="0">
-                <a:solidFill>
-                  <a:srgbClr val="6B7280"/>
-                </a:solidFill>
-                <a:latin typeface="Arial" pitchFamily="34" charset="0"/>
-                <a:ea typeface="Arial" pitchFamily="34" charset="-122"/>
-                <a:cs typeface="Arial" pitchFamily="34" charset="-120"/>
-              </a:rPr>
-              <a:t>Turning requires a minimum radius: r = v/ω</a:t>
-            </a:r>
-            <a:endParaRPr lang="en-US" sz="1200" dirty="0"/>
-          </a:p>
-          <a:p>
-            <a:pPr marL="342900" indent="-342900">
-              <a:buSzPct val="100000"/>
-              <a:buChar char="•"/>
-            </a:pPr>
-            <a:r>
-              <a:rPr lang="en-US" sz="1200" dirty="0">
-                <a:solidFill>
-                  <a:srgbClr val="6B7280"/>
-                </a:solidFill>
-                <a:latin typeface="Arial" pitchFamily="34" charset="0"/>
-                <a:ea typeface="Arial" pitchFamily="34" charset="-122"/>
-                <a:cs typeface="Arial" pitchFamily="34" charset="-120"/>
-              </a:rPr>
-              <a:t>Path must have curvature ≤ 1/r_min everywhere</a:t>
-            </a:r>
-            <a:endParaRPr lang="en-US" sz="1200" dirty="0"/>
-          </a:p>
-          <a:p>
-            <a:pPr marL="342900" indent="-342900">
-              <a:buSzPct val="100000"/>
-              <a:buChar char="•"/>
-            </a:pPr>
-            <a:r>
-              <a:rPr lang="en-US" sz="1200" dirty="0">
-                <a:solidFill>
-                  <a:srgbClr val="6B7280"/>
-                </a:solidFill>
-                <a:latin typeface="Arial" pitchFamily="34" charset="0"/>
-                <a:ea typeface="Arial" pitchFamily="34" charset="-122"/>
-                <a:cs typeface="Arial" pitchFamily="34" charset="-120"/>
-              </a:rPr>
-              <a:t>Sharp corners are IMPOSSIBLE</a:t>
-            </a:r>
-            <a:endParaRPr lang="en-US" sz="1200" dirty="0"/>
-          </a:p>
-        </p:txBody>
-      </p:sp>
+      <mc:AlternateContent xmlns:mc="http://schemas.openxmlformats.org/markup-compatibility/2006">
+        <mc:Choice xmlns:a14="http://schemas.microsoft.com/office/drawing/2010/main" Requires="a14">
+          <p:sp>
+            <p:nvSpPr>
+              <p:cNvPr id="11" name="Text 9"/>
+              <p:cNvSpPr/>
+              <p:nvPr/>
+            </p:nvSpPr>
+            <p:spPr>
+              <a:xfrm>
+                <a:off x="438912" y="2176272"/>
+                <a:ext cx="3840480" cy="1051560"/>
+              </a:xfrm>
+              <a:prstGeom prst="rect">
+                <a:avLst/>
+              </a:prstGeom>
+              <a:noFill/>
+              <a:ln/>
+            </p:spPr>
+            <p:txBody>
+              <a:bodyPr wrap="square" rtlCol="0" anchor="t"/>
+              <a:lstStyle/>
+              <a:p>
+                <a:pPr marL="342900" indent="-342900">
+                  <a:buSzPct val="100000"/>
+                  <a:buChar char="•"/>
+                </a:pPr>
+                <a:r>
+                  <a:rPr lang="en-US" sz="1200" dirty="0">
+                    <a:solidFill>
+                      <a:srgbClr val="6B7280"/>
+                    </a:solidFill>
+                    <a:latin typeface="Arial" pitchFamily="34" charset="0"/>
+                    <a:ea typeface="Arial" pitchFamily="34" charset="-122"/>
+                    <a:cs typeface="Arial" pitchFamily="34" charset="-120"/>
+                  </a:rPr>
+                  <a:t>Robot at (x,y,θ) can only move FORWARD/BACK and ROTATE — never sideways</a:t>
+                </a:r>
+                <a:endParaRPr lang="en-US" sz="1200" dirty="0"/>
+              </a:p>
+              <a:p>
+                <a:pPr marL="342900" indent="-342900">
+                  <a:buSzPct val="100000"/>
+                  <a:buChar char="•"/>
+                </a:pPr>
+                <a:r>
+                  <a:rPr lang="en-US" sz="1200" dirty="0">
+                    <a:solidFill>
+                      <a:srgbClr val="6B7280"/>
+                    </a:solidFill>
+                    <a:latin typeface="Arial" pitchFamily="34" charset="0"/>
+                    <a:ea typeface="Arial" pitchFamily="34" charset="-122"/>
+                    <a:cs typeface="Arial" pitchFamily="34" charset="-120"/>
+                  </a:rPr>
+                  <a:t>Turning requires a minimum radius: r = v/ω</a:t>
+                </a:r>
+                <a:endParaRPr lang="en-US" sz="1200" dirty="0"/>
+              </a:p>
+              <a:p>
+                <a:pPr marL="342900" indent="-342900">
+                  <a:buSzPct val="100000"/>
+                  <a:buChar char="•"/>
+                </a:pPr>
+                <a:r>
+                  <a:rPr lang="en-US" sz="1200" dirty="0">
+                    <a:solidFill>
+                      <a:srgbClr val="6B7280"/>
+                    </a:solidFill>
+                    <a:latin typeface="Arial" pitchFamily="34" charset="0"/>
+                    <a:ea typeface="Arial" pitchFamily="34" charset="-122"/>
+                    <a:cs typeface="Arial" pitchFamily="34" charset="-120"/>
+                  </a:rPr>
+                  <a:t>Path must have </a:t>
+                </a:r>
+                <a14:m>
+                  <m:oMath xmlns:m="http://schemas.openxmlformats.org/officeDocument/2006/math">
+                    <m:r>
+                      <a:rPr lang="en-US" sz="1200" i="1" dirty="0" smtClean="0">
+                        <a:solidFill>
+                          <a:srgbClr val="6B7280"/>
+                        </a:solidFill>
+                        <a:latin typeface="Cambria Math" panose="02040503050406030204" pitchFamily="18" charset="0"/>
+                        <a:ea typeface="Arial" pitchFamily="34" charset="-122"/>
+                        <a:cs typeface="Arial" pitchFamily="34" charset="-120"/>
+                      </a:rPr>
+                      <m:t>𝑐𝑢𝑟𝑣𝑎𝑡𝑢𝑟𝑒</m:t>
+                    </m:r>
+                    <m:r>
+                      <a:rPr lang="en-US" sz="1200" i="1" dirty="0" smtClean="0">
+                        <a:solidFill>
+                          <a:srgbClr val="6B7280"/>
+                        </a:solidFill>
+                        <a:latin typeface="Cambria Math" panose="02040503050406030204" pitchFamily="18" charset="0"/>
+                        <a:ea typeface="Arial" pitchFamily="34" charset="-122"/>
+                        <a:cs typeface="Arial" pitchFamily="34" charset="-120"/>
+                      </a:rPr>
+                      <m:t> ≤</m:t>
+                    </m:r>
+                    <m:f>
+                      <m:fPr>
+                        <m:ctrlPr>
+                          <a:rPr lang="en-US" sz="1200" i="1" dirty="0" smtClean="0">
+                            <a:solidFill>
+                              <a:srgbClr val="6B7280"/>
+                            </a:solidFill>
+                            <a:latin typeface="Cambria Math" panose="02040503050406030204" pitchFamily="18" charset="0"/>
+                            <a:ea typeface="Arial" pitchFamily="34" charset="-122"/>
+                            <a:cs typeface="Arial" pitchFamily="34" charset="-120"/>
+                          </a:rPr>
+                        </m:ctrlPr>
+                      </m:fPr>
+                      <m:num>
+                        <m:r>
+                          <a:rPr lang="en-US" sz="1200" i="1" dirty="0" smtClean="0">
+                            <a:solidFill>
+                              <a:srgbClr val="6B7280"/>
+                            </a:solidFill>
+                            <a:latin typeface="Cambria Math" panose="02040503050406030204" pitchFamily="18" charset="0"/>
+                            <a:ea typeface="Arial" pitchFamily="34" charset="-122"/>
+                            <a:cs typeface="Arial" pitchFamily="34" charset="-120"/>
+                          </a:rPr>
+                          <m:t>1</m:t>
+                        </m:r>
+                      </m:num>
+                      <m:den>
+                        <m:sSub>
+                          <m:sSubPr>
+                            <m:ctrlPr>
+                              <a:rPr lang="en-US" sz="1200" i="1" dirty="0" smtClean="0">
+                                <a:solidFill>
+                                  <a:srgbClr val="6B7280"/>
+                                </a:solidFill>
+                                <a:latin typeface="Cambria Math" panose="02040503050406030204" pitchFamily="18" charset="0"/>
+                                <a:ea typeface="Arial" pitchFamily="34" charset="-122"/>
+                                <a:cs typeface="Arial" pitchFamily="34" charset="-120"/>
+                              </a:rPr>
+                            </m:ctrlPr>
+                          </m:sSubPr>
+                          <m:e>
+                            <m:r>
+                              <a:rPr lang="en-US" sz="1200" i="1" dirty="0" smtClean="0">
+                                <a:solidFill>
+                                  <a:srgbClr val="6B7280"/>
+                                </a:solidFill>
+                                <a:latin typeface="Cambria Math" panose="02040503050406030204" pitchFamily="18" charset="0"/>
+                                <a:ea typeface="Arial" pitchFamily="34" charset="-122"/>
+                                <a:cs typeface="Arial" pitchFamily="34" charset="-120"/>
+                              </a:rPr>
+                              <m:t>𝑟</m:t>
+                            </m:r>
+                          </m:e>
+                          <m:sub>
+                            <m:func>
+                              <m:funcPr>
+                                <m:ctrlPr>
+                                  <a:rPr lang="en-US" sz="1200" i="1" dirty="0" smtClean="0">
+                                    <a:solidFill>
+                                      <a:srgbClr val="6B7280"/>
+                                    </a:solidFill>
+                                    <a:latin typeface="Cambria Math" panose="02040503050406030204" pitchFamily="18" charset="0"/>
+                                    <a:ea typeface="Arial" pitchFamily="34" charset="-122"/>
+                                    <a:cs typeface="Arial" pitchFamily="34" charset="-120"/>
+                                  </a:rPr>
+                                </m:ctrlPr>
+                              </m:funcPr>
+                              <m:fName>
+                                <m:r>
+                                  <m:rPr>
+                                    <m:sty m:val="p"/>
+                                  </m:rPr>
+                                  <a:rPr lang="en-US" sz="1200" i="0" dirty="0" smtClean="0">
+                                    <a:solidFill>
+                                      <a:srgbClr val="6B7280"/>
+                                    </a:solidFill>
+                                    <a:latin typeface="Cambria Math" panose="02040503050406030204" pitchFamily="18" charset="0"/>
+                                    <a:ea typeface="Arial" pitchFamily="34" charset="-122"/>
+                                    <a:cs typeface="Arial" pitchFamily="34" charset="-120"/>
+                                  </a:rPr>
+                                  <m:t>min</m:t>
+                                </m:r>
+                              </m:fName>
+                              <m:e/>
+                            </m:func>
+                          </m:sub>
+                        </m:sSub>
+                      </m:den>
+                    </m:f>
+                  </m:oMath>
+                </a14:m>
+                <a:r>
+                  <a:rPr lang="en-US" sz="1200" dirty="0">
+                    <a:solidFill>
+                      <a:srgbClr val="6B7280"/>
+                    </a:solidFill>
+                    <a:latin typeface="Arial" pitchFamily="34" charset="0"/>
+                    <a:ea typeface="Arial" pitchFamily="34" charset="-122"/>
+                    <a:cs typeface="Arial" pitchFamily="34" charset="-120"/>
+                  </a:rPr>
+                  <a:t>everywhere</a:t>
+                </a:r>
+                <a:endParaRPr lang="en-US" sz="1200" dirty="0"/>
+              </a:p>
+              <a:p>
+                <a:pPr marL="342900" indent="-342900">
+                  <a:buSzPct val="100000"/>
+                  <a:buChar char="•"/>
+                </a:pPr>
+                <a:r>
+                  <a:rPr lang="en-US" sz="1200" dirty="0">
+                    <a:solidFill>
+                      <a:srgbClr val="6B7280"/>
+                    </a:solidFill>
+                    <a:latin typeface="Arial" pitchFamily="34" charset="0"/>
+                    <a:ea typeface="Arial" pitchFamily="34" charset="-122"/>
+                    <a:cs typeface="Arial" pitchFamily="34" charset="-120"/>
+                  </a:rPr>
+                  <a:t>Sharp corners are IMPOSSIBLE</a:t>
+                </a:r>
+                <a:endParaRPr lang="en-US" sz="1200" dirty="0"/>
+              </a:p>
+            </p:txBody>
+          </p:sp>
+        </mc:Choice>
+        <mc:Fallback>
+          <p:sp>
+            <p:nvSpPr>
+              <p:cNvPr id="11" name="Text 9"/>
+              <p:cNvSpPr>
+                <a:spLocks noRot="1" noChangeAspect="1" noMove="1" noResize="1" noEditPoints="1" noAdjustHandles="1" noChangeArrowheads="1" noChangeShapeType="1" noTextEdit="1"/>
+              </p:cNvSpPr>
+              <p:nvPr/>
+            </p:nvSpPr>
+            <p:spPr>
+              <a:xfrm>
+                <a:off x="438912" y="2176272"/>
+                <a:ext cx="3840480" cy="1051560"/>
+              </a:xfrm>
+              <a:prstGeom prst="rect">
+                <a:avLst/>
+              </a:prstGeom>
+              <a:blipFill>
+                <a:blip r:embed="rId3"/>
+                <a:stretch>
+                  <a:fillRect t="-578" b="-26590"/>
+                </a:stretch>
+              </a:blipFill>
+              <a:ln/>
+            </p:spPr>
+            <p:txBody>
+              <a:bodyPr/>
+              <a:lstStyle/>
+              <a:p>
+                <a:r>
+                  <a:rPr lang="en-US">
+                    <a:noFill/>
+                  </a:rPr>
+                  <a:t> </a:t>
+                </a:r>
+              </a:p>
+            </p:txBody>
+          </p:sp>
+        </mc:Fallback>
+      </mc:AlternateContent>
       <p:sp>
         <p:nvSpPr>
           <p:cNvPr id="16" name="Text 14"/>
@@ -15300,7 +16570,7 @@
         </p:nvSpPr>
         <p:spPr>
           <a:xfrm>
-            <a:off x="365760" y="3474720"/>
+            <a:off x="329184" y="3735324"/>
             <a:ext cx="8412480" cy="274320"/>
           </a:xfrm>
           <a:prstGeom prst="rect">
@@ -15549,7 +16819,7 @@
         <p:spPr>
           <a:xfrm>
             <a:off x="274320" y="1371600"/>
-            <a:ext cx="8595360" cy="1280160"/>
+            <a:ext cx="8595360" cy="1676400"/>
           </a:xfrm>
           <a:prstGeom prst="rect">
             <a:avLst/>
@@ -15626,100 +16896,976 @@
           </a:p>
         </p:txBody>
       </p:sp>
-      <p:sp>
-        <p:nvSpPr>
-          <p:cNvPr id="10" name="Text 8"/>
-          <p:cNvSpPr/>
-          <p:nvPr/>
-        </p:nvSpPr>
-        <p:spPr>
-          <a:xfrm>
-            <a:off x="438912" y="1719072"/>
-            <a:ext cx="8321040" cy="868680"/>
-          </a:xfrm>
-          <a:prstGeom prst="rect">
-            <a:avLst/>
-          </a:prstGeom>
-          <a:noFill/>
-          <a:ln/>
-        </p:spPr>
-        <p:txBody>
-          <a:bodyPr wrap="square" rtlCol="0" anchor="t"/>
-          <a:lstStyle/>
-          <a:p>
-            <a:pPr marL="342900" indent="-342900">
-              <a:buSzPct val="100000"/>
-              <a:buChar char="•"/>
-            </a:pPr>
-            <a:r>
-              <a:rPr lang="en-US" sz="1200" dirty="0">
-                <a:solidFill>
-                  <a:srgbClr val="6B7280"/>
-                </a:solidFill>
-                <a:latin typeface="Arial" pitchFamily="34" charset="0"/>
-                <a:ea typeface="Arial" pitchFamily="34" charset="-122"/>
-                <a:cs typeface="Arial" pitchFamily="34" charset="-120"/>
-              </a:rPr>
-              <a:t>Standard RRT: x_new = x_near + δ · direction  → straight line (may be infeasible)</a:t>
-            </a:r>
-            <a:endParaRPr lang="en-US" sz="1200" dirty="0"/>
-          </a:p>
-          <a:p>
-            <a:pPr marL="342900" indent="-342900">
-              <a:buSzPct val="100000"/>
-              <a:buChar char="•"/>
-            </a:pPr>
-            <a:r>
-              <a:rPr lang="en-US" sz="1200" dirty="0">
-                <a:solidFill>
-                  <a:srgbClr val="6B7280"/>
-                </a:solidFill>
-                <a:latin typeface="Arial" pitchFamily="34" charset="0"/>
-                <a:ea typeface="Arial" pitchFamily="34" charset="-122"/>
-                <a:cs typeface="Arial" pitchFamily="34" charset="-120"/>
-              </a:rPr>
-              <a:t>Kinematic RRT: sample control (v, ω) → simulate forward dynamics for Δt → get x_new</a:t>
-            </a:r>
-            <a:endParaRPr lang="en-US" sz="1200" dirty="0"/>
-          </a:p>
-          <a:p>
-            <a:pPr marL="342900" indent="-342900">
-              <a:buSzPct val="100000"/>
-              <a:buChar char="•"/>
-            </a:pPr>
-            <a:r>
-              <a:rPr lang="en-US" sz="1200" dirty="0">
-                <a:solidFill>
-                  <a:srgbClr val="6B7280"/>
-                </a:solidFill>
-                <a:latin typeface="Arial" pitchFamily="34" charset="0"/>
-                <a:ea typeface="Arial" pitchFamily="34" charset="-122"/>
-                <a:cs typeface="Arial" pitchFamily="34" charset="-120"/>
-              </a:rPr>
-              <a:t>  x_new = x_near + v·cos(θ)·Δt,  y_new = y_near + v·sin(θ)·Δt,  θ_new = θ_near + ω·Δt</a:t>
-            </a:r>
-            <a:endParaRPr lang="en-US" sz="1200" dirty="0"/>
-          </a:p>
-          <a:p>
-            <a:pPr marL="342900" indent="-342900">
-              <a:buSzPct val="100000"/>
-              <a:buChar char="•"/>
-            </a:pPr>
-            <a:r>
-              <a:rPr lang="en-US" sz="1200" dirty="0">
-                <a:solidFill>
-                  <a:srgbClr val="6B7280"/>
-                </a:solidFill>
-                <a:latin typeface="Arial" pitchFamily="34" charset="0"/>
-                <a:ea typeface="Arial" pitchFamily="34" charset="-122"/>
-                <a:cs typeface="Arial" pitchFamily="34" charset="-120"/>
-              </a:rPr>
-              <a:t>The resulting path segments are arcs, not lines → always feasible for the robot!</a:t>
-            </a:r>
-            <a:endParaRPr lang="en-US" sz="1200" dirty="0"/>
-          </a:p>
-        </p:txBody>
-      </p:sp>
+      <mc:AlternateContent xmlns:mc="http://schemas.openxmlformats.org/markup-compatibility/2006">
+        <mc:Choice xmlns:a14="http://schemas.microsoft.com/office/drawing/2010/main" Requires="a14">
+          <p:sp>
+            <p:nvSpPr>
+              <p:cNvPr id="10" name="Text 8"/>
+              <p:cNvSpPr/>
+              <p:nvPr/>
+            </p:nvSpPr>
+            <p:spPr>
+              <a:xfrm>
+                <a:off x="438912" y="1719072"/>
+                <a:ext cx="8321040" cy="868680"/>
+              </a:xfrm>
+              <a:prstGeom prst="rect">
+                <a:avLst/>
+              </a:prstGeom>
+              <a:noFill/>
+              <a:ln/>
+            </p:spPr>
+            <p:txBody>
+              <a:bodyPr wrap="square" rtlCol="0" anchor="t"/>
+              <a:lstStyle/>
+              <a:p>
+                <a:pPr marL="342900" indent="-342900">
+                  <a:buSzPct val="100000"/>
+                  <a:buChar char="•"/>
+                </a:pPr>
+                <a:r>
+                  <a:rPr lang="en-US" sz="1200" dirty="0">
+                    <a:solidFill>
+                      <a:srgbClr val="6B7280"/>
+                    </a:solidFill>
+                    <a:latin typeface="Arial" pitchFamily="34" charset="0"/>
+                    <a:ea typeface="Arial" pitchFamily="34" charset="-122"/>
+                    <a:cs typeface="Arial" pitchFamily="34" charset="-120"/>
+                  </a:rPr>
+                  <a:t>Standard RRT: </a:t>
+                </a:r>
+                <a14:m>
+                  <m:oMath xmlns:m="http://schemas.openxmlformats.org/officeDocument/2006/math">
+                    <m:sSub>
+                      <m:sSubPr>
+                        <m:ctrlPr>
+                          <a:rPr lang="en-US" sz="1200" i="1" dirty="0" smtClean="0">
+                            <a:solidFill>
+                              <a:srgbClr val="6B7280"/>
+                            </a:solidFill>
+                            <a:latin typeface="Cambria Math" panose="02040503050406030204" pitchFamily="18" charset="0"/>
+                            <a:ea typeface="Arial" pitchFamily="34" charset="-122"/>
+                            <a:cs typeface="Arial" pitchFamily="34" charset="-120"/>
+                          </a:rPr>
+                        </m:ctrlPr>
+                      </m:sSubPr>
+                      <m:e>
+                        <m:r>
+                          <a:rPr lang="en-US" sz="1200" i="1" dirty="0" smtClean="0">
+                            <a:solidFill>
+                              <a:srgbClr val="6B7280"/>
+                            </a:solidFill>
+                            <a:latin typeface="Cambria Math" panose="02040503050406030204" pitchFamily="18" charset="0"/>
+                            <a:ea typeface="Arial" pitchFamily="34" charset="-122"/>
+                            <a:cs typeface="Arial" pitchFamily="34" charset="-120"/>
+                          </a:rPr>
+                          <m:t>𝑥</m:t>
+                        </m:r>
+                      </m:e>
+                      <m:sub>
+                        <m:r>
+                          <a:rPr lang="en-US" sz="1200" i="1" dirty="0" smtClean="0">
+                            <a:solidFill>
+                              <a:srgbClr val="6B7280"/>
+                            </a:solidFill>
+                            <a:latin typeface="Cambria Math" panose="02040503050406030204" pitchFamily="18" charset="0"/>
+                            <a:ea typeface="Arial" pitchFamily="34" charset="-122"/>
+                            <a:cs typeface="Arial" pitchFamily="34" charset="-120"/>
+                          </a:rPr>
+                          <m:t>𝑛𝑒𝑤</m:t>
+                        </m:r>
+                      </m:sub>
+                    </m:sSub>
+                    <m:r>
+                      <a:rPr lang="en-US" sz="1200" i="1" dirty="0" smtClean="0">
+                        <a:solidFill>
+                          <a:srgbClr val="6B7280"/>
+                        </a:solidFill>
+                        <a:latin typeface="Cambria Math" panose="02040503050406030204" pitchFamily="18" charset="0"/>
+                        <a:ea typeface="Arial" pitchFamily="34" charset="-122"/>
+                        <a:cs typeface="Arial" pitchFamily="34" charset="-120"/>
+                      </a:rPr>
+                      <m:t>= </m:t>
+                    </m:r>
+                    <m:sSub>
+                      <m:sSubPr>
+                        <m:ctrlPr>
+                          <a:rPr lang="en-US" sz="1200" i="1" dirty="0" smtClean="0">
+                            <a:solidFill>
+                              <a:srgbClr val="6B7280"/>
+                            </a:solidFill>
+                            <a:latin typeface="Cambria Math" panose="02040503050406030204" pitchFamily="18" charset="0"/>
+                            <a:ea typeface="Arial" pitchFamily="34" charset="-122"/>
+                            <a:cs typeface="Arial" pitchFamily="34" charset="-120"/>
+                          </a:rPr>
+                        </m:ctrlPr>
+                      </m:sSubPr>
+                      <m:e>
+                        <m:r>
+                          <a:rPr lang="en-US" sz="1200" i="1" dirty="0" smtClean="0">
+                            <a:solidFill>
+                              <a:srgbClr val="6B7280"/>
+                            </a:solidFill>
+                            <a:latin typeface="Cambria Math" panose="02040503050406030204" pitchFamily="18" charset="0"/>
+                            <a:ea typeface="Arial" pitchFamily="34" charset="-122"/>
+                            <a:cs typeface="Arial" pitchFamily="34" charset="-120"/>
+                          </a:rPr>
+                          <m:t>𝑥</m:t>
+                        </m:r>
+                      </m:e>
+                      <m:sub>
+                        <m:r>
+                          <a:rPr lang="en-US" sz="1200" i="1" dirty="0" smtClean="0">
+                            <a:solidFill>
+                              <a:srgbClr val="6B7280"/>
+                            </a:solidFill>
+                            <a:latin typeface="Cambria Math" panose="02040503050406030204" pitchFamily="18" charset="0"/>
+                            <a:ea typeface="Arial" pitchFamily="34" charset="-122"/>
+                            <a:cs typeface="Arial" pitchFamily="34" charset="-120"/>
+                          </a:rPr>
+                          <m:t>𝑛𝑒𝑎𝑟</m:t>
+                        </m:r>
+                      </m:sub>
+                    </m:sSub>
+                    <m:r>
+                      <a:rPr lang="en-US" sz="1200" i="1" dirty="0" smtClean="0">
+                        <a:solidFill>
+                          <a:srgbClr val="6B7280"/>
+                        </a:solidFill>
+                        <a:latin typeface="Cambria Math" panose="02040503050406030204" pitchFamily="18" charset="0"/>
+                        <a:ea typeface="Arial" pitchFamily="34" charset="-122"/>
+                        <a:cs typeface="Arial" pitchFamily="34" charset="-120"/>
+                      </a:rPr>
+                      <m:t>+ </m:t>
+                    </m:r>
+                    <m:r>
+                      <a:rPr lang="en-US" sz="1200" i="1" dirty="0" smtClean="0">
+                        <a:solidFill>
+                          <a:srgbClr val="6B7280"/>
+                        </a:solidFill>
+                        <a:latin typeface="Cambria Math" panose="02040503050406030204" pitchFamily="18" charset="0"/>
+                        <a:ea typeface="Arial" pitchFamily="34" charset="-122"/>
+                        <a:cs typeface="Arial" pitchFamily="34" charset="-120"/>
+                      </a:rPr>
+                      <m:t>𝛿</m:t>
+                    </m:r>
+                    <m:r>
+                      <a:rPr lang="en-US" sz="1200" i="1" dirty="0" smtClean="0">
+                        <a:solidFill>
+                          <a:srgbClr val="6B7280"/>
+                        </a:solidFill>
+                        <a:latin typeface="Cambria Math" panose="02040503050406030204" pitchFamily="18" charset="0"/>
+                        <a:ea typeface="Arial" pitchFamily="34" charset="-122"/>
+                        <a:cs typeface="Arial" pitchFamily="34" charset="-120"/>
+                      </a:rPr>
+                      <m:t> </m:t>
+                    </m:r>
+                  </m:oMath>
+                </a14:m>
+                <a:r>
+                  <a:rPr lang="en-US" sz="1200" dirty="0">
+                    <a:solidFill>
+                      <a:srgbClr val="6B7280"/>
+                    </a:solidFill>
+                    <a:latin typeface="Arial" pitchFamily="34" charset="0"/>
+                    <a:ea typeface="Arial" pitchFamily="34" charset="-122"/>
+                    <a:cs typeface="Arial" pitchFamily="34" charset="-120"/>
+                  </a:rPr>
+                  <a:t>· direction  → straight line (may be infeasible)</a:t>
+                </a:r>
+                <a:endParaRPr lang="en-US" sz="1200" dirty="0"/>
+              </a:p>
+              <a:p>
+                <a:pPr marL="342900" indent="-342900">
+                  <a:buSzPct val="100000"/>
+                  <a:buChar char="•"/>
+                </a:pPr>
+                <a:r>
+                  <a:rPr lang="en-US" sz="1200" dirty="0">
+                    <a:solidFill>
+                      <a:srgbClr val="6B7280"/>
+                    </a:solidFill>
+                    <a:latin typeface="Arial" pitchFamily="34" charset="0"/>
+                    <a:ea typeface="Arial" pitchFamily="34" charset="-122"/>
+                    <a:cs typeface="Arial" pitchFamily="34" charset="-120"/>
+                  </a:rPr>
+                  <a:t>Kinematic RRT: sample control (v, ω) → simulate forward dynamics for Δt → get </a:t>
+                </a:r>
+                <a14:m>
+                  <m:oMath xmlns:m="http://schemas.openxmlformats.org/officeDocument/2006/math">
+                    <m:sSub>
+                      <m:sSubPr>
+                        <m:ctrlPr>
+                          <a:rPr lang="en-US" sz="1200" i="1" dirty="0" smtClean="0">
+                            <a:solidFill>
+                              <a:srgbClr val="6B7280"/>
+                            </a:solidFill>
+                            <a:latin typeface="Cambria Math" panose="02040503050406030204" pitchFamily="18" charset="0"/>
+                            <a:ea typeface="Arial" pitchFamily="34" charset="-122"/>
+                            <a:cs typeface="Arial" pitchFamily="34" charset="-120"/>
+                          </a:rPr>
+                        </m:ctrlPr>
+                      </m:sSubPr>
+                      <m:e>
+                        <m:r>
+                          <a:rPr lang="en-US" sz="1200" i="1" dirty="0" smtClean="0">
+                            <a:solidFill>
+                              <a:srgbClr val="6B7280"/>
+                            </a:solidFill>
+                            <a:latin typeface="Cambria Math" panose="02040503050406030204" pitchFamily="18" charset="0"/>
+                            <a:ea typeface="Arial" pitchFamily="34" charset="-122"/>
+                            <a:cs typeface="Arial" pitchFamily="34" charset="-120"/>
+                          </a:rPr>
+                          <m:t>𝑥</m:t>
+                        </m:r>
+                      </m:e>
+                      <m:sub>
+                        <m:r>
+                          <a:rPr lang="en-US" sz="1200" i="1" dirty="0" smtClean="0">
+                            <a:solidFill>
+                              <a:srgbClr val="6B7280"/>
+                            </a:solidFill>
+                            <a:latin typeface="Cambria Math" panose="02040503050406030204" pitchFamily="18" charset="0"/>
+                            <a:ea typeface="Arial" pitchFamily="34" charset="-122"/>
+                            <a:cs typeface="Arial" pitchFamily="34" charset="-120"/>
+                          </a:rPr>
+                          <m:t>𝑛𝑒𝑤</m:t>
+                        </m:r>
+                      </m:sub>
+                    </m:sSub>
+                  </m:oMath>
+                </a14:m>
+                <a:endParaRPr lang="en-US" sz="1200" dirty="0"/>
+              </a:p>
+              <a:p>
+                <a:pPr>
+                  <a:buSzPct val="100000"/>
+                </a:pPr>
+                <a14:m>
+                  <m:oMathPara xmlns:m="http://schemas.openxmlformats.org/officeDocument/2006/math">
+                    <m:oMathParaPr>
+                      <m:jc m:val="centerGroup"/>
+                    </m:oMathParaPr>
+                    <m:oMath xmlns:m="http://schemas.openxmlformats.org/officeDocument/2006/math">
+                      <m:sSub>
+                        <m:sSubPr>
+                          <m:ctrlPr>
+                            <a:rPr lang="en-US" sz="1200" i="1" dirty="0" smtClean="0">
+                              <a:solidFill>
+                                <a:srgbClr val="6B7280"/>
+                              </a:solidFill>
+                              <a:latin typeface="Cambria Math" panose="02040503050406030204" pitchFamily="18" charset="0"/>
+                              <a:ea typeface="Arial" pitchFamily="34" charset="-122"/>
+                              <a:cs typeface="Arial" pitchFamily="34" charset="-120"/>
+                            </a:rPr>
+                          </m:ctrlPr>
+                        </m:sSubPr>
+                        <m:e>
+                          <m:r>
+                            <a:rPr lang="en-US" sz="1200" i="1" dirty="0" smtClean="0">
+                              <a:solidFill>
+                                <a:srgbClr val="6B7280"/>
+                              </a:solidFill>
+                              <a:latin typeface="Cambria Math" panose="02040503050406030204" pitchFamily="18" charset="0"/>
+                              <a:ea typeface="Arial" pitchFamily="34" charset="-122"/>
+                              <a:cs typeface="Arial" pitchFamily="34" charset="-120"/>
+                            </a:rPr>
+                            <m:t>𝑥</m:t>
+                          </m:r>
+                        </m:e>
+                        <m:sub>
+                          <m:r>
+                            <a:rPr lang="en-US" sz="1200" i="1" dirty="0" smtClean="0">
+                              <a:solidFill>
+                                <a:srgbClr val="6B7280"/>
+                              </a:solidFill>
+                              <a:latin typeface="Cambria Math" panose="02040503050406030204" pitchFamily="18" charset="0"/>
+                              <a:ea typeface="Arial" pitchFamily="34" charset="-122"/>
+                              <a:cs typeface="Arial" pitchFamily="34" charset="-120"/>
+                            </a:rPr>
+                            <m:t>𝑛𝑒𝑤</m:t>
+                          </m:r>
+                        </m:sub>
+                      </m:sSub>
+                      <m:r>
+                        <a:rPr lang="en-US" sz="1200" i="1" dirty="0" smtClean="0">
+                          <a:solidFill>
+                            <a:srgbClr val="6B7280"/>
+                          </a:solidFill>
+                          <a:latin typeface="Cambria Math" panose="02040503050406030204" pitchFamily="18" charset="0"/>
+                          <a:ea typeface="Arial" pitchFamily="34" charset="-122"/>
+                          <a:cs typeface="Arial" pitchFamily="34" charset="-120"/>
+                        </a:rPr>
+                        <m:t>= </m:t>
+                      </m:r>
+                      <m:sSub>
+                        <m:sSubPr>
+                          <m:ctrlPr>
+                            <a:rPr lang="en-US" sz="1200" i="1" dirty="0" smtClean="0">
+                              <a:solidFill>
+                                <a:srgbClr val="6B7280"/>
+                              </a:solidFill>
+                              <a:latin typeface="Cambria Math" panose="02040503050406030204" pitchFamily="18" charset="0"/>
+                              <a:ea typeface="Arial" pitchFamily="34" charset="-122"/>
+                              <a:cs typeface="Arial" pitchFamily="34" charset="-120"/>
+                            </a:rPr>
+                          </m:ctrlPr>
+                        </m:sSubPr>
+                        <m:e>
+                          <m:r>
+                            <a:rPr lang="en-US" sz="1200" i="1" dirty="0" smtClean="0">
+                              <a:solidFill>
+                                <a:srgbClr val="6B7280"/>
+                              </a:solidFill>
+                              <a:latin typeface="Cambria Math" panose="02040503050406030204" pitchFamily="18" charset="0"/>
+                              <a:ea typeface="Arial" pitchFamily="34" charset="-122"/>
+                              <a:cs typeface="Arial" pitchFamily="34" charset="-120"/>
+                            </a:rPr>
+                            <m:t>𝑥</m:t>
+                          </m:r>
+                        </m:e>
+                        <m:sub>
+                          <m:r>
+                            <a:rPr lang="en-US" sz="1200" i="1" dirty="0" smtClean="0">
+                              <a:solidFill>
+                                <a:srgbClr val="6B7280"/>
+                              </a:solidFill>
+                              <a:latin typeface="Cambria Math" panose="02040503050406030204" pitchFamily="18" charset="0"/>
+                              <a:ea typeface="Arial" pitchFamily="34" charset="-122"/>
+                              <a:cs typeface="Arial" pitchFamily="34" charset="-120"/>
+                            </a:rPr>
+                            <m:t>𝑛𝑒𝑎𝑟</m:t>
+                          </m:r>
+                        </m:sub>
+                      </m:sSub>
+                      <m:r>
+                        <a:rPr lang="en-US" sz="1200" i="1" dirty="0" smtClean="0">
+                          <a:solidFill>
+                            <a:srgbClr val="6B7280"/>
+                          </a:solidFill>
+                          <a:latin typeface="Cambria Math" panose="02040503050406030204" pitchFamily="18" charset="0"/>
+                          <a:ea typeface="Arial" pitchFamily="34" charset="-122"/>
+                          <a:cs typeface="Arial" pitchFamily="34" charset="-120"/>
+                        </a:rPr>
+                        <m:t>+ </m:t>
+                      </m:r>
+                      <m:r>
+                        <a:rPr lang="en-US" sz="1200" i="1" dirty="0" smtClean="0">
+                          <a:solidFill>
+                            <a:srgbClr val="6B7280"/>
+                          </a:solidFill>
+                          <a:latin typeface="Cambria Math" panose="02040503050406030204" pitchFamily="18" charset="0"/>
+                          <a:ea typeface="Arial" pitchFamily="34" charset="-122"/>
+                          <a:cs typeface="Arial" pitchFamily="34" charset="-120"/>
+                        </a:rPr>
+                        <m:t>𝑣</m:t>
+                      </m:r>
+                      <m:r>
+                        <a:rPr lang="en-US" sz="1200" i="1" dirty="0" smtClean="0">
+                          <a:solidFill>
+                            <a:srgbClr val="6B7280"/>
+                          </a:solidFill>
+                          <a:latin typeface="Cambria Math" panose="02040503050406030204" pitchFamily="18" charset="0"/>
+                          <a:ea typeface="Arial" pitchFamily="34" charset="-122"/>
+                          <a:cs typeface="Arial" pitchFamily="34" charset="-120"/>
+                        </a:rPr>
+                        <m:t>·</m:t>
+                      </m:r>
+                      <m:func>
+                        <m:funcPr>
+                          <m:ctrlPr>
+                            <a:rPr lang="en-US" sz="1200" i="1" dirty="0" smtClean="0">
+                              <a:solidFill>
+                                <a:srgbClr val="6B7280"/>
+                              </a:solidFill>
+                              <a:latin typeface="Cambria Math" panose="02040503050406030204" pitchFamily="18" charset="0"/>
+                              <a:ea typeface="Arial" pitchFamily="34" charset="-122"/>
+                              <a:cs typeface="Arial" pitchFamily="34" charset="-120"/>
+                            </a:rPr>
+                          </m:ctrlPr>
+                        </m:funcPr>
+                        <m:fName>
+                          <m:r>
+                            <m:rPr>
+                              <m:sty m:val="p"/>
+                            </m:rPr>
+                            <a:rPr lang="en-US" sz="1200" i="0" dirty="0" smtClean="0">
+                              <a:solidFill>
+                                <a:srgbClr val="6B7280"/>
+                              </a:solidFill>
+                              <a:latin typeface="Cambria Math" panose="02040503050406030204" pitchFamily="18" charset="0"/>
+                              <a:ea typeface="Arial" pitchFamily="34" charset="-122"/>
+                              <a:cs typeface="Arial" pitchFamily="34" charset="-120"/>
+                            </a:rPr>
+                            <m:t>cos</m:t>
+                          </m:r>
+                        </m:fName>
+                        <m:e>
+                          <m:d>
+                            <m:dPr>
+                              <m:ctrlPr>
+                                <a:rPr lang="en-US" sz="1200" i="1" dirty="0" smtClean="0">
+                                  <a:solidFill>
+                                    <a:srgbClr val="6B7280"/>
+                                  </a:solidFill>
+                                  <a:latin typeface="Cambria Math" panose="02040503050406030204" pitchFamily="18" charset="0"/>
+                                  <a:ea typeface="Arial" pitchFamily="34" charset="-122"/>
+                                  <a:cs typeface="Arial" pitchFamily="34" charset="-120"/>
+                                </a:rPr>
+                              </m:ctrlPr>
+                            </m:dPr>
+                            <m:e>
+                              <m:r>
+                                <a:rPr lang="en-US" sz="1200" i="1" dirty="0" smtClean="0">
+                                  <a:solidFill>
+                                    <a:srgbClr val="6B7280"/>
+                                  </a:solidFill>
+                                  <a:latin typeface="Cambria Math" panose="02040503050406030204" pitchFamily="18" charset="0"/>
+                                  <a:ea typeface="Arial" pitchFamily="34" charset="-122"/>
+                                  <a:cs typeface="Arial" pitchFamily="34" charset="-120"/>
+                                </a:rPr>
+                                <m:t>𝜃</m:t>
+                              </m:r>
+                            </m:e>
+                          </m:d>
+                        </m:e>
+                      </m:func>
+                      <m:r>
+                        <a:rPr lang="en-US" sz="1200" i="1" dirty="0" smtClean="0">
+                          <a:solidFill>
+                            <a:srgbClr val="6B7280"/>
+                          </a:solidFill>
+                          <a:latin typeface="Cambria Math" panose="02040503050406030204" pitchFamily="18" charset="0"/>
+                          <a:ea typeface="Arial" pitchFamily="34" charset="-122"/>
+                          <a:cs typeface="Arial" pitchFamily="34" charset="-120"/>
+                        </a:rPr>
+                        <m:t>·</m:t>
+                      </m:r>
+                      <m:r>
+                        <m:rPr>
+                          <m:sty m:val="p"/>
+                        </m:rPr>
+                        <a:rPr lang="en-US" sz="1200" i="0" dirty="0">
+                          <a:solidFill>
+                            <a:srgbClr val="6B7280"/>
+                          </a:solidFill>
+                          <a:latin typeface="Cambria Math" panose="02040503050406030204" pitchFamily="18" charset="0"/>
+                          <a:ea typeface="Arial" pitchFamily="34" charset="-122"/>
+                          <a:cs typeface="Arial" pitchFamily="34" charset="-120"/>
+                        </a:rPr>
+                        <m:t>Δ</m:t>
+                      </m:r>
+                      <m:r>
+                        <a:rPr lang="en-US" sz="1200" i="1" dirty="0">
+                          <a:solidFill>
+                            <a:srgbClr val="6B7280"/>
+                          </a:solidFill>
+                          <a:latin typeface="Cambria Math" panose="02040503050406030204" pitchFamily="18" charset="0"/>
+                          <a:ea typeface="Arial" pitchFamily="34" charset="-122"/>
+                          <a:cs typeface="Arial" pitchFamily="34" charset="-120"/>
+                        </a:rPr>
+                        <m:t>𝑡</m:t>
+                      </m:r>
+                      <m:r>
+                        <a:rPr lang="en-US" sz="1200" i="1" dirty="0">
+                          <a:solidFill>
+                            <a:srgbClr val="6B7280"/>
+                          </a:solidFill>
+                          <a:latin typeface="Cambria Math" panose="02040503050406030204" pitchFamily="18" charset="0"/>
+                          <a:ea typeface="Arial" pitchFamily="34" charset="-122"/>
+                          <a:cs typeface="Arial" pitchFamily="34" charset="-120"/>
+                        </a:rPr>
+                        <m:t>,  </m:t>
+                      </m:r>
+                    </m:oMath>
+                  </m:oMathPara>
+                </a14:m>
+                <a:endParaRPr lang="de-DE" sz="1200" i="1" dirty="0">
+                  <a:solidFill>
+                    <a:srgbClr val="6B7280"/>
+                  </a:solidFill>
+                  <a:latin typeface="Cambria Math" panose="02040503050406030204" pitchFamily="18" charset="0"/>
+                  <a:ea typeface="Arial" pitchFamily="34" charset="-122"/>
+                  <a:cs typeface="Arial" pitchFamily="34" charset="-120"/>
+                </a:endParaRPr>
+              </a:p>
+              <a:p>
+                <a:pPr>
+                  <a:buSzPct val="100000"/>
+                </a:pPr>
+                <a14:m>
+                  <m:oMathPara xmlns:m="http://schemas.openxmlformats.org/officeDocument/2006/math">
+                    <m:oMathParaPr>
+                      <m:jc m:val="centerGroup"/>
+                    </m:oMathParaPr>
+                    <m:oMath xmlns:m="http://schemas.openxmlformats.org/officeDocument/2006/math">
+                      <m:sSub>
+                        <m:sSubPr>
+                          <m:ctrlPr>
+                            <a:rPr lang="en-US" sz="1200" i="1" dirty="0">
+                              <a:solidFill>
+                                <a:srgbClr val="6B7280"/>
+                              </a:solidFill>
+                              <a:latin typeface="Cambria Math" panose="02040503050406030204" pitchFamily="18" charset="0"/>
+                              <a:ea typeface="Arial" pitchFamily="34" charset="-122"/>
+                              <a:cs typeface="Arial" pitchFamily="34" charset="-120"/>
+                            </a:rPr>
+                          </m:ctrlPr>
+                        </m:sSubPr>
+                        <m:e>
+                          <m:r>
+                            <a:rPr lang="en-US" sz="1200" i="1" dirty="0">
+                              <a:solidFill>
+                                <a:srgbClr val="6B7280"/>
+                              </a:solidFill>
+                              <a:latin typeface="Cambria Math" panose="02040503050406030204" pitchFamily="18" charset="0"/>
+                              <a:ea typeface="Arial" pitchFamily="34" charset="-122"/>
+                              <a:cs typeface="Arial" pitchFamily="34" charset="-120"/>
+                            </a:rPr>
+                            <m:t>𝑦</m:t>
+                          </m:r>
+                        </m:e>
+                        <m:sub>
+                          <m:r>
+                            <a:rPr lang="en-US" sz="1200" i="1" dirty="0">
+                              <a:solidFill>
+                                <a:srgbClr val="6B7280"/>
+                              </a:solidFill>
+                              <a:latin typeface="Cambria Math" panose="02040503050406030204" pitchFamily="18" charset="0"/>
+                              <a:ea typeface="Arial" pitchFamily="34" charset="-122"/>
+                              <a:cs typeface="Arial" pitchFamily="34" charset="-120"/>
+                            </a:rPr>
+                            <m:t>𝑛𝑒𝑤</m:t>
+                          </m:r>
+                        </m:sub>
+                      </m:sSub>
+                      <m:r>
+                        <a:rPr lang="en-US" sz="1200" i="1" dirty="0">
+                          <a:solidFill>
+                            <a:srgbClr val="6B7280"/>
+                          </a:solidFill>
+                          <a:latin typeface="Cambria Math" panose="02040503050406030204" pitchFamily="18" charset="0"/>
+                          <a:ea typeface="Arial" pitchFamily="34" charset="-122"/>
+                          <a:cs typeface="Arial" pitchFamily="34" charset="-120"/>
+                        </a:rPr>
+                        <m:t>= </m:t>
+                      </m:r>
+                      <m:sSub>
+                        <m:sSubPr>
+                          <m:ctrlPr>
+                            <a:rPr lang="en-US" sz="1200" i="1" dirty="0">
+                              <a:solidFill>
+                                <a:srgbClr val="6B7280"/>
+                              </a:solidFill>
+                              <a:latin typeface="Cambria Math" panose="02040503050406030204" pitchFamily="18" charset="0"/>
+                              <a:ea typeface="Arial" pitchFamily="34" charset="-122"/>
+                              <a:cs typeface="Arial" pitchFamily="34" charset="-120"/>
+                            </a:rPr>
+                          </m:ctrlPr>
+                        </m:sSubPr>
+                        <m:e>
+                          <m:r>
+                            <a:rPr lang="en-US" sz="1200" i="1" dirty="0">
+                              <a:solidFill>
+                                <a:srgbClr val="6B7280"/>
+                              </a:solidFill>
+                              <a:latin typeface="Cambria Math" panose="02040503050406030204" pitchFamily="18" charset="0"/>
+                              <a:ea typeface="Arial" pitchFamily="34" charset="-122"/>
+                              <a:cs typeface="Arial" pitchFamily="34" charset="-120"/>
+                            </a:rPr>
+                            <m:t>𝑦</m:t>
+                          </m:r>
+                        </m:e>
+                        <m:sub>
+                          <m:r>
+                            <a:rPr lang="en-US" sz="1200" i="1" dirty="0">
+                              <a:solidFill>
+                                <a:srgbClr val="6B7280"/>
+                              </a:solidFill>
+                              <a:latin typeface="Cambria Math" panose="02040503050406030204" pitchFamily="18" charset="0"/>
+                              <a:ea typeface="Arial" pitchFamily="34" charset="-122"/>
+                              <a:cs typeface="Arial" pitchFamily="34" charset="-120"/>
+                            </a:rPr>
+                            <m:t>𝑛𝑒𝑎𝑟</m:t>
+                          </m:r>
+                        </m:sub>
+                      </m:sSub>
+                      <m:r>
+                        <a:rPr lang="en-US" sz="1200" i="1" dirty="0">
+                          <a:solidFill>
+                            <a:srgbClr val="6B7280"/>
+                          </a:solidFill>
+                          <a:latin typeface="Cambria Math" panose="02040503050406030204" pitchFamily="18" charset="0"/>
+                          <a:ea typeface="Arial" pitchFamily="34" charset="-122"/>
+                          <a:cs typeface="Arial" pitchFamily="34" charset="-120"/>
+                        </a:rPr>
+                        <m:t>+ </m:t>
+                      </m:r>
+                      <m:r>
+                        <a:rPr lang="en-US" sz="1200" i="1" dirty="0">
+                          <a:solidFill>
+                            <a:srgbClr val="6B7280"/>
+                          </a:solidFill>
+                          <a:latin typeface="Cambria Math" panose="02040503050406030204" pitchFamily="18" charset="0"/>
+                          <a:ea typeface="Arial" pitchFamily="34" charset="-122"/>
+                          <a:cs typeface="Arial" pitchFamily="34" charset="-120"/>
+                        </a:rPr>
+                        <m:t>𝑣</m:t>
+                      </m:r>
+                      <m:r>
+                        <a:rPr lang="en-US" sz="1200" i="1" dirty="0">
+                          <a:solidFill>
+                            <a:srgbClr val="6B7280"/>
+                          </a:solidFill>
+                          <a:latin typeface="Cambria Math" panose="02040503050406030204" pitchFamily="18" charset="0"/>
+                          <a:ea typeface="Arial" pitchFamily="34" charset="-122"/>
+                          <a:cs typeface="Arial" pitchFamily="34" charset="-120"/>
+                        </a:rPr>
+                        <m:t>·</m:t>
+                      </m:r>
+                      <m:func>
+                        <m:funcPr>
+                          <m:ctrlPr>
+                            <a:rPr lang="en-US" sz="1200" i="1" dirty="0">
+                              <a:solidFill>
+                                <a:srgbClr val="6B7280"/>
+                              </a:solidFill>
+                              <a:latin typeface="Cambria Math" panose="02040503050406030204" pitchFamily="18" charset="0"/>
+                              <a:ea typeface="Arial" pitchFamily="34" charset="-122"/>
+                              <a:cs typeface="Arial" pitchFamily="34" charset="-120"/>
+                            </a:rPr>
+                          </m:ctrlPr>
+                        </m:funcPr>
+                        <m:fName>
+                          <m:r>
+                            <m:rPr>
+                              <m:sty m:val="p"/>
+                            </m:rPr>
+                            <a:rPr lang="en-US" sz="1200" i="0" dirty="0">
+                              <a:solidFill>
+                                <a:srgbClr val="6B7280"/>
+                              </a:solidFill>
+                              <a:latin typeface="Cambria Math" panose="02040503050406030204" pitchFamily="18" charset="0"/>
+                              <a:ea typeface="Arial" pitchFamily="34" charset="-122"/>
+                              <a:cs typeface="Arial" pitchFamily="34" charset="-120"/>
+                            </a:rPr>
+                            <m:t>sin</m:t>
+                          </m:r>
+                        </m:fName>
+                        <m:e>
+                          <m:d>
+                            <m:dPr>
+                              <m:ctrlPr>
+                                <a:rPr lang="en-US" sz="1200" i="1" dirty="0">
+                                  <a:solidFill>
+                                    <a:srgbClr val="6B7280"/>
+                                  </a:solidFill>
+                                  <a:latin typeface="Cambria Math" panose="02040503050406030204" pitchFamily="18" charset="0"/>
+                                  <a:ea typeface="Arial" pitchFamily="34" charset="-122"/>
+                                  <a:cs typeface="Arial" pitchFamily="34" charset="-120"/>
+                                </a:rPr>
+                              </m:ctrlPr>
+                            </m:dPr>
+                            <m:e>
+                              <m:r>
+                                <a:rPr lang="en-US" sz="1200" i="1" dirty="0">
+                                  <a:solidFill>
+                                    <a:srgbClr val="6B7280"/>
+                                  </a:solidFill>
+                                  <a:latin typeface="Cambria Math" panose="02040503050406030204" pitchFamily="18" charset="0"/>
+                                  <a:ea typeface="Arial" pitchFamily="34" charset="-122"/>
+                                  <a:cs typeface="Arial" pitchFamily="34" charset="-120"/>
+                                </a:rPr>
+                                <m:t>𝜃</m:t>
+                              </m:r>
+                            </m:e>
+                          </m:d>
+                        </m:e>
+                      </m:func>
+                      <m:r>
+                        <a:rPr lang="en-US" sz="1200" i="1" dirty="0">
+                          <a:solidFill>
+                            <a:srgbClr val="6B7280"/>
+                          </a:solidFill>
+                          <a:latin typeface="Cambria Math" panose="02040503050406030204" pitchFamily="18" charset="0"/>
+                          <a:ea typeface="Arial" pitchFamily="34" charset="-122"/>
+                          <a:cs typeface="Arial" pitchFamily="34" charset="-120"/>
+                        </a:rPr>
+                        <m:t>·</m:t>
+                      </m:r>
+                      <m:r>
+                        <m:rPr>
+                          <m:sty m:val="p"/>
+                        </m:rPr>
+                        <a:rPr lang="en-US" sz="1200" i="0" dirty="0">
+                          <a:solidFill>
+                            <a:srgbClr val="6B7280"/>
+                          </a:solidFill>
+                          <a:latin typeface="Cambria Math" panose="02040503050406030204" pitchFamily="18" charset="0"/>
+                          <a:ea typeface="Arial" pitchFamily="34" charset="-122"/>
+                          <a:cs typeface="Arial" pitchFamily="34" charset="-120"/>
+                        </a:rPr>
+                        <m:t>Δ</m:t>
+                      </m:r>
+                      <m:r>
+                        <a:rPr lang="en-US" sz="1200" i="1" dirty="0">
+                          <a:solidFill>
+                            <a:srgbClr val="6B7280"/>
+                          </a:solidFill>
+                          <a:latin typeface="Cambria Math" panose="02040503050406030204" pitchFamily="18" charset="0"/>
+                          <a:ea typeface="Arial" pitchFamily="34" charset="-122"/>
+                          <a:cs typeface="Arial" pitchFamily="34" charset="-120"/>
+                        </a:rPr>
+                        <m:t>𝑡</m:t>
+                      </m:r>
+                      <m:r>
+                        <a:rPr lang="en-US" sz="1200" i="1" dirty="0">
+                          <a:solidFill>
+                            <a:srgbClr val="6B7280"/>
+                          </a:solidFill>
+                          <a:latin typeface="Cambria Math" panose="02040503050406030204" pitchFamily="18" charset="0"/>
+                          <a:ea typeface="Arial" pitchFamily="34" charset="-122"/>
+                          <a:cs typeface="Arial" pitchFamily="34" charset="-120"/>
+                        </a:rPr>
+                        <m:t>,  </m:t>
+                      </m:r>
+                    </m:oMath>
+                  </m:oMathPara>
+                </a14:m>
+                <a:endParaRPr lang="de-DE" sz="1200" i="1" dirty="0">
+                  <a:solidFill>
+                    <a:srgbClr val="6B7280"/>
+                  </a:solidFill>
+                  <a:latin typeface="Cambria Math" panose="02040503050406030204" pitchFamily="18" charset="0"/>
+                  <a:ea typeface="Arial" pitchFamily="34" charset="-122"/>
+                  <a:cs typeface="Arial" pitchFamily="34" charset="-120"/>
+                </a:endParaRPr>
+              </a:p>
+              <a:p>
+                <a:pPr>
+                  <a:buSzPct val="100000"/>
+                </a:pPr>
+                <a14:m>
+                  <m:oMathPara xmlns:m="http://schemas.openxmlformats.org/officeDocument/2006/math">
+                    <m:oMathParaPr>
+                      <m:jc m:val="centerGroup"/>
+                    </m:oMathParaPr>
+                    <m:oMath xmlns:m="http://schemas.openxmlformats.org/officeDocument/2006/math">
+                      <m:sSub>
+                        <m:sSubPr>
+                          <m:ctrlPr>
+                            <a:rPr lang="en-US" sz="1200" i="1" dirty="0">
+                              <a:solidFill>
+                                <a:srgbClr val="6B7280"/>
+                              </a:solidFill>
+                              <a:latin typeface="Cambria Math" panose="02040503050406030204" pitchFamily="18" charset="0"/>
+                              <a:ea typeface="Arial" pitchFamily="34" charset="-122"/>
+                              <a:cs typeface="Arial" pitchFamily="34" charset="-120"/>
+                            </a:rPr>
+                          </m:ctrlPr>
+                        </m:sSubPr>
+                        <m:e>
+                          <m:r>
+                            <a:rPr lang="en-US" sz="1200" i="1" dirty="0">
+                              <a:solidFill>
+                                <a:srgbClr val="6B7280"/>
+                              </a:solidFill>
+                              <a:latin typeface="Cambria Math" panose="02040503050406030204" pitchFamily="18" charset="0"/>
+                              <a:ea typeface="Arial" pitchFamily="34" charset="-122"/>
+                              <a:cs typeface="Arial" pitchFamily="34" charset="-120"/>
+                            </a:rPr>
+                            <m:t>𝜃</m:t>
+                          </m:r>
+                        </m:e>
+                        <m:sub>
+                          <m:r>
+                            <a:rPr lang="en-US" sz="1200" i="1" dirty="0">
+                              <a:solidFill>
+                                <a:srgbClr val="6B7280"/>
+                              </a:solidFill>
+                              <a:latin typeface="Cambria Math" panose="02040503050406030204" pitchFamily="18" charset="0"/>
+                              <a:ea typeface="Arial" pitchFamily="34" charset="-122"/>
+                              <a:cs typeface="Arial" pitchFamily="34" charset="-120"/>
+                            </a:rPr>
+                            <m:t>𝑛𝑒𝑤</m:t>
+                          </m:r>
+                        </m:sub>
+                      </m:sSub>
+                      <m:r>
+                        <a:rPr lang="en-US" sz="1200" i="1" dirty="0">
+                          <a:solidFill>
+                            <a:srgbClr val="6B7280"/>
+                          </a:solidFill>
+                          <a:latin typeface="Cambria Math" panose="02040503050406030204" pitchFamily="18" charset="0"/>
+                          <a:ea typeface="Arial" pitchFamily="34" charset="-122"/>
+                          <a:cs typeface="Arial" pitchFamily="34" charset="-120"/>
+                        </a:rPr>
+                        <m:t>= </m:t>
+                      </m:r>
+                      <m:sSub>
+                        <m:sSubPr>
+                          <m:ctrlPr>
+                            <a:rPr lang="en-US" sz="1200" i="1" dirty="0">
+                              <a:solidFill>
+                                <a:srgbClr val="6B7280"/>
+                              </a:solidFill>
+                              <a:latin typeface="Cambria Math" panose="02040503050406030204" pitchFamily="18" charset="0"/>
+                              <a:ea typeface="Arial" pitchFamily="34" charset="-122"/>
+                              <a:cs typeface="Arial" pitchFamily="34" charset="-120"/>
+                            </a:rPr>
+                          </m:ctrlPr>
+                        </m:sSubPr>
+                        <m:e>
+                          <m:r>
+                            <a:rPr lang="en-US" sz="1200" i="1" dirty="0">
+                              <a:solidFill>
+                                <a:srgbClr val="6B7280"/>
+                              </a:solidFill>
+                              <a:latin typeface="Cambria Math" panose="02040503050406030204" pitchFamily="18" charset="0"/>
+                              <a:ea typeface="Arial" pitchFamily="34" charset="-122"/>
+                              <a:cs typeface="Arial" pitchFamily="34" charset="-120"/>
+                            </a:rPr>
+                            <m:t>𝜃</m:t>
+                          </m:r>
+                        </m:e>
+                        <m:sub>
+                          <m:r>
+                            <a:rPr lang="en-US" sz="1200" i="1" dirty="0">
+                              <a:solidFill>
+                                <a:srgbClr val="6B7280"/>
+                              </a:solidFill>
+                              <a:latin typeface="Cambria Math" panose="02040503050406030204" pitchFamily="18" charset="0"/>
+                              <a:ea typeface="Arial" pitchFamily="34" charset="-122"/>
+                              <a:cs typeface="Arial" pitchFamily="34" charset="-120"/>
+                            </a:rPr>
+                            <m:t>𝑛𝑒𝑎𝑟</m:t>
+                          </m:r>
+                        </m:sub>
+                      </m:sSub>
+                      <m:r>
+                        <a:rPr lang="en-US" sz="1200" i="1" dirty="0">
+                          <a:solidFill>
+                            <a:srgbClr val="6B7280"/>
+                          </a:solidFill>
+                          <a:latin typeface="Cambria Math" panose="02040503050406030204" pitchFamily="18" charset="0"/>
+                          <a:ea typeface="Arial" pitchFamily="34" charset="-122"/>
+                          <a:cs typeface="Arial" pitchFamily="34" charset="-120"/>
+                        </a:rPr>
+                        <m:t>+ </m:t>
+                      </m:r>
+                      <m:r>
+                        <a:rPr lang="en-US" sz="1200" i="1" dirty="0">
+                          <a:solidFill>
+                            <a:srgbClr val="6B7280"/>
+                          </a:solidFill>
+                          <a:latin typeface="Cambria Math" panose="02040503050406030204" pitchFamily="18" charset="0"/>
+                          <a:ea typeface="Arial" pitchFamily="34" charset="-122"/>
+                          <a:cs typeface="Arial" pitchFamily="34" charset="-120"/>
+                        </a:rPr>
+                        <m:t>𝜔</m:t>
+                      </m:r>
+                      <m:r>
+                        <a:rPr lang="en-US" sz="1200" i="1" dirty="0">
+                          <a:solidFill>
+                            <a:srgbClr val="6B7280"/>
+                          </a:solidFill>
+                          <a:latin typeface="Cambria Math" panose="02040503050406030204" pitchFamily="18" charset="0"/>
+                          <a:ea typeface="Arial" pitchFamily="34" charset="-122"/>
+                          <a:cs typeface="Arial" pitchFamily="34" charset="-120"/>
+                        </a:rPr>
+                        <m:t>·</m:t>
+                      </m:r>
+                      <m:r>
+                        <m:rPr>
+                          <m:sty m:val="p"/>
+                        </m:rPr>
+                        <a:rPr lang="en-US" sz="1200" i="0" dirty="0">
+                          <a:solidFill>
+                            <a:srgbClr val="6B7280"/>
+                          </a:solidFill>
+                          <a:latin typeface="Cambria Math" panose="02040503050406030204" pitchFamily="18" charset="0"/>
+                          <a:ea typeface="Arial" pitchFamily="34" charset="-122"/>
+                          <a:cs typeface="Arial" pitchFamily="34" charset="-120"/>
+                        </a:rPr>
+                        <m:t>Δ</m:t>
+                      </m:r>
+                      <m:r>
+                        <a:rPr lang="en-US" sz="1200" i="1" dirty="0">
+                          <a:solidFill>
+                            <a:srgbClr val="6B7280"/>
+                          </a:solidFill>
+                          <a:latin typeface="Cambria Math" panose="02040503050406030204" pitchFamily="18" charset="0"/>
+                          <a:ea typeface="Arial" pitchFamily="34" charset="-122"/>
+                          <a:cs typeface="Arial" pitchFamily="34" charset="-120"/>
+                        </a:rPr>
+                        <m:t>𝑡</m:t>
+                      </m:r>
+                    </m:oMath>
+                  </m:oMathPara>
+                </a14:m>
+                <a:endParaRPr lang="en-US" sz="1200" dirty="0"/>
+              </a:p>
+              <a:p>
+                <a:pPr marL="342900" indent="-342900">
+                  <a:buSzPct val="100000"/>
+                  <a:buChar char="•"/>
+                </a:pPr>
+                <a:r>
+                  <a:rPr lang="en-US" sz="1200" dirty="0">
+                    <a:solidFill>
+                      <a:srgbClr val="6B7280"/>
+                    </a:solidFill>
+                    <a:latin typeface="Arial" pitchFamily="34" charset="0"/>
+                    <a:ea typeface="Arial" pitchFamily="34" charset="-122"/>
+                    <a:cs typeface="Arial" pitchFamily="34" charset="-120"/>
+                  </a:rPr>
+                  <a:t>The resulting path segments are arcs, not lines → always feasible for the robot!</a:t>
+                </a:r>
+                <a:endParaRPr lang="en-US" sz="1200" dirty="0"/>
+              </a:p>
+            </p:txBody>
+          </p:sp>
+        </mc:Choice>
+        <mc:Fallback>
+          <p:sp>
+            <p:nvSpPr>
+              <p:cNvPr id="10" name="Text 8"/>
+              <p:cNvSpPr>
+                <a:spLocks noRot="1" noChangeAspect="1" noMove="1" noResize="1" noEditPoints="1" noAdjustHandles="1" noChangeArrowheads="1" noChangeShapeType="1" noTextEdit="1"/>
+              </p:cNvSpPr>
+              <p:nvPr/>
+            </p:nvSpPr>
+            <p:spPr>
+              <a:xfrm>
+                <a:off x="438912" y="1719072"/>
+                <a:ext cx="8321040" cy="868680"/>
+              </a:xfrm>
+              <a:prstGeom prst="rect">
+                <a:avLst/>
+              </a:prstGeom>
+              <a:blipFill>
+                <a:blip r:embed="rId3"/>
+                <a:stretch>
+                  <a:fillRect t="-699" b="-41259"/>
+                </a:stretch>
+              </a:blipFill>
+              <a:ln/>
+            </p:spPr>
+            <p:txBody>
+              <a:bodyPr/>
+              <a:lstStyle/>
+              <a:p>
+                <a:r>
+                  <a:rPr lang="en-US">
+                    <a:noFill/>
+                  </a:rPr>
+                  <a:t> </a:t>
+                </a:r>
+              </a:p>
+            </p:txBody>
+          </p:sp>
+        </mc:Fallback>
+      </mc:AlternateContent>
       <p:sp>
         <p:nvSpPr>
           <p:cNvPr id="11" name="Text 9"/>
@@ -15728,7 +17874,7 @@
         </p:nvSpPr>
         <p:spPr>
           <a:xfrm>
-            <a:off x="365760" y="2834640"/>
+            <a:off x="365760" y="3302463"/>
             <a:ext cx="8412480" cy="1371600"/>
           </a:xfrm>
           <a:prstGeom prst="rect">
@@ -16550,13 +18696,10 @@
               </a:rPr>
               <a:t>Collision certain for this robot size</a:t>
             </a:r>
-            <a:endParaRPr lang="en-US" sz="1200" dirty="0"/>
-          </a:p>
-          <a:p>
-            <a:pPr marL="342900" indent="-342900">
-              <a:buSzPct val="100000"/>
-              <a:buChar char="•"/>
-            </a:pPr>
+            <a:r>
+              <a:rPr lang="en-US" sz="1200" dirty="0"/>
+              <a:t> </a:t>
+            </a:r>
             <a:r>
               <a:rPr lang="en-US" sz="1200" dirty="0">
                 <a:solidFill>
@@ -16676,100 +18819,258 @@
           </a:p>
         </p:txBody>
       </p:sp>
-      <p:sp>
-        <p:nvSpPr>
-          <p:cNvPr id="20" name="Text 18"/>
-          <p:cNvSpPr/>
-          <p:nvPr/>
-        </p:nvSpPr>
-        <p:spPr>
-          <a:xfrm>
-            <a:off x="6291072" y="2176272"/>
-            <a:ext cx="2560320" cy="1417320"/>
-          </a:xfrm>
-          <a:prstGeom prst="rect">
-            <a:avLst/>
-          </a:prstGeom>
-          <a:noFill/>
-          <a:ln/>
-        </p:spPr>
-        <p:txBody>
-          <a:bodyPr wrap="square" rtlCol="0" anchor="t"/>
-          <a:lstStyle/>
-          <a:p>
-            <a:pPr marL="342900" indent="-342900">
-              <a:buSzPct val="100000"/>
-              <a:buChar char="•"/>
-            </a:pPr>
-            <a:r>
-              <a:rPr lang="en-US" sz="1200" dirty="0">
-                <a:solidFill>
-                  <a:srgbClr val="6B7280"/>
-                </a:solidFill>
-                <a:latin typeface="Arial" pitchFamily="34" charset="0"/>
-                <a:ea typeface="Arial" pitchFamily="34" charset="-122"/>
-                <a:cs typeface="Arial" pitchFamily="34" charset="-120"/>
-              </a:rPr>
-              <a:t>Near obstacle but not colliding</a:t>
-            </a:r>
-            <a:endParaRPr lang="en-US" sz="1200" dirty="0"/>
-          </a:p>
-          <a:p>
-            <a:pPr marL="342900" indent="-342900">
-              <a:buSzPct val="100000"/>
-              <a:buChar char="•"/>
-            </a:pPr>
-            <a:r>
-              <a:rPr lang="en-US" sz="1200" dirty="0">
-                <a:solidFill>
-                  <a:srgbClr val="6B7280"/>
-                </a:solidFill>
-                <a:latin typeface="Arial" pitchFamily="34" charset="0"/>
-                <a:ea typeface="Arial" pitchFamily="34" charset="-122"/>
-                <a:cs typeface="Arial" pitchFamily="34" charset="-120"/>
-              </a:rPr>
-              <a:t>Cost decreases with distance</a:t>
-            </a:r>
-            <a:endParaRPr lang="en-US" sz="1200" dirty="0"/>
-          </a:p>
-          <a:p>
-            <a:pPr marL="342900" indent="-342900">
-              <a:buSzPct val="100000"/>
-              <a:buChar char="•"/>
-            </a:pPr>
-            <a:r>
-              <a:rPr lang="en-US" sz="1200" dirty="0">
-                <a:solidFill>
-                  <a:srgbClr val="6B7280"/>
-                </a:solidFill>
-                <a:latin typeface="Arial" pitchFamily="34" charset="0"/>
-                <a:ea typeface="Arial" pitchFamily="34" charset="-122"/>
-                <a:cs typeface="Arial" pitchFamily="34" charset="-120"/>
-              </a:rPr>
-              <a:t>Exponential decay: c = 253·e^(-k·d)</a:t>
-            </a:r>
-            <a:endParaRPr lang="en-US" sz="1200" dirty="0"/>
-          </a:p>
-          <a:p>
-            <a:pPr marL="342900" indent="-342900">
-              <a:buSzPct val="100000"/>
-              <a:buChar char="•"/>
-            </a:pPr>
-            <a:r>
-              <a:rPr lang="en-US" sz="1200" dirty="0">
-                <a:solidFill>
-                  <a:srgbClr val="6B7280"/>
-                </a:solidFill>
-                <a:latin typeface="Arial" pitchFamily="34" charset="0"/>
-                <a:ea typeface="Arial" pitchFamily="34" charset="-122"/>
-                <a:cs typeface="Arial" pitchFamily="34" charset="-120"/>
-              </a:rPr>
-              <a:t>Planner prefers to stay far away</a:t>
-            </a:r>
-            <a:endParaRPr lang="en-US" sz="1200" dirty="0"/>
-          </a:p>
-        </p:txBody>
-      </p:sp>
+      <mc:AlternateContent xmlns:mc="http://schemas.openxmlformats.org/markup-compatibility/2006">
+        <mc:Choice xmlns:a14="http://schemas.microsoft.com/office/drawing/2010/main" Requires="a14">
+          <p:sp>
+            <p:nvSpPr>
+              <p:cNvPr id="20" name="Text 18"/>
+              <p:cNvSpPr/>
+              <p:nvPr/>
+            </p:nvSpPr>
+            <p:spPr>
+              <a:xfrm>
+                <a:off x="6291072" y="2176272"/>
+                <a:ext cx="2560320" cy="1417320"/>
+              </a:xfrm>
+              <a:prstGeom prst="rect">
+                <a:avLst/>
+              </a:prstGeom>
+              <a:noFill/>
+              <a:ln/>
+            </p:spPr>
+            <p:txBody>
+              <a:bodyPr wrap="square" rtlCol="0" anchor="t"/>
+              <a:lstStyle/>
+              <a:p>
+                <a:pPr marL="342900" indent="-342900">
+                  <a:buSzPct val="100000"/>
+                  <a:buChar char="•"/>
+                </a:pPr>
+                <a:r>
+                  <a:rPr lang="en-US" sz="1200" dirty="0">
+                    <a:solidFill>
+                      <a:srgbClr val="6B7280"/>
+                    </a:solidFill>
+                    <a:latin typeface="Arial" pitchFamily="34" charset="0"/>
+                    <a:ea typeface="Arial" pitchFamily="34" charset="-122"/>
+                    <a:cs typeface="Arial" pitchFamily="34" charset="-120"/>
+                  </a:rPr>
+                  <a:t>Near obstacle but not colliding</a:t>
+                </a:r>
+                <a:endParaRPr lang="en-US" sz="1200" dirty="0"/>
+              </a:p>
+              <a:p>
+                <a:pPr marL="342900" indent="-342900">
+                  <a:buSzPct val="100000"/>
+                  <a:buChar char="•"/>
+                </a:pPr>
+                <a:r>
+                  <a:rPr lang="en-US" sz="1200" dirty="0">
+                    <a:solidFill>
+                      <a:srgbClr val="6B7280"/>
+                    </a:solidFill>
+                    <a:latin typeface="Arial" pitchFamily="34" charset="0"/>
+                    <a:ea typeface="Arial" pitchFamily="34" charset="-122"/>
+                    <a:cs typeface="Arial" pitchFamily="34" charset="-120"/>
+                  </a:rPr>
+                  <a:t>Cost decreases with distance</a:t>
+                </a:r>
+                <a:endParaRPr lang="en-US" sz="1200" dirty="0"/>
+              </a:p>
+              <a:p>
+                <a:pPr marL="342900" indent="-342900">
+                  <a:buSzPct val="100000"/>
+                  <a:buChar char="•"/>
+                </a:pPr>
+                <a:r>
+                  <a:rPr lang="en-US" sz="1200" dirty="0">
+                    <a:solidFill>
+                      <a:srgbClr val="6B7280"/>
+                    </a:solidFill>
+                    <a:latin typeface="Arial" pitchFamily="34" charset="0"/>
+                    <a:ea typeface="Arial" pitchFamily="34" charset="-122"/>
+                    <a:cs typeface="Arial" pitchFamily="34" charset="-120"/>
+                  </a:rPr>
+                  <a:t>Exponential decay:</a:t>
+                </a:r>
+              </a:p>
+              <a:p>
+                <a:pPr>
+                  <a:buSzPct val="100000"/>
+                </a:pPr>
+                <a:r>
+                  <a:rPr lang="en-US" sz="1200" dirty="0">
+                    <a:solidFill>
+                      <a:srgbClr val="6B7280"/>
+                    </a:solidFill>
+                    <a:latin typeface="Arial" pitchFamily="34" charset="0"/>
+                    <a:ea typeface="Arial" pitchFamily="34" charset="-122"/>
+                    <a:cs typeface="Arial" pitchFamily="34" charset="-120"/>
+                  </a:rPr>
+                  <a:t>            </a:t>
+                </a:r>
+                <a14:m>
+                  <m:oMath xmlns:m="http://schemas.openxmlformats.org/officeDocument/2006/math">
+                    <m:r>
+                      <a:rPr lang="en-US" sz="1200" i="1" dirty="0" smtClean="0">
+                        <a:solidFill>
+                          <a:srgbClr val="6B7280"/>
+                        </a:solidFill>
+                        <a:latin typeface="Cambria Math" panose="02040503050406030204" pitchFamily="18" charset="0"/>
+                        <a:ea typeface="Arial" pitchFamily="34" charset="-122"/>
+                        <a:cs typeface="Arial" pitchFamily="34" charset="-120"/>
+                      </a:rPr>
+                      <m:t>𝑐</m:t>
+                    </m:r>
+                    <m:r>
+                      <a:rPr lang="en-US" sz="1200" i="1" dirty="0" smtClean="0">
+                        <a:solidFill>
+                          <a:srgbClr val="6B7280"/>
+                        </a:solidFill>
+                        <a:latin typeface="Cambria Math" panose="02040503050406030204" pitchFamily="18" charset="0"/>
+                        <a:ea typeface="Arial" pitchFamily="34" charset="-122"/>
+                        <a:cs typeface="Arial" pitchFamily="34" charset="-120"/>
+                      </a:rPr>
+                      <m:t> = 253·</m:t>
+                    </m:r>
+                    <m:sSup>
+                      <m:sSupPr>
+                        <m:ctrlPr>
+                          <a:rPr lang="en-US" sz="1200" i="1" dirty="0" smtClean="0">
+                            <a:solidFill>
+                              <a:srgbClr val="6B7280"/>
+                            </a:solidFill>
+                            <a:latin typeface="Cambria Math" panose="02040503050406030204" pitchFamily="18" charset="0"/>
+                            <a:ea typeface="Arial" pitchFamily="34" charset="-122"/>
+                            <a:cs typeface="Arial" pitchFamily="34" charset="-120"/>
+                          </a:rPr>
+                        </m:ctrlPr>
+                      </m:sSupPr>
+                      <m:e>
+                        <m:r>
+                          <a:rPr lang="en-US" sz="1200" i="1" dirty="0" smtClean="0">
+                            <a:solidFill>
+                              <a:srgbClr val="6B7280"/>
+                            </a:solidFill>
+                            <a:latin typeface="Cambria Math" panose="02040503050406030204" pitchFamily="18" charset="0"/>
+                            <a:ea typeface="Arial" pitchFamily="34" charset="-122"/>
+                            <a:cs typeface="Arial" pitchFamily="34" charset="-120"/>
+                          </a:rPr>
+                          <m:t>𝑒</m:t>
+                        </m:r>
+                      </m:e>
+                      <m:sup>
+                        <m:r>
+                          <a:rPr lang="en-US" sz="1200" i="1" dirty="0" smtClean="0">
+                            <a:solidFill>
+                              <a:srgbClr val="6B7280"/>
+                            </a:solidFill>
+                            <a:latin typeface="Cambria Math" panose="02040503050406030204" pitchFamily="18" charset="0"/>
+                            <a:ea typeface="Arial" pitchFamily="34" charset="-122"/>
+                            <a:cs typeface="Arial" pitchFamily="34" charset="-120"/>
+                          </a:rPr>
+                          <m:t>−</m:t>
+                        </m:r>
+                        <m:r>
+                          <a:rPr lang="en-US" sz="1200" i="1" dirty="0" smtClean="0">
+                            <a:solidFill>
+                              <a:srgbClr val="6B7280"/>
+                            </a:solidFill>
+                            <a:latin typeface="Cambria Math" panose="02040503050406030204" pitchFamily="18" charset="0"/>
+                            <a:ea typeface="Arial" pitchFamily="34" charset="-122"/>
+                            <a:cs typeface="Arial" pitchFamily="34" charset="-120"/>
+                          </a:rPr>
+                          <m:t>𝑘</m:t>
+                        </m:r>
+                        <m:r>
+                          <a:rPr lang="en-US" sz="1200" i="1" dirty="0" smtClean="0">
+                            <a:solidFill>
+                              <a:srgbClr val="6B7280"/>
+                            </a:solidFill>
+                            <a:latin typeface="Cambria Math" panose="02040503050406030204" pitchFamily="18" charset="0"/>
+                            <a:ea typeface="Arial" pitchFamily="34" charset="-122"/>
+                            <a:cs typeface="Arial" pitchFamily="34" charset="-120"/>
+                          </a:rPr>
+                          <m:t>·</m:t>
+                        </m:r>
+                        <m:r>
+                          <a:rPr lang="en-US" sz="1200" i="1" dirty="0" smtClean="0">
+                            <a:solidFill>
+                              <a:srgbClr val="6B7280"/>
+                            </a:solidFill>
+                            <a:latin typeface="Cambria Math" panose="02040503050406030204" pitchFamily="18" charset="0"/>
+                            <a:ea typeface="Arial" pitchFamily="34" charset="-122"/>
+                            <a:cs typeface="Arial" pitchFamily="34" charset="-120"/>
+                          </a:rPr>
+                          <m:t>𝑑</m:t>
+                        </m:r>
+                      </m:sup>
+                    </m:sSup>
+                  </m:oMath>
+                </a14:m>
+                <a:endParaRPr lang="en-US" sz="1200" dirty="0"/>
+              </a:p>
+              <a:p>
+                <a:pPr marL="342900" indent="-342900">
+                  <a:buSzPct val="100000"/>
+                  <a:buChar char="•"/>
+                </a:pPr>
+                <a:r>
+                  <a:rPr lang="en-US" sz="1200" dirty="0">
+                    <a:solidFill>
+                      <a:srgbClr val="6B7280"/>
+                    </a:solidFill>
+                    <a:latin typeface="Arial" pitchFamily="34" charset="0"/>
+                    <a:ea typeface="Arial" pitchFamily="34" charset="-122"/>
+                    <a:cs typeface="Arial" pitchFamily="34" charset="-120"/>
+                  </a:rPr>
+                  <a:t>Planner prefers to stay far away</a:t>
+                </a:r>
+                <a:endParaRPr lang="en-US" sz="1200" dirty="0"/>
+              </a:p>
+            </p:txBody>
+          </p:sp>
+        </mc:Choice>
+        <mc:Fallback>
+          <p:sp>
+            <p:nvSpPr>
+              <p:cNvPr id="20" name="Text 18"/>
+              <p:cNvSpPr>
+                <a:spLocks noRot="1" noChangeAspect="1" noMove="1" noResize="1" noEditPoints="1" noAdjustHandles="1" noChangeArrowheads="1" noChangeShapeType="1" noTextEdit="1"/>
+              </p:cNvSpPr>
+              <p:nvPr/>
+            </p:nvSpPr>
+            <p:spPr>
+              <a:xfrm>
+                <a:off x="6291072" y="2176272"/>
+                <a:ext cx="2560320" cy="1417320"/>
+              </a:xfrm>
+              <a:prstGeom prst="rect">
+                <a:avLst/>
+              </a:prstGeom>
+              <a:blipFill>
+                <a:blip r:embed="rId3"/>
+                <a:stretch>
+                  <a:fillRect t="-429"/>
+                </a:stretch>
+              </a:blipFill>
+              <a:ln/>
+            </p:spPr>
+            <p:txBody>
+              <a:bodyPr/>
+              <a:lstStyle/>
+              <a:p>
+                <a:r>
+                  <a:rPr lang="en-US">
+                    <a:noFill/>
+                  </a:rPr>
+                  <a:t> </a:t>
+                </a:r>
+              </a:p>
+            </p:txBody>
+          </p:sp>
+        </mc:Fallback>
+      </mc:AlternateContent>
       <p:sp>
         <p:nvSpPr>
           <p:cNvPr id="21" name="Text 19"/>
@@ -17698,7 +19999,7 @@
         <p:spPr>
           <a:xfrm>
             <a:off x="274320" y="685800"/>
-            <a:ext cx="8595360" cy="822960"/>
+            <a:ext cx="8595360" cy="987552"/>
           </a:xfrm>
           <a:prstGeom prst="rect">
             <a:avLst/>
@@ -17780,37 +20081,85 @@
                 <a:ea typeface="Arial" pitchFamily="34" charset="-122"/>
                 <a:cs typeface="Arial" pitchFamily="34" charset="-120"/>
               </a:rPr>
-              <a:t>MediBot is localized (MOD-06) at the pharmacy. Perception (MOD-07) has detected: walls, 2 wheelchairs, 1 cart, and an open door to corridor B. Goal: reach Ward B. The map is known. How does MediBot plan a path that avoids all obstacles and reaches the goal?</a:t>
-            </a:r>
-            <a:endParaRPr lang="en-US" sz="1200" dirty="0"/>
-          </a:p>
-        </p:txBody>
-      </p:sp>
-      <p:sp>
-        <p:nvSpPr>
-          <p:cNvPr id="8" name="Text 6"/>
-          <p:cNvSpPr/>
-          <p:nvPr/>
-        </p:nvSpPr>
-        <p:spPr>
-          <a:xfrm>
-            <a:off x="365760" y="1691640"/>
-            <a:ext cx="8229600" cy="274320"/>
-          </a:xfrm>
-          <a:prstGeom prst="rect">
-            <a:avLst/>
-          </a:prstGeom>
-          <a:noFill/>
-          <a:ln/>
-        </p:spPr>
-        <p:txBody>
-          <a:bodyPr wrap="square" rtlCol="0" anchor="ctr"/>
-          <a:lstStyle/>
+              <a:t>MediBot is localized (MOD-06) at the pharmacy. </a:t>
+            </a:r>
+          </a:p>
           <a:p>
             <a:pPr marL="0" indent="0">
               <a:buNone/>
             </a:pPr>
             <a:r>
+              <a:rPr lang="en-US" sz="1200" dirty="0">
+                <a:solidFill>
+                  <a:srgbClr val="1F2937"/>
+                </a:solidFill>
+                <a:latin typeface="Arial" pitchFamily="34" charset="0"/>
+                <a:ea typeface="Arial" pitchFamily="34" charset="-122"/>
+                <a:cs typeface="Arial" pitchFamily="34" charset="-120"/>
+              </a:rPr>
+              <a:t>Perception (MOD-07) has detected: walls, 2 wheelchairs, 1 cart, and an open door to corridor B. </a:t>
+            </a:r>
+          </a:p>
+          <a:p>
+            <a:pPr marL="0" indent="0">
+              <a:buNone/>
+            </a:pPr>
+            <a:r>
+              <a:rPr lang="en-US" sz="1200" dirty="0">
+                <a:solidFill>
+                  <a:srgbClr val="1F2937"/>
+                </a:solidFill>
+                <a:latin typeface="Arial" pitchFamily="34" charset="0"/>
+                <a:ea typeface="Arial" pitchFamily="34" charset="-122"/>
+                <a:cs typeface="Arial" pitchFamily="34" charset="-120"/>
+              </a:rPr>
+              <a:t>Goal: reach Ward B. The map is known. </a:t>
+            </a:r>
+          </a:p>
+          <a:p>
+            <a:pPr marL="0" indent="0">
+              <a:buNone/>
+            </a:pPr>
+            <a:r>
+              <a:rPr lang="en-US" sz="1200" dirty="0">
+                <a:solidFill>
+                  <a:srgbClr val="1F2937"/>
+                </a:solidFill>
+                <a:latin typeface="Arial" pitchFamily="34" charset="0"/>
+                <a:ea typeface="Arial" pitchFamily="34" charset="-122"/>
+                <a:cs typeface="Arial" pitchFamily="34" charset="-120"/>
+              </a:rPr>
+              <a:t>How does MediBot plan a path that avoids all obstacles and reaches the goal?</a:t>
+            </a:r>
+            <a:endParaRPr lang="en-US" sz="1200" dirty="0"/>
+          </a:p>
+        </p:txBody>
+      </p:sp>
+      <p:sp>
+        <p:nvSpPr>
+          <p:cNvPr id="8" name="Text 6"/>
+          <p:cNvSpPr/>
+          <p:nvPr/>
+        </p:nvSpPr>
+        <p:spPr>
+          <a:xfrm>
+            <a:off x="365760" y="1797962"/>
+            <a:ext cx="8229600" cy="274320"/>
+          </a:xfrm>
+          <a:prstGeom prst="rect">
+            <a:avLst/>
+          </a:prstGeom>
+          <a:noFill/>
+          <a:ln/>
+        </p:spPr>
+        <p:txBody>
+          <a:bodyPr wrap="square" rtlCol="0" anchor="ctr"/>
+          <a:lstStyle/>
+          <a:p>
+            <a:pPr marL="0" indent="0">
+              <a:buNone/>
+            </a:pPr>
+            <a:r>
               <a:rPr lang="en-US" sz="1300" b="1" dirty="0">
                 <a:solidFill>
                   <a:srgbClr val="0F4C81"/>
@@ -17833,7 +20182,7 @@
         </p:nvSpPr>
         <p:spPr>
           <a:xfrm>
-            <a:off x="274320" y="2103120"/>
+            <a:off x="274320" y="2209442"/>
             <a:ext cx="4114800" cy="1371600"/>
           </a:xfrm>
           <a:prstGeom prst="rect">
@@ -17860,7 +20209,7 @@
         </p:nvSpPr>
         <p:spPr>
           <a:xfrm>
-            <a:off x="274320" y="2103120"/>
+            <a:off x="274320" y="2209442"/>
             <a:ext cx="54864" cy="1371600"/>
           </a:xfrm>
           <a:prstGeom prst="rect">
@@ -17880,7 +20229,7 @@
         </p:nvSpPr>
         <p:spPr>
           <a:xfrm>
-            <a:off x="438912" y="2157984"/>
+            <a:off x="438912" y="2264306"/>
             <a:ext cx="3840480" cy="274320"/>
           </a:xfrm>
           <a:prstGeom prst="rect">
@@ -17919,7 +20268,7 @@
         </p:nvSpPr>
         <p:spPr>
           <a:xfrm>
-            <a:off x="438912" y="2450592"/>
+            <a:off x="438912" y="2556914"/>
             <a:ext cx="3840480" cy="960120"/>
           </a:xfrm>
           <a:prstGeom prst="rect">
@@ -18013,7 +20362,7 @@
         </p:nvSpPr>
         <p:spPr>
           <a:xfrm>
-            <a:off x="4663440" y="2103120"/>
+            <a:off x="4663440" y="2209442"/>
             <a:ext cx="4206240" cy="1371600"/>
           </a:xfrm>
           <a:prstGeom prst="rect">
@@ -18040,7 +20389,7 @@
         </p:nvSpPr>
         <p:spPr>
           <a:xfrm>
-            <a:off x="4663440" y="2103120"/>
+            <a:off x="4663440" y="2209442"/>
             <a:ext cx="54864" cy="1371600"/>
           </a:xfrm>
           <a:prstGeom prst="rect">
@@ -18060,7 +20409,7 @@
         </p:nvSpPr>
         <p:spPr>
           <a:xfrm>
-            <a:off x="4828032" y="2157984"/>
+            <a:off x="4828032" y="2264306"/>
             <a:ext cx="3931920" cy="274320"/>
           </a:xfrm>
           <a:prstGeom prst="rect">
@@ -18099,7 +20448,7 @@
         </p:nvSpPr>
         <p:spPr>
           <a:xfrm>
-            <a:off x="4828032" y="2450592"/>
+            <a:off x="4828032" y="2556914"/>
             <a:ext cx="3931920" cy="960120"/>
           </a:xfrm>
           <a:prstGeom prst="rect">
@@ -18180,115 +20529,6 @@
                 <a:cs typeface="Arial" pitchFamily="34" charset="-120"/>
               </a:rPr>
               <a:t>And adapt if new obstacles appear</a:t>
-            </a:r>
-            <a:endParaRPr lang="en-US" sz="1200" dirty="0"/>
-          </a:p>
-        </p:txBody>
-      </p:sp>
-      <p:sp>
-        <p:nvSpPr>
-          <p:cNvPr id="17" name="Shape 15"/>
-          <p:cNvSpPr/>
-          <p:nvPr/>
-        </p:nvSpPr>
-        <p:spPr>
-          <a:xfrm>
-            <a:off x="457200" y="3749040"/>
-            <a:ext cx="411480" cy="411480"/>
-          </a:xfrm>
-          <a:prstGeom prst="ellipse">
-            <a:avLst/>
-          </a:prstGeom>
-          <a:solidFill>
-            <a:srgbClr val="3B82F6"/>
-          </a:solidFill>
-          <a:ln/>
-        </p:spPr>
-      </p:sp>
-      <p:sp>
-        <p:nvSpPr>
-          <p:cNvPr id="18" name="Text 16"/>
-          <p:cNvSpPr/>
-          <p:nvPr/>
-        </p:nvSpPr>
-        <p:spPr>
-          <a:xfrm>
-            <a:off x="457200" y="3767328"/>
-            <a:ext cx="411480" cy="384048"/>
-          </a:xfrm>
-          <a:prstGeom prst="rect">
-            <a:avLst/>
-          </a:prstGeom>
-          <a:noFill/>
-          <a:ln/>
-        </p:spPr>
-        <p:txBody>
-          <a:bodyPr wrap="square" rtlCol="0" anchor="ctr"/>
-          <a:lstStyle/>
-          <a:p>
-            <a:pPr marL="0" indent="0" algn="ctr">
-              <a:buNone/>
-            </a:pPr>
-            <a:r>
-              <a:rPr lang="en-US" sz="1400" b="1" dirty="0">
-                <a:solidFill>
-                  <a:srgbClr val="FFFFFF"/>
-                </a:solidFill>
-                <a:latin typeface="Arial" pitchFamily="34" charset="0"/>
-                <a:ea typeface="Arial" pitchFamily="34" charset="-122"/>
-                <a:cs typeface="Arial" pitchFamily="34" charset="-120"/>
-              </a:rPr>
-              <a:t>C</a:t>
-            </a:r>
-            <a:endParaRPr lang="en-US" sz="1400" dirty="0"/>
-          </a:p>
-        </p:txBody>
-      </p:sp>
-      <p:sp>
-        <p:nvSpPr>
-          <p:cNvPr id="19" name="Text 17"/>
-          <p:cNvSpPr/>
-          <p:nvPr/>
-        </p:nvSpPr>
-        <p:spPr>
-          <a:xfrm>
-            <a:off x="960120" y="3767328"/>
-            <a:ext cx="7680960" cy="365760"/>
-          </a:xfrm>
-          <a:prstGeom prst="rect">
-            <a:avLst/>
-          </a:prstGeom>
-          <a:noFill/>
-          <a:ln/>
-        </p:spPr>
-        <p:txBody>
-          <a:bodyPr wrap="square" rtlCol="0" anchor="ctr"/>
-          <a:lstStyle/>
-          <a:p>
-            <a:pPr marL="0" indent="0">
-              <a:buNone/>
-            </a:pPr>
-            <a:r>
-              <a:rPr lang="en-US" sz="1200" b="1" dirty="0">
-                <a:solidFill>
-                  <a:srgbClr val="3B82F6"/>
-                </a:solidFill>
-                <a:latin typeface="Arial" pitchFamily="34" charset="0"/>
-                <a:ea typeface="Arial" pitchFamily="34" charset="-122"/>
-                <a:cs typeface="Arial" pitchFamily="34" charset="-120"/>
-              </a:rPr>
-              <a:t>CONCEIVE: </a:t>
-            </a:r>
-            <a:r>
-              <a:rPr lang="en-US" sz="1200" dirty="0">
-                <a:solidFill>
-                  <a:srgbClr val="1F2937"/>
-                </a:solidFill>
-                <a:latin typeface="Arial" pitchFamily="34" charset="0"/>
-                <a:ea typeface="Arial" pitchFamily="34" charset="-122"/>
-                <a:cs typeface="Arial" pitchFamily="34" charset="-120"/>
-              </a:rPr>
-              <a:t>Planning bridges perception (what's around me) and action (where to go). Without it, the robot is blind but stuck.</a:t>
             </a:r>
             <a:endParaRPr lang="en-US" sz="1200" dirty="0"/>
           </a:p>
@@ -19567,6 +21807,17 @@
                                 </a:rPr>
                                 <m:t>𝜶</m:t>
                               </m:r>
+                              <m:r>
+                                <a:rPr lang="de-DE" sz="1400" b="1" i="1" dirty="0" smtClean="0">
+                                  <a:solidFill>
+                                    <a:srgbClr val="1E3A5F"/>
+                                  </a:solidFill>
+                                  <a:latin typeface="Cambria Math" panose="02040503050406030204" pitchFamily="18" charset="0"/>
+                                  <a:ea typeface="Arial" pitchFamily="34" charset="-122"/>
+                                  <a:cs typeface="Arial" pitchFamily="34" charset="-120"/>
+                                </a:rPr>
+                                <m:t>𝒏</m:t>
+                              </m:r>
                             </m:e>
                             <m:sub>
                               <m:r>
@@ -19704,6 +21955,17 @@
                                   <a:cs typeface="Arial" pitchFamily="34" charset="-120"/>
                                 </a:rPr>
                                 <m:t>𝜶</m:t>
+                              </m:r>
+                              <m:r>
+                                <a:rPr lang="de-DE" sz="1400" b="1" i="1" dirty="0" smtClean="0">
+                                  <a:solidFill>
+                                    <a:srgbClr val="1E3A5F"/>
+                                  </a:solidFill>
+                                  <a:latin typeface="Cambria Math" panose="02040503050406030204" pitchFamily="18" charset="0"/>
+                                  <a:ea typeface="Arial" pitchFamily="34" charset="-122"/>
+                                  <a:cs typeface="Arial" pitchFamily="34" charset="-120"/>
+                                </a:rPr>
+                                <m:t>𝒏</m:t>
                               </m:r>
                             </m:e>
                             <m:sub>
@@ -19939,6 +22201,17 @@
                           </a:rPr>
                           <m:t>𝛼</m:t>
                         </m:r>
+                        <m:r>
+                          <a:rPr lang="de-DE" sz="1200" b="0" i="1" dirty="0" smtClean="0">
+                            <a:solidFill>
+                              <a:srgbClr val="1F2937"/>
+                            </a:solidFill>
+                            <a:latin typeface="Cambria Math" panose="02040503050406030204" pitchFamily="18" charset="0"/>
+                            <a:ea typeface="Arial" pitchFamily="34" charset="-122"/>
+                            <a:cs typeface="Arial" pitchFamily="34" charset="-120"/>
+                          </a:rPr>
+                          <m:t>𝑛</m:t>
+                        </m:r>
                       </m:e>
                       <m:sub>
                         <m:r>
@@ -20225,8 +22498,8 @@
           </a:p>
         </p:txBody>
       </p:sp>
-      <mc:AlternateContent xmlns:mc="http://schemas.openxmlformats.org/markup-compatibility/2006">
-        <mc:Choice xmlns:a14="http://schemas.microsoft.com/office/drawing/2010/main" Requires="a14">
+      <mc:AlternateContent xmlns:mc="http://schemas.openxmlformats.org/markup-compatibility/2006" xmlns:a14="http://schemas.microsoft.com/office/drawing/2010/main">
+        <mc:Choice Requires="a14">
           <p:sp>
             <p:nvSpPr>
               <p:cNvPr id="12" name="Text 10"/>
@@ -20480,7 +22753,7 @@
             </p:txBody>
           </p:sp>
         </mc:Choice>
-        <mc:Fallback>
+        <mc:Fallback xmlns="">
           <p:sp>
             <p:nvSpPr>
               <p:cNvPr id="12" name="Text 10"/>
@@ -20606,8 +22879,8 @@
           </a:p>
         </p:txBody>
       </p:sp>
-      <mc:AlternateContent xmlns:mc="http://schemas.openxmlformats.org/markup-compatibility/2006">
-        <mc:Choice xmlns:a14="http://schemas.microsoft.com/office/drawing/2010/main" Requires="a14">
+      <mc:AlternateContent xmlns:mc="http://schemas.openxmlformats.org/markup-compatibility/2006" xmlns:a14="http://schemas.microsoft.com/office/drawing/2010/main">
+        <mc:Choice Requires="a14">
           <p:sp>
             <p:nvSpPr>
               <p:cNvPr id="16" name="Text 14"/>
@@ -21071,7 +23344,7 @@
             </p:txBody>
           </p:sp>
         </mc:Choice>
-        <mc:Fallback>
+        <mc:Fallback xmlns="">
           <p:sp>
             <p:nvSpPr>
               <p:cNvPr id="16" name="Text 14"/>
@@ -22064,7 +24337,7 @@
         <p:spPr>
           <a:xfrm>
             <a:off x="274320" y="1533920"/>
-            <a:ext cx="8595360" cy="841248"/>
+            <a:ext cx="8595360" cy="1037830"/>
           </a:xfrm>
           <a:prstGeom prst="rect">
             <a:avLst/>
@@ -22082,8 +24355,8 @@
           </a:effectLst>
         </p:spPr>
       </p:sp>
-      <mc:AlternateContent xmlns:mc="http://schemas.openxmlformats.org/markup-compatibility/2006">
-        <mc:Choice xmlns:a14="http://schemas.microsoft.com/office/drawing/2010/main" Requires="a14">
+      <mc:AlternateContent xmlns:mc="http://schemas.openxmlformats.org/markup-compatibility/2006" xmlns:a14="http://schemas.microsoft.com/office/drawing/2010/main">
+        <mc:Choice Requires="a14">
           <p:sp>
             <p:nvSpPr>
               <p:cNvPr id="9" name="Text 7"/>
@@ -22326,7 +24599,7 @@
             </p:txBody>
           </p:sp>
         </mc:Choice>
-        <mc:Fallback>
+        <mc:Fallback xmlns="">
           <p:sp>
             <p:nvSpPr>
               <p:cNvPr id="9" name="Text 7"/>
@@ -22374,8 +24647,8 @@
         </p:nvSpPr>
         <p:spPr>
           <a:xfrm>
-            <a:off x="411480" y="1784909"/>
-            <a:ext cx="8321040" cy="380390"/>
+            <a:off x="411480" y="1784908"/>
+            <a:ext cx="8321040" cy="786841"/>
           </a:xfrm>
           <a:prstGeom prst="rect">
             <a:avLst/>
@@ -22399,31 +24672,8 @@
                 <a:ea typeface="Arial" pitchFamily="34" charset="-122"/>
                 <a:cs typeface="Arial" pitchFamily="34" charset="-120"/>
               </a:rPr>
-              <a:t>4 coefficients per segment. Boundary conditions</a:t>
-            </a:r>
-            <a:r>
-              <a:rPr lang="en-US" sz="1200" b="1" dirty="0">
-                <a:solidFill>
-                  <a:srgbClr val="1F2937"/>
-                </a:solidFill>
-                <a:latin typeface="Arial" pitchFamily="34" charset="0"/>
-                <a:ea typeface="Arial" pitchFamily="34" charset="-122"/>
-                <a:cs typeface="Arial" pitchFamily="34" charset="-120"/>
-              </a:rPr>
-              <a:t>: positions match at waypoints, first and second derivatives continuous</a:t>
-            </a:r>
-            <a:r>
-              <a:rPr lang="en-US" sz="1200" dirty="0">
-                <a:solidFill>
-                  <a:srgbClr val="1F2937"/>
-                </a:solidFill>
-                <a:latin typeface="Arial" pitchFamily="34" charset="0"/>
-                <a:ea typeface="Arial" pitchFamily="34" charset="-122"/>
-                <a:cs typeface="Arial" pitchFamily="34" charset="-120"/>
-              </a:rPr>
-              <a:t>.</a:t>
-            </a:r>
-            <a:endParaRPr lang="en-US" sz="1200" dirty="0"/>
+              <a:t>4 coefficients per segment. </a:t>
+            </a:r>
           </a:p>
           <a:p>
             <a:pPr marL="0" indent="0">
@@ -22438,6 +24688,45 @@
                 <a:ea typeface="Arial" pitchFamily="34" charset="-122"/>
                 <a:cs typeface="Arial" pitchFamily="34" charset="-120"/>
               </a:rPr>
+              <a:t>Boundary conditions</a:t>
+            </a:r>
+            <a:r>
+              <a:rPr lang="en-US" sz="1200" b="1" dirty="0">
+                <a:solidFill>
+                  <a:srgbClr val="1F2937"/>
+                </a:solidFill>
+                <a:latin typeface="Arial" pitchFamily="34" charset="0"/>
+                <a:ea typeface="Arial" pitchFamily="34" charset="-122"/>
+                <a:cs typeface="Arial" pitchFamily="34" charset="-120"/>
+              </a:rPr>
+              <a:t>: positions match at waypoints, first and second derivatives continuous</a:t>
+            </a:r>
+            <a:r>
+              <a:rPr lang="en-US" sz="1200" dirty="0">
+                <a:solidFill>
+                  <a:srgbClr val="1F2937"/>
+                </a:solidFill>
+                <a:latin typeface="Arial" pitchFamily="34" charset="0"/>
+                <a:ea typeface="Arial" pitchFamily="34" charset="-122"/>
+                <a:cs typeface="Arial" pitchFamily="34" charset="-120"/>
+              </a:rPr>
+              <a:t>.</a:t>
+            </a:r>
+            <a:endParaRPr lang="en-US" sz="1200" dirty="0"/>
+          </a:p>
+          <a:p>
+            <a:pPr marL="0" indent="0">
+              <a:buNone/>
+            </a:pPr>
+            <a:r>
+              <a:rPr lang="en-US" sz="1200" dirty="0">
+                <a:solidFill>
+                  <a:srgbClr val="1F2937"/>
+                </a:solidFill>
+                <a:latin typeface="Arial" pitchFamily="34" charset="0"/>
+                <a:ea typeface="Arial" pitchFamily="34" charset="-122"/>
+                <a:cs typeface="Arial" pitchFamily="34" charset="-120"/>
+              </a:rPr>
               <a:t>Result: smooth C² curve (continuous position, velocity, and acceleration).</a:t>
             </a:r>
             <a:endParaRPr lang="en-US" sz="1200" dirty="0"/>
@@ -22452,7 +24741,7 @@
         </p:nvSpPr>
         <p:spPr>
           <a:xfrm>
-            <a:off x="274320" y="2455410"/>
+            <a:off x="274320" y="2838179"/>
             <a:ext cx="4114800" cy="1371600"/>
           </a:xfrm>
           <a:prstGeom prst="rect">
@@ -22479,7 +24768,7 @@
         </p:nvSpPr>
         <p:spPr>
           <a:xfrm>
-            <a:off x="274320" y="2455410"/>
+            <a:off x="274320" y="2838179"/>
             <a:ext cx="54864" cy="1371600"/>
           </a:xfrm>
           <a:prstGeom prst="rect">
@@ -22499,7 +24788,7 @@
         </p:nvSpPr>
         <p:spPr>
           <a:xfrm>
-            <a:off x="438912" y="2510274"/>
+            <a:off x="438912" y="2893043"/>
             <a:ext cx="3840480" cy="274320"/>
           </a:xfrm>
           <a:prstGeom prst="rect">
@@ -22538,7 +24827,7 @@
         </p:nvSpPr>
         <p:spPr>
           <a:xfrm>
-            <a:off x="438912" y="2802882"/>
+            <a:off x="438912" y="3185651"/>
             <a:ext cx="3840480" cy="960120"/>
           </a:xfrm>
           <a:prstGeom prst="rect">
@@ -22632,7 +24921,7 @@
         </p:nvSpPr>
         <p:spPr>
           <a:xfrm>
-            <a:off x="4663440" y="2455410"/>
+            <a:off x="4663440" y="2838179"/>
             <a:ext cx="4206240" cy="1371600"/>
           </a:xfrm>
           <a:prstGeom prst="rect">
@@ -22659,7 +24948,7 @@
         </p:nvSpPr>
         <p:spPr>
           <a:xfrm>
-            <a:off x="4663440" y="2455410"/>
+            <a:off x="4663440" y="2838179"/>
             <a:ext cx="54864" cy="1371600"/>
           </a:xfrm>
           <a:prstGeom prst="rect">
@@ -22679,7 +24968,7 @@
         </p:nvSpPr>
         <p:spPr>
           <a:xfrm>
-            <a:off x="4828032" y="2510274"/>
+            <a:off x="4828032" y="2893043"/>
             <a:ext cx="3931920" cy="274320"/>
           </a:xfrm>
           <a:prstGeom prst="rect">
@@ -22718,7 +25007,7 @@
         </p:nvSpPr>
         <p:spPr>
           <a:xfrm>
-            <a:off x="4828032" y="2802882"/>
+            <a:off x="4828032" y="3185651"/>
             <a:ext cx="3931920" cy="960120"/>
           </a:xfrm>
           <a:prstGeom prst="rect">
@@ -22812,7 +25101,7 @@
         </p:nvSpPr>
         <p:spPr>
           <a:xfrm>
-            <a:off x="365760" y="3931920"/>
+            <a:off x="365760" y="4314689"/>
             <a:ext cx="8412480" cy="274320"/>
           </a:xfrm>
           <a:prstGeom prst="rect">
@@ -23429,118 +25718,253 @@
           </a:p>
         </p:txBody>
       </p:sp>
-      <p:sp>
-        <p:nvSpPr>
-          <p:cNvPr id="13" name="Text 11"/>
-          <p:cNvSpPr/>
-          <p:nvPr/>
-        </p:nvSpPr>
-        <p:spPr>
-          <a:xfrm>
-            <a:off x="4828032" y="1399032"/>
-            <a:ext cx="3931920" cy="1051560"/>
-          </a:xfrm>
-          <a:prstGeom prst="rect">
-            <a:avLst/>
-          </a:prstGeom>
-          <a:noFill/>
-          <a:ln/>
-        </p:spPr>
-        <p:txBody>
-          <a:bodyPr wrap="square" rtlCol="0" anchor="t"/>
-          <a:lstStyle/>
-          <a:p>
-            <a:pPr marL="342900" indent="-342900">
-              <a:buSzPct val="100000"/>
-              <a:buChar char="•"/>
-            </a:pPr>
-            <a:r>
-              <a:rPr lang="en-US" sz="1200" dirty="0">
-                <a:solidFill>
-                  <a:srgbClr val="6B7280"/>
-                </a:solidFill>
-                <a:latin typeface="Arial" pitchFamily="34" charset="0"/>
-                <a:ea typeface="Arial" pitchFamily="34" charset="-122"/>
-                <a:cs typeface="Arial" pitchFamily="34" charset="-120"/>
-              </a:rPr>
-              <a:t>Check each path SEGMENT: x_near → x_new</a:t>
-            </a:r>
-            <a:endParaRPr lang="en-US" sz="1200" dirty="0"/>
-          </a:p>
-          <a:p>
-            <a:pPr marL="342900" indent="-342900">
-              <a:buSzPct val="100000"/>
-              <a:buChar char="•"/>
-            </a:pPr>
-            <a:r>
-              <a:rPr lang="en-US" sz="1200" dirty="0">
-                <a:solidFill>
-                  <a:srgbClr val="6B7280"/>
-                </a:solidFill>
-                <a:latin typeface="Arial" pitchFamily="34" charset="0"/>
-                <a:ea typeface="Arial" pitchFamily="34" charset="-122"/>
-                <a:cs typeface="Arial" pitchFamily="34" charset="-120"/>
-              </a:rPr>
-              <a:t>Sample points along segment at small intervals</a:t>
-            </a:r>
-            <a:endParaRPr lang="en-US" sz="1200" dirty="0"/>
-          </a:p>
-          <a:p>
-            <a:pPr marL="342900" indent="-342900">
-              <a:buSzPct val="100000"/>
-              <a:buChar char="•"/>
-            </a:pPr>
-            <a:r>
-              <a:rPr lang="en-US" sz="1200" dirty="0">
-                <a:solidFill>
-                  <a:srgbClr val="6B7280"/>
-                </a:solidFill>
-                <a:latin typeface="Arial" pitchFamily="34" charset="0"/>
-                <a:ea typeface="Arial" pitchFamily="34" charset="-122"/>
-                <a:cs typeface="Arial" pitchFamily="34" charset="-120"/>
-              </a:rPr>
-              <a:t>Check each point against obstacle map</a:t>
-            </a:r>
-            <a:endParaRPr lang="en-US" sz="1200" dirty="0"/>
-          </a:p>
-          <a:p>
-            <a:pPr marL="342900" indent="-342900">
-              <a:buSzPct val="100000"/>
-              <a:buChar char="•"/>
-            </a:pPr>
-            <a:r>
-              <a:rPr lang="en-US" sz="1200" dirty="0">
-                <a:solidFill>
-                  <a:srgbClr val="6B7280"/>
-                </a:solidFill>
-                <a:latin typeface="Arial" pitchFamily="34" charset="0"/>
-                <a:ea typeface="Arial" pitchFamily="34" charset="-122"/>
-                <a:cs typeface="Arial" pitchFamily="34" charset="-120"/>
-              </a:rPr>
-              <a:t>Critical: RRT generates random paths that could</a:t>
-            </a:r>
-            <a:endParaRPr lang="en-US" sz="1200" dirty="0"/>
-          </a:p>
-          <a:p>
-            <a:pPr marL="342900" indent="-342900">
-              <a:buSzPct val="100000"/>
-              <a:buChar char="•"/>
-            </a:pPr>
-            <a:r>
-              <a:rPr lang="en-US" sz="1200" dirty="0">
-                <a:solidFill>
-                  <a:srgbClr val="6B7280"/>
-                </a:solidFill>
-                <a:latin typeface="Arial" pitchFamily="34" charset="0"/>
-                <a:ea typeface="Arial" pitchFamily="34" charset="-122"/>
-                <a:cs typeface="Arial" pitchFamily="34" charset="-120"/>
-              </a:rPr>
-              <a:t>  pass through narrow gaps or obstacles</a:t>
-            </a:r>
-            <a:endParaRPr lang="en-US" sz="1200" dirty="0"/>
-          </a:p>
-        </p:txBody>
-      </p:sp>
+      <mc:AlternateContent xmlns:mc="http://schemas.openxmlformats.org/markup-compatibility/2006">
+        <mc:Choice xmlns:a14="http://schemas.microsoft.com/office/drawing/2010/main" Requires="a14">
+          <p:sp>
+            <p:nvSpPr>
+              <p:cNvPr id="13" name="Text 11"/>
+              <p:cNvSpPr/>
+              <p:nvPr/>
+            </p:nvSpPr>
+            <p:spPr>
+              <a:xfrm>
+                <a:off x="4828032" y="1399032"/>
+                <a:ext cx="3931920" cy="1051560"/>
+              </a:xfrm>
+              <a:prstGeom prst="rect">
+                <a:avLst/>
+              </a:prstGeom>
+              <a:noFill/>
+              <a:ln/>
+            </p:spPr>
+            <p:txBody>
+              <a:bodyPr wrap="square" rtlCol="0" anchor="t"/>
+              <a:lstStyle/>
+              <a:p>
+                <a:pPr marL="342900" indent="-342900">
+                  <a:buSzPct val="100000"/>
+                  <a:buChar char="•"/>
+                </a:pPr>
+                <a:r>
+                  <a:rPr lang="en-US" sz="1200" dirty="0">
+                    <a:solidFill>
+                      <a:srgbClr val="6B7280"/>
+                    </a:solidFill>
+                    <a:latin typeface="Arial" pitchFamily="34" charset="0"/>
+                    <a:ea typeface="Arial" pitchFamily="34" charset="-122"/>
+                    <a:cs typeface="Arial" pitchFamily="34" charset="-120"/>
+                  </a:rPr>
+                  <a:t>Check each path SEGMENT: </a:t>
+                </a:r>
+                <a14:m>
+                  <m:oMath xmlns:m="http://schemas.openxmlformats.org/officeDocument/2006/math">
+                    <m:sSub>
+                      <m:sSubPr>
+                        <m:ctrlPr>
+                          <a:rPr lang="en-US" sz="1200" i="1" dirty="0" smtClean="0">
+                            <a:solidFill>
+                              <a:srgbClr val="6B7280"/>
+                            </a:solidFill>
+                            <a:latin typeface="Cambria Math" panose="02040503050406030204" pitchFamily="18" charset="0"/>
+                            <a:ea typeface="Arial" pitchFamily="34" charset="-122"/>
+                            <a:cs typeface="Arial" pitchFamily="34" charset="-120"/>
+                          </a:rPr>
+                        </m:ctrlPr>
+                      </m:sSubPr>
+                      <m:e>
+                        <m:r>
+                          <a:rPr lang="en-US" sz="1200" i="1" dirty="0" smtClean="0">
+                            <a:solidFill>
+                              <a:srgbClr val="6B7280"/>
+                            </a:solidFill>
+                            <a:latin typeface="Cambria Math" panose="02040503050406030204" pitchFamily="18" charset="0"/>
+                            <a:ea typeface="Arial" pitchFamily="34" charset="-122"/>
+                            <a:cs typeface="Arial" pitchFamily="34" charset="-120"/>
+                          </a:rPr>
+                          <m:t>𝑥</m:t>
+                        </m:r>
+                      </m:e>
+                      <m:sub>
+                        <m:r>
+                          <a:rPr lang="en-US" sz="1200" i="1" dirty="0" smtClean="0">
+                            <a:solidFill>
+                              <a:srgbClr val="6B7280"/>
+                            </a:solidFill>
+                            <a:latin typeface="Cambria Math" panose="02040503050406030204" pitchFamily="18" charset="0"/>
+                            <a:ea typeface="Arial" pitchFamily="34" charset="-122"/>
+                            <a:cs typeface="Arial" pitchFamily="34" charset="-120"/>
+                          </a:rPr>
+                          <m:t>𝑛𝑒𝑎𝑟</m:t>
+                        </m:r>
+                      </m:sub>
+                    </m:sSub>
+                    <m:r>
+                      <a:rPr lang="en-US" sz="1200" i="1" dirty="0" smtClean="0">
+                        <a:solidFill>
+                          <a:srgbClr val="6B7280"/>
+                        </a:solidFill>
+                        <a:latin typeface="Cambria Math" panose="02040503050406030204" pitchFamily="18" charset="0"/>
+                        <a:ea typeface="Arial" pitchFamily="34" charset="-122"/>
+                        <a:cs typeface="Arial" pitchFamily="34" charset="-120"/>
+                      </a:rPr>
+                      <m:t>→ </m:t>
+                    </m:r>
+                    <m:sSub>
+                      <m:sSubPr>
+                        <m:ctrlPr>
+                          <a:rPr lang="en-US" sz="1200" i="1" dirty="0" smtClean="0">
+                            <a:solidFill>
+                              <a:srgbClr val="6B7280"/>
+                            </a:solidFill>
+                            <a:latin typeface="Cambria Math" panose="02040503050406030204" pitchFamily="18" charset="0"/>
+                            <a:ea typeface="Arial" pitchFamily="34" charset="-122"/>
+                            <a:cs typeface="Arial" pitchFamily="34" charset="-120"/>
+                          </a:rPr>
+                        </m:ctrlPr>
+                      </m:sSubPr>
+                      <m:e>
+                        <m:r>
+                          <a:rPr lang="en-US" sz="1200" i="1" dirty="0" smtClean="0">
+                            <a:solidFill>
+                              <a:srgbClr val="6B7280"/>
+                            </a:solidFill>
+                            <a:latin typeface="Cambria Math" panose="02040503050406030204" pitchFamily="18" charset="0"/>
+                            <a:ea typeface="Arial" pitchFamily="34" charset="-122"/>
+                            <a:cs typeface="Arial" pitchFamily="34" charset="-120"/>
+                          </a:rPr>
+                          <m:t>𝑥</m:t>
+                        </m:r>
+                      </m:e>
+                      <m:sub>
+                        <m:r>
+                          <a:rPr lang="en-US" sz="1200" i="1" dirty="0" smtClean="0">
+                            <a:solidFill>
+                              <a:srgbClr val="6B7280"/>
+                            </a:solidFill>
+                            <a:latin typeface="Cambria Math" panose="02040503050406030204" pitchFamily="18" charset="0"/>
+                            <a:ea typeface="Arial" pitchFamily="34" charset="-122"/>
+                            <a:cs typeface="Arial" pitchFamily="34" charset="-120"/>
+                          </a:rPr>
+                          <m:t>𝑛𝑒𝑤</m:t>
+                        </m:r>
+                      </m:sub>
+                    </m:sSub>
+                  </m:oMath>
+                </a14:m>
+                <a:endParaRPr lang="en-US" sz="1200" dirty="0"/>
+              </a:p>
+              <a:p>
+                <a:pPr marL="342900" indent="-342900">
+                  <a:buSzPct val="100000"/>
+                  <a:buChar char="•"/>
+                </a:pPr>
+                <a:r>
+                  <a:rPr lang="en-US" sz="1200" dirty="0">
+                    <a:solidFill>
+                      <a:srgbClr val="6B7280"/>
+                    </a:solidFill>
+                    <a:latin typeface="Arial" pitchFamily="34" charset="0"/>
+                    <a:ea typeface="Arial" pitchFamily="34" charset="-122"/>
+                    <a:cs typeface="Arial" pitchFamily="34" charset="-120"/>
+                  </a:rPr>
+                  <a:t>Sample points along segment at small intervals</a:t>
+                </a:r>
+                <a:endParaRPr lang="en-US" sz="1200" dirty="0"/>
+              </a:p>
+              <a:p>
+                <a:pPr marL="342900" indent="-342900">
+                  <a:buSzPct val="100000"/>
+                  <a:buChar char="•"/>
+                </a:pPr>
+                <a:r>
+                  <a:rPr lang="en-US" sz="1200" dirty="0">
+                    <a:solidFill>
+                      <a:srgbClr val="6B7280"/>
+                    </a:solidFill>
+                    <a:latin typeface="Arial" pitchFamily="34" charset="0"/>
+                    <a:ea typeface="Arial" pitchFamily="34" charset="-122"/>
+                    <a:cs typeface="Arial" pitchFamily="34" charset="-120"/>
+                  </a:rPr>
+                  <a:t>Check each point against obstacle map</a:t>
+                </a:r>
+                <a:endParaRPr lang="en-US" sz="1200" dirty="0"/>
+              </a:p>
+              <a:p>
+                <a:pPr marL="342900" indent="-342900">
+                  <a:buSzPct val="100000"/>
+                  <a:buChar char="•"/>
+                </a:pPr>
+                <a:r>
+                  <a:rPr lang="en-US" sz="1200" dirty="0">
+                    <a:solidFill>
+                      <a:srgbClr val="6B7280"/>
+                    </a:solidFill>
+                    <a:latin typeface="Arial" pitchFamily="34" charset="0"/>
+                    <a:ea typeface="Arial" pitchFamily="34" charset="-122"/>
+                    <a:cs typeface="Arial" pitchFamily="34" charset="-120"/>
+                  </a:rPr>
+                  <a:t>Critical: RRT generates random paths that could</a:t>
+                </a:r>
+                <a:r>
+                  <a:rPr lang="en-US" sz="1200" dirty="0"/>
+                  <a:t> </a:t>
+                </a:r>
+                <a:r>
+                  <a:rPr lang="en-US" sz="1200" dirty="0">
+                    <a:solidFill>
+                      <a:srgbClr val="6B7280"/>
+                    </a:solidFill>
+                    <a:latin typeface="Arial" pitchFamily="34" charset="0"/>
+                    <a:ea typeface="Arial" pitchFamily="34" charset="-122"/>
+                    <a:cs typeface="Arial" pitchFamily="34" charset="-120"/>
+                  </a:rPr>
+                  <a:t>pass through narrow gaps or obstacles</a:t>
+                </a:r>
+                <a:endParaRPr lang="en-US" sz="1200" dirty="0"/>
+              </a:p>
+            </p:txBody>
+          </p:sp>
+        </mc:Choice>
+        <mc:Fallback>
+          <p:sp>
+            <p:nvSpPr>
+              <p:cNvPr id="13" name="Text 11"/>
+              <p:cNvSpPr>
+                <a:spLocks noRot="1" noChangeAspect="1" noMove="1" noResize="1" noEditPoints="1" noAdjustHandles="1" noChangeArrowheads="1" noChangeShapeType="1" noTextEdit="1"/>
+              </p:cNvSpPr>
+              <p:nvPr/>
+            </p:nvSpPr>
+            <p:spPr>
+              <a:xfrm>
+                <a:off x="4828032" y="1399032"/>
+                <a:ext cx="3931920" cy="1051560"/>
+              </a:xfrm>
+              <a:prstGeom prst="rect">
+                <a:avLst/>
+              </a:prstGeom>
+              <a:blipFill>
+                <a:blip r:embed="rId3"/>
+                <a:stretch>
+                  <a:fillRect t="-1163"/>
+                </a:stretch>
+              </a:blipFill>
+              <a:ln/>
+            </p:spPr>
+            <p:txBody>
+              <a:bodyPr/>
+              <a:lstStyle/>
+              <a:p>
+                <a:r>
+                  <a:rPr lang="en-US">
+                    <a:noFill/>
+                  </a:rPr>
+                  <a:t> </a:t>
+                </a:r>
+              </a:p>
+            </p:txBody>
+          </p:sp>
+        </mc:Fallback>
+      </mc:AlternateContent>
       <p:sp>
         <p:nvSpPr>
           <p:cNvPr id="14" name="Text 12"/>
@@ -23549,8 +25973,8 @@
         </p:nvSpPr>
         <p:spPr>
           <a:xfrm>
-            <a:off x="365760" y="2743200"/>
-            <a:ext cx="8412480" cy="548640"/>
+            <a:off x="365760" y="2743199"/>
+            <a:ext cx="8412480" cy="1119963"/>
           </a:xfrm>
           <a:prstGeom prst="rect">
             <a:avLst/>
@@ -23576,6 +26000,11 @@
               </a:rPr>
               <a:t>Key methods: </a:t>
             </a:r>
+          </a:p>
+          <a:p>
+            <a:pPr marL="0" indent="0">
+              <a:buNone/>
+            </a:pPr>
             <a:r>
               <a:rPr lang="en-US" sz="1200" dirty="0">
                 <a:solidFill>
@@ -23585,7 +26014,66 @@
                 <a:ea typeface="Arial" pitchFamily="34" charset="-122"/>
                 <a:cs typeface="Arial" pitchFamily="34" charset="-120"/>
               </a:rPr>
-              <a:t>Point-in-polygon (is point inside obstacle?), line-segment intersection (does path cross obstacle boundary?), swept volume (does robot body sweep through obstacle along path?). For costmaps: just check costmap cell value at each point.</a:t>
+              <a:t>Point-in-polygon (is point inside obstacle?), </a:t>
+            </a:r>
+          </a:p>
+          <a:p>
+            <a:pPr marL="0" indent="0">
+              <a:buNone/>
+            </a:pPr>
+            <a:r>
+              <a:rPr lang="en-US" sz="1200" dirty="0">
+                <a:solidFill>
+                  <a:srgbClr val="1F2937"/>
+                </a:solidFill>
+                <a:latin typeface="Arial" pitchFamily="34" charset="0"/>
+                <a:ea typeface="Arial" pitchFamily="34" charset="-122"/>
+                <a:cs typeface="Arial" pitchFamily="34" charset="-120"/>
+              </a:rPr>
+              <a:t>Line-segment intersection (does path cross obstacle boundary?), </a:t>
+            </a:r>
+          </a:p>
+          <a:p>
+            <a:pPr marL="0" indent="0">
+              <a:buNone/>
+            </a:pPr>
+            <a:r>
+              <a:rPr lang="en-US" sz="1200" dirty="0">
+                <a:solidFill>
+                  <a:srgbClr val="1F2937"/>
+                </a:solidFill>
+                <a:latin typeface="Arial" pitchFamily="34" charset="0"/>
+                <a:ea typeface="Arial" pitchFamily="34" charset="-122"/>
+                <a:cs typeface="Arial" pitchFamily="34" charset="-120"/>
+              </a:rPr>
+              <a:t>Swept volume (does robot body sweep through obstacle along path?). </a:t>
+            </a:r>
+          </a:p>
+          <a:p>
+            <a:pPr marL="0" indent="0">
+              <a:buNone/>
+            </a:pPr>
+            <a:r>
+              <a:rPr lang="en-US" sz="1200" b="1" dirty="0">
+                <a:solidFill>
+                  <a:srgbClr val="1F2937"/>
+                </a:solidFill>
+                <a:latin typeface="Arial" pitchFamily="34" charset="0"/>
+                <a:ea typeface="Arial" pitchFamily="34" charset="-122"/>
+                <a:cs typeface="Arial" pitchFamily="34" charset="-120"/>
+              </a:rPr>
+              <a:t>For costmaps: </a:t>
+            </a:r>
+            <a:r>
+              <a:rPr lang="en-US" sz="1200" dirty="0">
+                <a:solidFill>
+                  <a:srgbClr val="1F2937"/>
+                </a:solidFill>
+                <a:latin typeface="Arial" pitchFamily="34" charset="0"/>
+                <a:ea typeface="Arial" pitchFamily="34" charset="-122"/>
+                <a:cs typeface="Arial" pitchFamily="34" charset="-120"/>
+              </a:rPr>
+              <a:t>just check costmap cell value at each point.</a:t>
             </a:r>
             <a:endParaRPr lang="en-US" sz="1200" dirty="0"/>
           </a:p>
@@ -23905,7 +26393,7 @@
                 <a:ea typeface="Arial" pitchFamily="34" charset="-122"/>
                 <a:cs typeface="Arial" pitchFamily="34" charset="-120"/>
               </a:rPr>
-              <a:t>Nav2 is the standard navigation framework in ROS 2. It integrates everything in MOD-08.</a:t>
+              <a:t>Nav2 is the standard navigation framework in ROS 2.</a:t>
             </a:r>
             <a:endParaRPr lang="en-US" sz="1300" dirty="0"/>
           </a:p>
@@ -25349,7 +27837,7 @@
         </p:nvSpPr>
         <p:spPr>
           <a:xfrm>
-            <a:off x="4389119" y="3086100"/>
+            <a:off x="4439093" y="3776261"/>
             <a:ext cx="881793" cy="274320"/>
           </a:xfrm>
           <a:prstGeom prst="rect">
@@ -25368,7 +27856,7 @@
             <a:r>
               <a:rPr lang="en-US" sz="1200" b="1" dirty="0">
                 <a:solidFill>
-                  <a:srgbClr val="EF4444"/>
+                  <a:srgbClr val="C00000"/>
                 </a:solidFill>
                 <a:latin typeface="Arial" pitchFamily="34" charset="0"/>
                 <a:ea typeface="Arial" pitchFamily="34" charset="-122"/>
@@ -25376,7 +27864,11 @@
               </a:rPr>
               <a:t>Person!</a:t>
             </a:r>
-            <a:endParaRPr lang="en-US" sz="1200" dirty="0"/>
+            <a:endParaRPr lang="en-US" sz="1200" dirty="0">
+              <a:solidFill>
+                <a:srgbClr val="C00000"/>
+              </a:solidFill>
+            </a:endParaRPr>
           </a:p>
         </p:txBody>
       </p:sp>
@@ -25406,6 +27898,13 @@
             <a:prstDash val="solid"/>
           </a:ln>
         </p:spPr>
+        <p:txBody>
+          <a:bodyPr/>
+          <a:lstStyle/>
+          <a:p>
+            <a:endParaRPr lang="en-US"/>
+          </a:p>
+        </p:txBody>
       </p:sp>
       <p:sp>
         <p:nvSpPr>
@@ -28645,65 +31144,6 @@
       </p:sp>
       <p:sp>
         <p:nvSpPr>
-          <p:cNvPr id="7" name="Shape 4"/>
-          <p:cNvSpPr/>
-          <p:nvPr/>
-        </p:nvSpPr>
-        <p:spPr>
-          <a:xfrm>
-            <a:off x="457200" y="3840480"/>
-            <a:ext cx="411480" cy="411480"/>
-          </a:xfrm>
-          <a:prstGeom prst="ellipse">
-            <a:avLst/>
-          </a:prstGeom>
-          <a:solidFill>
-            <a:srgbClr val="10B981"/>
-          </a:solidFill>
-          <a:ln/>
-        </p:spPr>
-      </p:sp>
-      <p:sp>
-        <p:nvSpPr>
-          <p:cNvPr id="8" name="Text 5"/>
-          <p:cNvSpPr/>
-          <p:nvPr/>
-        </p:nvSpPr>
-        <p:spPr>
-          <a:xfrm>
-            <a:off x="457200" y="3858768"/>
-            <a:ext cx="411480" cy="384048"/>
-          </a:xfrm>
-          <a:prstGeom prst="rect">
-            <a:avLst/>
-          </a:prstGeom>
-          <a:noFill/>
-          <a:ln/>
-        </p:spPr>
-        <p:txBody>
-          <a:bodyPr wrap="square" rtlCol="0" anchor="ctr"/>
-          <a:lstStyle/>
-          <a:p>
-            <a:pPr marL="0" indent="0" algn="ctr">
-              <a:buNone/>
-            </a:pPr>
-            <a:r>
-              <a:rPr lang="en-US" sz="1400" b="1" dirty="0">
-                <a:solidFill>
-                  <a:srgbClr val="FFFFFF"/>
-                </a:solidFill>
-                <a:latin typeface="Arial" pitchFamily="34" charset="0"/>
-                <a:ea typeface="Arial" pitchFamily="34" charset="-122"/>
-                <a:cs typeface="Arial" pitchFamily="34" charset="-120"/>
-              </a:rPr>
-              <a:t>I</a:t>
-            </a:r>
-            <a:endParaRPr lang="en-US" sz="1400" dirty="0"/>
-          </a:p>
-        </p:txBody>
-      </p:sp>
-      <p:sp>
-        <p:nvSpPr>
           <p:cNvPr id="9" name="Text 6"/>
           <p:cNvSpPr/>
           <p:nvPr/>
@@ -28726,17 +31166,6 @@
             <a:pPr marL="0" indent="0">
               <a:buNone/>
             </a:pPr>
-            <a:r>
-              <a:rPr lang="en-US" sz="1200" b="1" dirty="0">
-                <a:solidFill>
-                  <a:srgbClr val="10B981"/>
-                </a:solidFill>
-                <a:latin typeface="Arial" pitchFamily="34" charset="0"/>
-                <a:ea typeface="Arial" pitchFamily="34" charset="-122"/>
-                <a:cs typeface="Arial" pitchFamily="34" charset="-120"/>
-              </a:rPr>
-              <a:t>IMPLEMENT: </a:t>
-            </a:r>
             <a:r>
               <a:rPr lang="en-US" sz="1200" dirty="0">
                 <a:solidFill>
@@ -32063,7 +34492,7 @@
 </file>
 
 <file path=ppt/slides/slide47.xml><?xml version="1.0" encoding="utf-8"?>
-<p:sld xmlns:a="http://schemas.openxmlformats.org/drawingml/2006/main" xmlns:r="http://schemas.openxmlformats.org/officeDocument/2006/relationships" xmlns:p="http://schemas.openxmlformats.org/presentationml/2006/main" show="0">
+<p:sld xmlns:a="http://schemas.openxmlformats.org/drawingml/2006/main" xmlns:r="http://schemas.openxmlformats.org/officeDocument/2006/relationships" xmlns:p="http://schemas.openxmlformats.org/presentationml/2006/main">
   <p:cSld name="Slide 48">
     <p:bg>
       <p:bgPr>
@@ -33701,7 +36130,7 @@
         <p:spPr>
           <a:xfrm>
             <a:off x="274320" y="685800"/>
-            <a:ext cx="8595360" cy="640080"/>
+            <a:ext cx="8595360" cy="749808"/>
           </a:xfrm>
           <a:prstGeom prst="rect">
             <a:avLst/>
@@ -33747,8 +36176,8 @@
         </p:nvSpPr>
         <p:spPr>
           <a:xfrm>
-            <a:off x="457200" y="758952"/>
-            <a:ext cx="8275320" cy="502920"/>
+            <a:off x="457200" y="758951"/>
+            <a:ext cx="8275320" cy="516955"/>
           </a:xfrm>
           <a:prstGeom prst="rect">
             <a:avLst/>
@@ -33783,7 +36212,39 @@
                 <a:ea typeface="Arial" pitchFamily="34" charset="-122"/>
                 <a:cs typeface="Arial" pitchFamily="34" charset="-120"/>
               </a:rPr>
-              <a:t>MediBot is 0.4m wide. The doorway to corridor B is 0.9m wide. On the map, the path looks clear — but will MediBot actually FIT with safety margin? We need to account for the robot's physical size.</a:t>
+              <a:t>MediBot is 0.4m wide. The doorway to corridor B is 0.9m wide. </a:t>
+            </a:r>
+          </a:p>
+          <a:p>
+            <a:pPr marL="0" indent="0">
+              <a:buNone/>
+            </a:pPr>
+            <a:r>
+              <a:rPr lang="en-US" sz="1200" dirty="0">
+                <a:solidFill>
+                  <a:srgbClr val="1F2937"/>
+                </a:solidFill>
+                <a:latin typeface="Arial" pitchFamily="34" charset="0"/>
+                <a:ea typeface="Arial" pitchFamily="34" charset="-122"/>
+                <a:cs typeface="Arial" pitchFamily="34" charset="-120"/>
+              </a:rPr>
+              <a:t>On the map, the path looks clear — but will MediBot actually FIT with safety margin? </a:t>
+            </a:r>
+          </a:p>
+          <a:p>
+            <a:pPr marL="0" indent="0">
+              <a:buNone/>
+            </a:pPr>
+            <a:r>
+              <a:rPr lang="en-US" sz="1200" dirty="0">
+                <a:solidFill>
+                  <a:srgbClr val="1F2937"/>
+                </a:solidFill>
+                <a:latin typeface="Arial" pitchFamily="34" charset="0"/>
+                <a:ea typeface="Arial" pitchFamily="34" charset="-122"/>
+                <a:cs typeface="Arial" pitchFamily="34" charset="-120"/>
+              </a:rPr>
+              <a:t>We need to account for the robot's physical size.</a:t>
             </a:r>
             <a:endParaRPr lang="en-US" sz="1200" dirty="0"/>
           </a:p>
@@ -33797,7 +36258,7 @@
         </p:nvSpPr>
         <p:spPr>
           <a:xfrm>
-            <a:off x="274320" y="1463040"/>
+            <a:off x="274320" y="1796189"/>
             <a:ext cx="8595360" cy="804672"/>
           </a:xfrm>
           <a:prstGeom prst="rect">
@@ -33824,7 +36285,7 @@
         </p:nvSpPr>
         <p:spPr>
           <a:xfrm>
-            <a:off x="411480" y="1508760"/>
+            <a:off x="411480" y="1841909"/>
             <a:ext cx="8321040" cy="307238"/>
           </a:xfrm>
           <a:prstGeom prst="rect">
@@ -33863,7 +36324,7 @@
         </p:nvSpPr>
         <p:spPr>
           <a:xfrm>
-            <a:off x="411480" y="1784909"/>
+            <a:off x="411480" y="2118058"/>
             <a:ext cx="8321040" cy="380390"/>
           </a:xfrm>
           <a:prstGeom prst="rect">
@@ -33919,7 +36380,7 @@
         </p:nvSpPr>
         <p:spPr>
           <a:xfrm>
-            <a:off x="274320" y="2377440"/>
+            <a:off x="274320" y="2710589"/>
             <a:ext cx="4114800" cy="1371600"/>
           </a:xfrm>
           <a:prstGeom prst="rect">
@@ -33946,7 +36407,7 @@
         </p:nvSpPr>
         <p:spPr>
           <a:xfrm>
-            <a:off x="274320" y="2377440"/>
+            <a:off x="274320" y="2710589"/>
             <a:ext cx="54864" cy="1371600"/>
           </a:xfrm>
           <a:prstGeom prst="rect">
@@ -33966,7 +36427,7 @@
         </p:nvSpPr>
         <p:spPr>
           <a:xfrm>
-            <a:off x="438912" y="2432304"/>
+            <a:off x="438912" y="2765453"/>
             <a:ext cx="3840480" cy="274320"/>
           </a:xfrm>
           <a:prstGeom prst="rect">
@@ -34005,7 +36466,7 @@
         </p:nvSpPr>
         <p:spPr>
           <a:xfrm>
-            <a:off x="438912" y="2724912"/>
+            <a:off x="438912" y="3058061"/>
             <a:ext cx="3840480" cy="960120"/>
           </a:xfrm>
           <a:prstGeom prst="rect">
@@ -34099,7 +36560,7 @@
         </p:nvSpPr>
         <p:spPr>
           <a:xfrm>
-            <a:off x="4663440" y="2377440"/>
+            <a:off x="4663440" y="2710589"/>
             <a:ext cx="4206240" cy="1371600"/>
           </a:xfrm>
           <a:prstGeom prst="rect">
@@ -34126,7 +36587,7 @@
         </p:nvSpPr>
         <p:spPr>
           <a:xfrm>
-            <a:off x="4663440" y="2377440"/>
+            <a:off x="4663440" y="2710589"/>
             <a:ext cx="54864" cy="1371600"/>
           </a:xfrm>
           <a:prstGeom prst="rect">
@@ -34146,7 +36607,7 @@
         </p:nvSpPr>
         <p:spPr>
           <a:xfrm>
-            <a:off x="4828032" y="2432304"/>
+            <a:off x="4828032" y="2765453"/>
             <a:ext cx="3931920" cy="274320"/>
           </a:xfrm>
           <a:prstGeom prst="rect">
@@ -34185,7 +36646,7 @@
         </p:nvSpPr>
         <p:spPr>
           <a:xfrm>
-            <a:off x="4828032" y="2724912"/>
+            <a:off x="4828032" y="3058061"/>
             <a:ext cx="3931920" cy="960120"/>
           </a:xfrm>
           <a:prstGeom prst="rect">
@@ -34279,7 +36740,7 @@
         </p:nvSpPr>
         <p:spPr>
           <a:xfrm>
-            <a:off x="365760" y="3931920"/>
+            <a:off x="365760" y="4265069"/>
             <a:ext cx="8412480" cy="274320"/>
           </a:xfrm>
           <a:prstGeom prst="rect">
